--- a/results/agent_trace/fig_kv_occupancy.pptx
+++ b/results/agent_trace/fig_kv_occupancy.pptx
@@ -172,577 +172,577 @@
                 <c:formatCode>General</c:formatCode>
                 <c:ptCount val="191"/>
                 <c:pt idx="0">
-                  <c:v>4</c:v>
+                  <c:v>6</c:v>
                 </c:pt>
                 <c:pt idx="1">
-                  <c:v>32</c:v>
+                  <c:v>34</c:v>
                 </c:pt>
                 <c:pt idx="2">
-                  <c:v>60</c:v>
+                  <c:v>62</c:v>
                 </c:pt>
                 <c:pt idx="3">
-                  <c:v>88</c:v>
+                  <c:v>90</c:v>
                 </c:pt>
                 <c:pt idx="4">
-                  <c:v>116</c:v>
+                  <c:v>118</c:v>
                 </c:pt>
                 <c:pt idx="5">
-                  <c:v>144</c:v>
+                  <c:v>146</c:v>
                 </c:pt>
                 <c:pt idx="6">
-                  <c:v>172</c:v>
+                  <c:v>174</c:v>
                 </c:pt>
                 <c:pt idx="7">
-                  <c:v>200</c:v>
+                  <c:v>202</c:v>
                 </c:pt>
                 <c:pt idx="8">
-                  <c:v>228</c:v>
+                  <c:v>230</c:v>
                 </c:pt>
                 <c:pt idx="9">
-                  <c:v>256</c:v>
+                  <c:v>258</c:v>
                 </c:pt>
                 <c:pt idx="10">
-                  <c:v>284</c:v>
+                  <c:v>286</c:v>
                 </c:pt>
                 <c:pt idx="11">
-                  <c:v>312</c:v>
+                  <c:v>314</c:v>
                 </c:pt>
                 <c:pt idx="12">
-                  <c:v>340</c:v>
+                  <c:v>342</c:v>
                 </c:pt>
                 <c:pt idx="13">
-                  <c:v>368</c:v>
+                  <c:v>370</c:v>
                 </c:pt>
                 <c:pt idx="14">
-                  <c:v>396</c:v>
+                  <c:v>398</c:v>
                 </c:pt>
                 <c:pt idx="15">
-                  <c:v>424</c:v>
+                  <c:v>426</c:v>
                 </c:pt>
                 <c:pt idx="16">
-                  <c:v>452</c:v>
+                  <c:v>454</c:v>
                 </c:pt>
                 <c:pt idx="17">
-                  <c:v>480</c:v>
+                  <c:v>482</c:v>
                 </c:pt>
                 <c:pt idx="18">
-                  <c:v>508</c:v>
+                  <c:v>510</c:v>
                 </c:pt>
                 <c:pt idx="19">
-                  <c:v>536</c:v>
+                  <c:v>538</c:v>
                 </c:pt>
                 <c:pt idx="20">
-                  <c:v>564</c:v>
+                  <c:v>566</c:v>
                 </c:pt>
                 <c:pt idx="21">
-                  <c:v>592</c:v>
+                  <c:v>594</c:v>
                 </c:pt>
                 <c:pt idx="22">
-                  <c:v>620</c:v>
+                  <c:v>622</c:v>
                 </c:pt>
                 <c:pt idx="23">
-                  <c:v>648</c:v>
+                  <c:v>650</c:v>
                 </c:pt>
                 <c:pt idx="24">
-                  <c:v>676</c:v>
+                  <c:v>678</c:v>
                 </c:pt>
                 <c:pt idx="25">
-                  <c:v>704</c:v>
+                  <c:v>706</c:v>
                 </c:pt>
                 <c:pt idx="26">
-                  <c:v>732</c:v>
+                  <c:v>734</c:v>
                 </c:pt>
                 <c:pt idx="27">
-                  <c:v>760</c:v>
+                  <c:v>762</c:v>
                 </c:pt>
                 <c:pt idx="28">
-                  <c:v>788</c:v>
+                  <c:v>790</c:v>
                 </c:pt>
                 <c:pt idx="29">
-                  <c:v>816</c:v>
+                  <c:v>818</c:v>
                 </c:pt>
                 <c:pt idx="30">
-                  <c:v>844</c:v>
+                  <c:v>846</c:v>
                 </c:pt>
                 <c:pt idx="31">
-                  <c:v>872</c:v>
+                  <c:v>874</c:v>
                 </c:pt>
                 <c:pt idx="32">
-                  <c:v>900</c:v>
+                  <c:v>902</c:v>
                 </c:pt>
                 <c:pt idx="33">
-                  <c:v>928</c:v>
+                  <c:v>930</c:v>
                 </c:pt>
                 <c:pt idx="34">
-                  <c:v>956</c:v>
+                  <c:v>958</c:v>
                 </c:pt>
                 <c:pt idx="35">
-                  <c:v>984</c:v>
+                  <c:v>986</c:v>
                 </c:pt>
                 <c:pt idx="36">
-                  <c:v>1012</c:v>
+                  <c:v>1014</c:v>
                 </c:pt>
                 <c:pt idx="37">
-                  <c:v>1040</c:v>
+                  <c:v>1042</c:v>
                 </c:pt>
                 <c:pt idx="38">
-                  <c:v>1068</c:v>
+                  <c:v>1070</c:v>
                 </c:pt>
                 <c:pt idx="39">
-                  <c:v>1096</c:v>
+                  <c:v>1098</c:v>
                 </c:pt>
                 <c:pt idx="40">
-                  <c:v>1124</c:v>
+                  <c:v>1126</c:v>
                 </c:pt>
                 <c:pt idx="41">
-                  <c:v>1152</c:v>
+                  <c:v>1154</c:v>
                 </c:pt>
                 <c:pt idx="42">
-                  <c:v>1180</c:v>
+                  <c:v>1182</c:v>
                 </c:pt>
                 <c:pt idx="43">
-                  <c:v>1208</c:v>
+                  <c:v>1210</c:v>
                 </c:pt>
                 <c:pt idx="44">
-                  <c:v>1236</c:v>
+                  <c:v>1238</c:v>
                 </c:pt>
                 <c:pt idx="45">
-                  <c:v>1264.1</c:v>
+                  <c:v>1266</c:v>
                 </c:pt>
                 <c:pt idx="46">
-                  <c:v>1292.1</c:v>
+                  <c:v>1294</c:v>
                 </c:pt>
                 <c:pt idx="47">
-                  <c:v>1320.1</c:v>
+                  <c:v>1322.1</c:v>
                 </c:pt>
                 <c:pt idx="48">
-                  <c:v>1348.1</c:v>
+                  <c:v>1350.1</c:v>
                 </c:pt>
                 <c:pt idx="49">
-                  <c:v>1376.1</c:v>
+                  <c:v>1378.1</c:v>
                 </c:pt>
                 <c:pt idx="50">
-                  <c:v>1404.1</c:v>
+                  <c:v>1406.1</c:v>
                 </c:pt>
                 <c:pt idx="51">
-                  <c:v>1432.1</c:v>
+                  <c:v>1434.1</c:v>
                 </c:pt>
                 <c:pt idx="52">
-                  <c:v>1460.1</c:v>
+                  <c:v>1462.1</c:v>
                 </c:pt>
                 <c:pt idx="53">
-                  <c:v>1488.1</c:v>
+                  <c:v>1490.1</c:v>
                 </c:pt>
                 <c:pt idx="54">
-                  <c:v>1516.1</c:v>
+                  <c:v>1518.1</c:v>
                 </c:pt>
                 <c:pt idx="55">
-                  <c:v>1544.1</c:v>
+                  <c:v>1546.1</c:v>
                 </c:pt>
                 <c:pt idx="56">
-                  <c:v>1572.1</c:v>
+                  <c:v>1574.1</c:v>
                 </c:pt>
                 <c:pt idx="57">
-                  <c:v>1600.1</c:v>
+                  <c:v>1602.1</c:v>
                 </c:pt>
                 <c:pt idx="58">
-                  <c:v>1628.1</c:v>
+                  <c:v>1630.1</c:v>
                 </c:pt>
                 <c:pt idx="59">
-                  <c:v>1656.1</c:v>
+                  <c:v>1658.1</c:v>
                 </c:pt>
                 <c:pt idx="60">
-                  <c:v>1684.1</c:v>
+                  <c:v>1686.1</c:v>
                 </c:pt>
                 <c:pt idx="61">
-                  <c:v>1712.1</c:v>
+                  <c:v>1714.1</c:v>
                 </c:pt>
                 <c:pt idx="62">
-                  <c:v>1740.1</c:v>
+                  <c:v>1742.1</c:v>
                 </c:pt>
                 <c:pt idx="63">
-                  <c:v>1768.1</c:v>
+                  <c:v>1770.1</c:v>
                 </c:pt>
                 <c:pt idx="64">
-                  <c:v>1796.1</c:v>
+                  <c:v>1798.1</c:v>
                 </c:pt>
                 <c:pt idx="65">
-                  <c:v>1824.1</c:v>
+                  <c:v>1826.1</c:v>
                 </c:pt>
                 <c:pt idx="66">
-                  <c:v>1852.1</c:v>
+                  <c:v>1854.1</c:v>
                 </c:pt>
                 <c:pt idx="67">
-                  <c:v>1880.1</c:v>
+                  <c:v>1882.1</c:v>
                 </c:pt>
                 <c:pt idx="68">
-                  <c:v>1908.1</c:v>
+                  <c:v>1910.1</c:v>
                 </c:pt>
                 <c:pt idx="69">
-                  <c:v>1936.1</c:v>
+                  <c:v>1938.1</c:v>
                 </c:pt>
                 <c:pt idx="70">
-                  <c:v>1964.1</c:v>
+                  <c:v>1966.1</c:v>
                 </c:pt>
                 <c:pt idx="71">
-                  <c:v>1992.1</c:v>
+                  <c:v>1994.1</c:v>
                 </c:pt>
                 <c:pt idx="72">
-                  <c:v>2020.1</c:v>
+                  <c:v>2022.1</c:v>
                 </c:pt>
                 <c:pt idx="73">
-                  <c:v>2048.1</c:v>
+                  <c:v>2050.1</c:v>
                 </c:pt>
                 <c:pt idx="74">
-                  <c:v>2076.1</c:v>
+                  <c:v>2078.1</c:v>
                 </c:pt>
                 <c:pt idx="75">
-                  <c:v>2104.1</c:v>
+                  <c:v>2106.1</c:v>
                 </c:pt>
                 <c:pt idx="76">
-                  <c:v>2132.1</c:v>
+                  <c:v>2134.1</c:v>
                 </c:pt>
                 <c:pt idx="77">
-                  <c:v>2160.1</c:v>
+                  <c:v>2162.1</c:v>
                 </c:pt>
                 <c:pt idx="78">
-                  <c:v>2188.1</c:v>
+                  <c:v>2190.1</c:v>
                 </c:pt>
                 <c:pt idx="79">
-                  <c:v>2216.1</c:v>
+                  <c:v>2218.1</c:v>
                 </c:pt>
                 <c:pt idx="80">
-                  <c:v>2244.1</c:v>
+                  <c:v>2246.1</c:v>
                 </c:pt>
                 <c:pt idx="81">
-                  <c:v>2272.1</c:v>
+                  <c:v>2274.1</c:v>
                 </c:pt>
                 <c:pt idx="82">
-                  <c:v>2300.1</c:v>
+                  <c:v>2302.1</c:v>
                 </c:pt>
                 <c:pt idx="83">
-                  <c:v>2328.1</c:v>
+                  <c:v>2330.1</c:v>
                 </c:pt>
                 <c:pt idx="84">
-                  <c:v>2356.1</c:v>
+                  <c:v>2358.1</c:v>
                 </c:pt>
                 <c:pt idx="85">
-                  <c:v>2384.1</c:v>
+                  <c:v>2386.1</c:v>
                 </c:pt>
                 <c:pt idx="86">
-                  <c:v>2412.1</c:v>
+                  <c:v>2414.1</c:v>
                 </c:pt>
                 <c:pt idx="87">
-                  <c:v>2440.1</c:v>
+                  <c:v>2442.1</c:v>
                 </c:pt>
                 <c:pt idx="88">
-                  <c:v>2468.1</c:v>
+                  <c:v>2470.1</c:v>
                 </c:pt>
                 <c:pt idx="89">
-                  <c:v>2496.1</c:v>
+                  <c:v>2498.1</c:v>
                 </c:pt>
                 <c:pt idx="90">
-                  <c:v>2524.1</c:v>
+                  <c:v>2526.1</c:v>
                 </c:pt>
                 <c:pt idx="91">
-                  <c:v>2552.1</c:v>
+                  <c:v>2554.1</c:v>
                 </c:pt>
                 <c:pt idx="92">
-                  <c:v>2580.1</c:v>
+                  <c:v>2582.1</c:v>
                 </c:pt>
                 <c:pt idx="93">
-                  <c:v>2608.1</c:v>
+                  <c:v>2610.1</c:v>
                 </c:pt>
                 <c:pt idx="94">
-                  <c:v>2636.1</c:v>
+                  <c:v>2638.1</c:v>
                 </c:pt>
                 <c:pt idx="95">
-                  <c:v>2664.1</c:v>
+                  <c:v>2666.1</c:v>
                 </c:pt>
                 <c:pt idx="96">
-                  <c:v>2692.1</c:v>
+                  <c:v>2694.1</c:v>
                 </c:pt>
                 <c:pt idx="97">
-                  <c:v>2720.1</c:v>
+                  <c:v>2722.1</c:v>
                 </c:pt>
                 <c:pt idx="98">
-                  <c:v>2748.1</c:v>
+                  <c:v>2750.1</c:v>
                 </c:pt>
                 <c:pt idx="99">
-                  <c:v>2776.1</c:v>
+                  <c:v>2778.1</c:v>
                 </c:pt>
                 <c:pt idx="100">
-                  <c:v>2804.1</c:v>
+                  <c:v>2806.1</c:v>
                 </c:pt>
                 <c:pt idx="101">
-                  <c:v>2832.1</c:v>
+                  <c:v>2834.1</c:v>
                 </c:pt>
                 <c:pt idx="102">
-                  <c:v>2860.1</c:v>
+                  <c:v>2862.1</c:v>
                 </c:pt>
                 <c:pt idx="103">
-                  <c:v>2888.1</c:v>
+                  <c:v>2890.1</c:v>
                 </c:pt>
                 <c:pt idx="104">
-                  <c:v>2916.1</c:v>
+                  <c:v>2918.1</c:v>
                 </c:pt>
                 <c:pt idx="105">
-                  <c:v>2944.1</c:v>
+                  <c:v>2946.1</c:v>
                 </c:pt>
                 <c:pt idx="106">
-                  <c:v>2972.1</c:v>
+                  <c:v>2974.1</c:v>
                 </c:pt>
                 <c:pt idx="107">
-                  <c:v>3000.1</c:v>
+                  <c:v>3002.1</c:v>
                 </c:pt>
                 <c:pt idx="108">
-                  <c:v>3028.1</c:v>
+                  <c:v>3030.1</c:v>
                 </c:pt>
                 <c:pt idx="109">
-                  <c:v>3056.1</c:v>
+                  <c:v>3058.1</c:v>
                 </c:pt>
                 <c:pt idx="110">
-                  <c:v>3084.1</c:v>
+                  <c:v>3086.1</c:v>
                 </c:pt>
                 <c:pt idx="111">
-                  <c:v>3112.1</c:v>
+                  <c:v>3114.1</c:v>
                 </c:pt>
                 <c:pt idx="112">
-                  <c:v>3140.1</c:v>
+                  <c:v>3142.1</c:v>
                 </c:pt>
                 <c:pt idx="113">
-                  <c:v>3168.1</c:v>
+                  <c:v>3170.1</c:v>
                 </c:pt>
                 <c:pt idx="114">
-                  <c:v>3196.1</c:v>
+                  <c:v>3198.1</c:v>
                 </c:pt>
                 <c:pt idx="115">
-                  <c:v>3224.1</c:v>
+                  <c:v>3226.1</c:v>
                 </c:pt>
                 <c:pt idx="116">
-                  <c:v>3252.1</c:v>
+                  <c:v>3254.1</c:v>
                 </c:pt>
                 <c:pt idx="117">
-                  <c:v>3280.1</c:v>
+                  <c:v>3282.1</c:v>
                 </c:pt>
                 <c:pt idx="118">
-                  <c:v>3308.1</c:v>
+                  <c:v>3310.1</c:v>
                 </c:pt>
                 <c:pt idx="119">
-                  <c:v>3336.1</c:v>
+                  <c:v>3338.1</c:v>
                 </c:pt>
                 <c:pt idx="120">
-                  <c:v>3364.1</c:v>
+                  <c:v>3366.1</c:v>
                 </c:pt>
                 <c:pt idx="121">
-                  <c:v>3392.1</c:v>
+                  <c:v>3394.1</c:v>
                 </c:pt>
                 <c:pt idx="122">
-                  <c:v>3420.1</c:v>
+                  <c:v>3422.1</c:v>
                 </c:pt>
                 <c:pt idx="123">
-                  <c:v>3448.1</c:v>
+                  <c:v>3450.1</c:v>
                 </c:pt>
                 <c:pt idx="124">
-                  <c:v>3476.1</c:v>
+                  <c:v>3478.1</c:v>
                 </c:pt>
                 <c:pt idx="125">
-                  <c:v>3504.1</c:v>
+                  <c:v>3506.1</c:v>
                 </c:pt>
                 <c:pt idx="126">
-                  <c:v>3532.1</c:v>
+                  <c:v>3534.1</c:v>
                 </c:pt>
                 <c:pt idx="127">
-                  <c:v>3560.1</c:v>
+                  <c:v>3562.1</c:v>
                 </c:pt>
                 <c:pt idx="128">
-                  <c:v>3588.1</c:v>
+                  <c:v>3590.1</c:v>
                 </c:pt>
                 <c:pt idx="129">
-                  <c:v>3616.1</c:v>
+                  <c:v>3618.1</c:v>
                 </c:pt>
                 <c:pt idx="130">
-                  <c:v>3644.1</c:v>
+                  <c:v>3646.1</c:v>
                 </c:pt>
                 <c:pt idx="131">
-                  <c:v>3672.1</c:v>
+                  <c:v>3674.1</c:v>
                 </c:pt>
                 <c:pt idx="132">
-                  <c:v>3700.2</c:v>
+                  <c:v>3702.1</c:v>
                 </c:pt>
                 <c:pt idx="133">
-                  <c:v>3728.2</c:v>
+                  <c:v>3730.1</c:v>
                 </c:pt>
                 <c:pt idx="134">
-                  <c:v>3756.2</c:v>
+                  <c:v>3758.1</c:v>
                 </c:pt>
                 <c:pt idx="135">
-                  <c:v>3784.2</c:v>
+                  <c:v>3786.1</c:v>
                 </c:pt>
                 <c:pt idx="136">
-                  <c:v>3812.2</c:v>
+                  <c:v>3814.1</c:v>
                 </c:pt>
                 <c:pt idx="137">
-                  <c:v>3840.2</c:v>
+                  <c:v>3842.1</c:v>
                 </c:pt>
                 <c:pt idx="138">
-                  <c:v>3868.2</c:v>
+                  <c:v>3870.1</c:v>
                 </c:pt>
                 <c:pt idx="139">
-                  <c:v>3896.2</c:v>
+                  <c:v>3898.1</c:v>
                 </c:pt>
                 <c:pt idx="140">
-                  <c:v>3924.2</c:v>
+                  <c:v>3926.1</c:v>
                 </c:pt>
                 <c:pt idx="141">
-                  <c:v>3952.2</c:v>
+                  <c:v>3954.1</c:v>
                 </c:pt>
                 <c:pt idx="142">
-                  <c:v>3980.2</c:v>
+                  <c:v>3982.2</c:v>
                 </c:pt>
                 <c:pt idx="143">
-                  <c:v>4008.2</c:v>
+                  <c:v>4010.2</c:v>
                 </c:pt>
                 <c:pt idx="144">
-                  <c:v>4036.2</c:v>
+                  <c:v>4038.2</c:v>
                 </c:pt>
                 <c:pt idx="145">
-                  <c:v>4064.2</c:v>
+                  <c:v>4066.2</c:v>
                 </c:pt>
                 <c:pt idx="146">
-                  <c:v>4092.2</c:v>
+                  <c:v>4094.2</c:v>
                 </c:pt>
                 <c:pt idx="147">
-                  <c:v>4120.2</c:v>
+                  <c:v>4122.2</c:v>
                 </c:pt>
                 <c:pt idx="148">
-                  <c:v>4148.2</c:v>
+                  <c:v>4150.2</c:v>
                 </c:pt>
                 <c:pt idx="149">
-                  <c:v>4176.2</c:v>
+                  <c:v>4178.2</c:v>
                 </c:pt>
                 <c:pt idx="150">
-                  <c:v>4204.2</c:v>
+                  <c:v>4206.2</c:v>
                 </c:pt>
                 <c:pt idx="151">
-                  <c:v>4232.2</c:v>
+                  <c:v>4234.2</c:v>
                 </c:pt>
                 <c:pt idx="152">
-                  <c:v>4260.2</c:v>
+                  <c:v>4262.2</c:v>
                 </c:pt>
                 <c:pt idx="153">
-                  <c:v>4288.2</c:v>
+                  <c:v>4290.2</c:v>
                 </c:pt>
                 <c:pt idx="154">
-                  <c:v>4316.2</c:v>
+                  <c:v>4318.2</c:v>
                 </c:pt>
                 <c:pt idx="155">
-                  <c:v>4344.2</c:v>
+                  <c:v>4346.2</c:v>
                 </c:pt>
                 <c:pt idx="156">
-                  <c:v>4372.2</c:v>
+                  <c:v>4374.2</c:v>
                 </c:pt>
                 <c:pt idx="157">
-                  <c:v>4400.2</c:v>
+                  <c:v>4402.2</c:v>
                 </c:pt>
                 <c:pt idx="158">
-                  <c:v>4428.2</c:v>
+                  <c:v>4430.2</c:v>
                 </c:pt>
                 <c:pt idx="159">
-                  <c:v>4456.2</c:v>
+                  <c:v>4458.2</c:v>
                 </c:pt>
                 <c:pt idx="160">
-                  <c:v>4484.2</c:v>
+                  <c:v>4486.2</c:v>
                 </c:pt>
                 <c:pt idx="161">
-                  <c:v>4512.2</c:v>
+                  <c:v>4514.2</c:v>
                 </c:pt>
                 <c:pt idx="162">
-                  <c:v>4540.2</c:v>
+                  <c:v>4542.2</c:v>
                 </c:pt>
                 <c:pt idx="163">
-                  <c:v>4568.2</c:v>
+                  <c:v>4570.2</c:v>
                 </c:pt>
                 <c:pt idx="164">
-                  <c:v>4596.2</c:v>
+                  <c:v>4598.2</c:v>
                 </c:pt>
                 <c:pt idx="165">
-                  <c:v>4624.2</c:v>
+                  <c:v>4626.2</c:v>
                 </c:pt>
                 <c:pt idx="166">
-                  <c:v>4652.2</c:v>
+                  <c:v>4654.2</c:v>
                 </c:pt>
                 <c:pt idx="167">
-                  <c:v>4680.2</c:v>
+                  <c:v>4682.2</c:v>
                 </c:pt>
                 <c:pt idx="168">
-                  <c:v>4708.2</c:v>
+                  <c:v>4710.2</c:v>
                 </c:pt>
                 <c:pt idx="169">
-                  <c:v>4736.2</c:v>
+                  <c:v>4738.2</c:v>
                 </c:pt>
                 <c:pt idx="170">
-                  <c:v>4764.2</c:v>
+                  <c:v>4766.2</c:v>
                 </c:pt>
                 <c:pt idx="171">
-                  <c:v>4792.2</c:v>
+                  <c:v>4794.2</c:v>
                 </c:pt>
                 <c:pt idx="172">
-                  <c:v>4820.2</c:v>
+                  <c:v>4822.2</c:v>
                 </c:pt>
                 <c:pt idx="173">
-                  <c:v>4848.2</c:v>
+                  <c:v>4850.2</c:v>
                 </c:pt>
                 <c:pt idx="174">
-                  <c:v>4876.2</c:v>
+                  <c:v>4878.2</c:v>
                 </c:pt>
                 <c:pt idx="175">
-                  <c:v>4904.2</c:v>
+                  <c:v>4906.2</c:v>
                 </c:pt>
                 <c:pt idx="176">
-                  <c:v>4932.2</c:v>
+                  <c:v>4934.2</c:v>
                 </c:pt>
                 <c:pt idx="177">
-                  <c:v>4960.2</c:v>
+                  <c:v>4962.2</c:v>
                 </c:pt>
                 <c:pt idx="178">
-                  <c:v>4988.2</c:v>
+                  <c:v>4990.2</c:v>
                 </c:pt>
                 <c:pt idx="179">
-                  <c:v>5016.2</c:v>
+                  <c:v>5018.2</c:v>
                 </c:pt>
                 <c:pt idx="180">
-                  <c:v>5044.2</c:v>
+                  <c:v>5046.2</c:v>
                 </c:pt>
                 <c:pt idx="181">
-                  <c:v>5072.2</c:v>
+                  <c:v>5074.2</c:v>
                 </c:pt>
                 <c:pt idx="182">
-                  <c:v>5100.2</c:v>
+                  <c:v>5102.2</c:v>
                 </c:pt>
                 <c:pt idx="183">
-                  <c:v>5128.2</c:v>
+                  <c:v>5130.2</c:v>
                 </c:pt>
                 <c:pt idx="184">
-                  <c:v>5156.2</c:v>
+                  <c:v>5158.2</c:v>
                 </c:pt>
                 <c:pt idx="185">
-                  <c:v>5184.2</c:v>
+                  <c:v>5186.2</c:v>
                 </c:pt>
                 <c:pt idx="186">
-                  <c:v>5212.2</c:v>
+                  <c:v>5214.2</c:v>
                 </c:pt>
                 <c:pt idx="187">
-                  <c:v>5240.2</c:v>
+                  <c:v>5242.2</c:v>
                 </c:pt>
                 <c:pt idx="188">
-                  <c:v>5268.2</c:v>
+                  <c:v>5270.2</c:v>
                 </c:pt>
                 <c:pt idx="189">
-                  <c:v>5296.2</c:v>
+                  <c:v>5298.2</c:v>
                 </c:pt>
                 <c:pt idx="190">
-                  <c:v>5324.2</c:v>
+                  <c:v>5326.2</c:v>
                 </c:pt>
               </c:numCache>
             </c:numRef>
@@ -1382,577 +1382,577 @@
                 <c:formatCode>General</c:formatCode>
                 <c:ptCount val="191"/>
                 <c:pt idx="0">
-                  <c:v>4</c:v>
+                  <c:v>6</c:v>
                 </c:pt>
                 <c:pt idx="1">
-                  <c:v>32</c:v>
+                  <c:v>34</c:v>
                 </c:pt>
                 <c:pt idx="2">
-                  <c:v>60</c:v>
+                  <c:v>62</c:v>
                 </c:pt>
                 <c:pt idx="3">
-                  <c:v>88</c:v>
+                  <c:v>90</c:v>
                 </c:pt>
                 <c:pt idx="4">
-                  <c:v>116</c:v>
+                  <c:v>118</c:v>
                 </c:pt>
                 <c:pt idx="5">
-                  <c:v>144</c:v>
+                  <c:v>146</c:v>
                 </c:pt>
                 <c:pt idx="6">
-                  <c:v>172</c:v>
+                  <c:v>174</c:v>
                 </c:pt>
                 <c:pt idx="7">
-                  <c:v>200</c:v>
+                  <c:v>202</c:v>
                 </c:pt>
                 <c:pt idx="8">
-                  <c:v>228</c:v>
+                  <c:v>230</c:v>
                 </c:pt>
                 <c:pt idx="9">
-                  <c:v>256</c:v>
+                  <c:v>258</c:v>
                 </c:pt>
                 <c:pt idx="10">
-                  <c:v>284</c:v>
+                  <c:v>286</c:v>
                 </c:pt>
                 <c:pt idx="11">
-                  <c:v>312</c:v>
+                  <c:v>314</c:v>
                 </c:pt>
                 <c:pt idx="12">
-                  <c:v>340</c:v>
+                  <c:v>342</c:v>
                 </c:pt>
                 <c:pt idx="13">
-                  <c:v>368</c:v>
+                  <c:v>370</c:v>
                 </c:pt>
                 <c:pt idx="14">
-                  <c:v>396</c:v>
+                  <c:v>398</c:v>
                 </c:pt>
                 <c:pt idx="15">
-                  <c:v>424</c:v>
+                  <c:v>426</c:v>
                 </c:pt>
                 <c:pt idx="16">
-                  <c:v>452</c:v>
+                  <c:v>454</c:v>
                 </c:pt>
                 <c:pt idx="17">
-                  <c:v>480</c:v>
+                  <c:v>482</c:v>
                 </c:pt>
                 <c:pt idx="18">
-                  <c:v>508</c:v>
+                  <c:v>510</c:v>
                 </c:pt>
                 <c:pt idx="19">
-                  <c:v>536</c:v>
+                  <c:v>538</c:v>
                 </c:pt>
                 <c:pt idx="20">
-                  <c:v>564</c:v>
+                  <c:v>566</c:v>
                 </c:pt>
                 <c:pt idx="21">
-                  <c:v>592</c:v>
+                  <c:v>594</c:v>
                 </c:pt>
                 <c:pt idx="22">
-                  <c:v>620</c:v>
+                  <c:v>622</c:v>
                 </c:pt>
                 <c:pt idx="23">
-                  <c:v>648</c:v>
+                  <c:v>650</c:v>
                 </c:pt>
                 <c:pt idx="24">
-                  <c:v>676</c:v>
+                  <c:v>678</c:v>
                 </c:pt>
                 <c:pt idx="25">
-                  <c:v>704</c:v>
+                  <c:v>706</c:v>
                 </c:pt>
                 <c:pt idx="26">
-                  <c:v>732</c:v>
+                  <c:v>734</c:v>
                 </c:pt>
                 <c:pt idx="27">
-                  <c:v>760</c:v>
+                  <c:v>762</c:v>
                 </c:pt>
                 <c:pt idx="28">
-                  <c:v>788</c:v>
+                  <c:v>790</c:v>
                 </c:pt>
                 <c:pt idx="29">
-                  <c:v>816</c:v>
+                  <c:v>818</c:v>
                 </c:pt>
                 <c:pt idx="30">
-                  <c:v>844</c:v>
+                  <c:v>846</c:v>
                 </c:pt>
                 <c:pt idx="31">
-                  <c:v>872</c:v>
+                  <c:v>874</c:v>
                 </c:pt>
                 <c:pt idx="32">
-                  <c:v>900</c:v>
+                  <c:v>902</c:v>
                 </c:pt>
                 <c:pt idx="33">
-                  <c:v>928</c:v>
+                  <c:v>930</c:v>
                 </c:pt>
                 <c:pt idx="34">
-                  <c:v>956</c:v>
+                  <c:v>958</c:v>
                 </c:pt>
                 <c:pt idx="35">
-                  <c:v>984</c:v>
+                  <c:v>986</c:v>
                 </c:pt>
                 <c:pt idx="36">
-                  <c:v>1012</c:v>
+                  <c:v>1014</c:v>
                 </c:pt>
                 <c:pt idx="37">
-                  <c:v>1040</c:v>
+                  <c:v>1042</c:v>
                 </c:pt>
                 <c:pt idx="38">
-                  <c:v>1068</c:v>
+                  <c:v>1070</c:v>
                 </c:pt>
                 <c:pt idx="39">
-                  <c:v>1096</c:v>
+                  <c:v>1098</c:v>
                 </c:pt>
                 <c:pt idx="40">
-                  <c:v>1124</c:v>
+                  <c:v>1126</c:v>
                 </c:pt>
                 <c:pt idx="41">
-                  <c:v>1152</c:v>
+                  <c:v>1154</c:v>
                 </c:pt>
                 <c:pt idx="42">
-                  <c:v>1180</c:v>
+                  <c:v>1182</c:v>
                 </c:pt>
                 <c:pt idx="43">
-                  <c:v>1208</c:v>
+                  <c:v>1210</c:v>
                 </c:pt>
                 <c:pt idx="44">
-                  <c:v>1236</c:v>
+                  <c:v>1238</c:v>
                 </c:pt>
                 <c:pt idx="45">
-                  <c:v>1264.1</c:v>
+                  <c:v>1266</c:v>
                 </c:pt>
                 <c:pt idx="46">
-                  <c:v>1292.1</c:v>
+                  <c:v>1294</c:v>
                 </c:pt>
                 <c:pt idx="47">
-                  <c:v>1320.1</c:v>
+                  <c:v>1322.1</c:v>
                 </c:pt>
                 <c:pt idx="48">
-                  <c:v>1348.1</c:v>
+                  <c:v>1350.1</c:v>
                 </c:pt>
                 <c:pt idx="49">
-                  <c:v>1376.1</c:v>
+                  <c:v>1378.1</c:v>
                 </c:pt>
                 <c:pt idx="50">
-                  <c:v>1404.1</c:v>
+                  <c:v>1406.1</c:v>
                 </c:pt>
                 <c:pt idx="51">
-                  <c:v>1432.1</c:v>
+                  <c:v>1434.1</c:v>
                 </c:pt>
                 <c:pt idx="52">
-                  <c:v>1460.1</c:v>
+                  <c:v>1462.1</c:v>
                 </c:pt>
                 <c:pt idx="53">
-                  <c:v>1488.1</c:v>
+                  <c:v>1490.1</c:v>
                 </c:pt>
                 <c:pt idx="54">
-                  <c:v>1516.1</c:v>
+                  <c:v>1518.1</c:v>
                 </c:pt>
                 <c:pt idx="55">
-                  <c:v>1544.1</c:v>
+                  <c:v>1546.1</c:v>
                 </c:pt>
                 <c:pt idx="56">
-                  <c:v>1572.1</c:v>
+                  <c:v>1574.1</c:v>
                 </c:pt>
                 <c:pt idx="57">
-                  <c:v>1600.1</c:v>
+                  <c:v>1602.1</c:v>
                 </c:pt>
                 <c:pt idx="58">
-                  <c:v>1628.1</c:v>
+                  <c:v>1630.1</c:v>
                 </c:pt>
                 <c:pt idx="59">
-                  <c:v>1656.1</c:v>
+                  <c:v>1658.1</c:v>
                 </c:pt>
                 <c:pt idx="60">
-                  <c:v>1684.1</c:v>
+                  <c:v>1686.1</c:v>
                 </c:pt>
                 <c:pt idx="61">
-                  <c:v>1712.1</c:v>
+                  <c:v>1714.1</c:v>
                 </c:pt>
                 <c:pt idx="62">
-                  <c:v>1740.1</c:v>
+                  <c:v>1742.1</c:v>
                 </c:pt>
                 <c:pt idx="63">
-                  <c:v>1768.1</c:v>
+                  <c:v>1770.1</c:v>
                 </c:pt>
                 <c:pt idx="64">
-                  <c:v>1796.1</c:v>
+                  <c:v>1798.1</c:v>
                 </c:pt>
                 <c:pt idx="65">
-                  <c:v>1824.1</c:v>
+                  <c:v>1826.1</c:v>
                 </c:pt>
                 <c:pt idx="66">
-                  <c:v>1852.1</c:v>
+                  <c:v>1854.1</c:v>
                 </c:pt>
                 <c:pt idx="67">
-                  <c:v>1880.1</c:v>
+                  <c:v>1882.1</c:v>
                 </c:pt>
                 <c:pt idx="68">
-                  <c:v>1908.1</c:v>
+                  <c:v>1910.1</c:v>
                 </c:pt>
                 <c:pt idx="69">
-                  <c:v>1936.1</c:v>
+                  <c:v>1938.1</c:v>
                 </c:pt>
                 <c:pt idx="70">
-                  <c:v>1964.1</c:v>
+                  <c:v>1966.1</c:v>
                 </c:pt>
                 <c:pt idx="71">
-                  <c:v>1992.1</c:v>
+                  <c:v>1994.1</c:v>
                 </c:pt>
                 <c:pt idx="72">
-                  <c:v>2020.1</c:v>
+                  <c:v>2022.1</c:v>
                 </c:pt>
                 <c:pt idx="73">
-                  <c:v>2048.1</c:v>
+                  <c:v>2050.1</c:v>
                 </c:pt>
                 <c:pt idx="74">
-                  <c:v>2076.1</c:v>
+                  <c:v>2078.1</c:v>
                 </c:pt>
                 <c:pt idx="75">
-                  <c:v>2104.1</c:v>
+                  <c:v>2106.1</c:v>
                 </c:pt>
                 <c:pt idx="76">
-                  <c:v>2132.1</c:v>
+                  <c:v>2134.1</c:v>
                 </c:pt>
                 <c:pt idx="77">
-                  <c:v>2160.1</c:v>
+                  <c:v>2162.1</c:v>
                 </c:pt>
                 <c:pt idx="78">
-                  <c:v>2188.1</c:v>
+                  <c:v>2190.1</c:v>
                 </c:pt>
                 <c:pt idx="79">
-                  <c:v>2216.1</c:v>
+                  <c:v>2218.1</c:v>
                 </c:pt>
                 <c:pt idx="80">
-                  <c:v>2244.1</c:v>
+                  <c:v>2246.1</c:v>
                 </c:pt>
                 <c:pt idx="81">
-                  <c:v>2272.1</c:v>
+                  <c:v>2274.1</c:v>
                 </c:pt>
                 <c:pt idx="82">
-                  <c:v>2300.1</c:v>
+                  <c:v>2302.1</c:v>
                 </c:pt>
                 <c:pt idx="83">
-                  <c:v>2328.1</c:v>
+                  <c:v>2330.1</c:v>
                 </c:pt>
                 <c:pt idx="84">
-                  <c:v>2356.1</c:v>
+                  <c:v>2358.1</c:v>
                 </c:pt>
                 <c:pt idx="85">
-                  <c:v>2384.1</c:v>
+                  <c:v>2386.1</c:v>
                 </c:pt>
                 <c:pt idx="86">
-                  <c:v>2412.1</c:v>
+                  <c:v>2414.1</c:v>
                 </c:pt>
                 <c:pt idx="87">
-                  <c:v>2440.1</c:v>
+                  <c:v>2442.1</c:v>
                 </c:pt>
                 <c:pt idx="88">
-                  <c:v>2468.1</c:v>
+                  <c:v>2470.1</c:v>
                 </c:pt>
                 <c:pt idx="89">
-                  <c:v>2496.1</c:v>
+                  <c:v>2498.1</c:v>
                 </c:pt>
                 <c:pt idx="90">
-                  <c:v>2524.1</c:v>
+                  <c:v>2526.1</c:v>
                 </c:pt>
                 <c:pt idx="91">
-                  <c:v>2552.1</c:v>
+                  <c:v>2554.1</c:v>
                 </c:pt>
                 <c:pt idx="92">
-                  <c:v>2580.1</c:v>
+                  <c:v>2582.1</c:v>
                 </c:pt>
                 <c:pt idx="93">
-                  <c:v>2608.1</c:v>
+                  <c:v>2610.1</c:v>
                 </c:pt>
                 <c:pt idx="94">
-                  <c:v>2636.1</c:v>
+                  <c:v>2638.1</c:v>
                 </c:pt>
                 <c:pt idx="95">
-                  <c:v>2664.1</c:v>
+                  <c:v>2666.1</c:v>
                 </c:pt>
                 <c:pt idx="96">
-                  <c:v>2692.1</c:v>
+                  <c:v>2694.1</c:v>
                 </c:pt>
                 <c:pt idx="97">
-                  <c:v>2720.1</c:v>
+                  <c:v>2722.1</c:v>
                 </c:pt>
                 <c:pt idx="98">
-                  <c:v>2748.1</c:v>
+                  <c:v>2750.1</c:v>
                 </c:pt>
                 <c:pt idx="99">
-                  <c:v>2776.1</c:v>
+                  <c:v>2778.1</c:v>
                 </c:pt>
                 <c:pt idx="100">
-                  <c:v>2804.1</c:v>
+                  <c:v>2806.1</c:v>
                 </c:pt>
                 <c:pt idx="101">
-                  <c:v>2832.1</c:v>
+                  <c:v>2834.1</c:v>
                 </c:pt>
                 <c:pt idx="102">
-                  <c:v>2860.1</c:v>
+                  <c:v>2862.1</c:v>
                 </c:pt>
                 <c:pt idx="103">
-                  <c:v>2888.1</c:v>
+                  <c:v>2890.1</c:v>
                 </c:pt>
                 <c:pt idx="104">
-                  <c:v>2916.1</c:v>
+                  <c:v>2918.1</c:v>
                 </c:pt>
                 <c:pt idx="105">
-                  <c:v>2944.1</c:v>
+                  <c:v>2946.1</c:v>
                 </c:pt>
                 <c:pt idx="106">
-                  <c:v>2972.1</c:v>
+                  <c:v>2974.1</c:v>
                 </c:pt>
                 <c:pt idx="107">
-                  <c:v>3000.1</c:v>
+                  <c:v>3002.1</c:v>
                 </c:pt>
                 <c:pt idx="108">
-                  <c:v>3028.1</c:v>
+                  <c:v>3030.1</c:v>
                 </c:pt>
                 <c:pt idx="109">
-                  <c:v>3056.1</c:v>
+                  <c:v>3058.1</c:v>
                 </c:pt>
                 <c:pt idx="110">
-                  <c:v>3084.1</c:v>
+                  <c:v>3086.1</c:v>
                 </c:pt>
                 <c:pt idx="111">
-                  <c:v>3112.1</c:v>
+                  <c:v>3114.1</c:v>
                 </c:pt>
                 <c:pt idx="112">
-                  <c:v>3140.1</c:v>
+                  <c:v>3142.1</c:v>
                 </c:pt>
                 <c:pt idx="113">
-                  <c:v>3168.1</c:v>
+                  <c:v>3170.1</c:v>
                 </c:pt>
                 <c:pt idx="114">
-                  <c:v>3196.1</c:v>
+                  <c:v>3198.1</c:v>
                 </c:pt>
                 <c:pt idx="115">
-                  <c:v>3224.1</c:v>
+                  <c:v>3226.1</c:v>
                 </c:pt>
                 <c:pt idx="116">
-                  <c:v>3252.1</c:v>
+                  <c:v>3254.1</c:v>
                 </c:pt>
                 <c:pt idx="117">
-                  <c:v>3280.1</c:v>
+                  <c:v>3282.1</c:v>
                 </c:pt>
                 <c:pt idx="118">
-                  <c:v>3308.1</c:v>
+                  <c:v>3310.1</c:v>
                 </c:pt>
                 <c:pt idx="119">
-                  <c:v>3336.1</c:v>
+                  <c:v>3338.1</c:v>
                 </c:pt>
                 <c:pt idx="120">
-                  <c:v>3364.1</c:v>
+                  <c:v>3366.1</c:v>
                 </c:pt>
                 <c:pt idx="121">
-                  <c:v>3392.1</c:v>
+                  <c:v>3394.1</c:v>
                 </c:pt>
                 <c:pt idx="122">
-                  <c:v>3420.1</c:v>
+                  <c:v>3422.1</c:v>
                 </c:pt>
                 <c:pt idx="123">
-                  <c:v>3448.1</c:v>
+                  <c:v>3450.1</c:v>
                 </c:pt>
                 <c:pt idx="124">
-                  <c:v>3476.1</c:v>
+                  <c:v>3478.1</c:v>
                 </c:pt>
                 <c:pt idx="125">
-                  <c:v>3504.1</c:v>
+                  <c:v>3506.1</c:v>
                 </c:pt>
                 <c:pt idx="126">
-                  <c:v>3532.1</c:v>
+                  <c:v>3534.1</c:v>
                 </c:pt>
                 <c:pt idx="127">
-                  <c:v>3560.1</c:v>
+                  <c:v>3562.1</c:v>
                 </c:pt>
                 <c:pt idx="128">
-                  <c:v>3588.1</c:v>
+                  <c:v>3590.1</c:v>
                 </c:pt>
                 <c:pt idx="129">
-                  <c:v>3616.1</c:v>
+                  <c:v>3618.1</c:v>
                 </c:pt>
                 <c:pt idx="130">
-                  <c:v>3644.1</c:v>
+                  <c:v>3646.1</c:v>
                 </c:pt>
                 <c:pt idx="131">
-                  <c:v>3672.1</c:v>
+                  <c:v>3674.1</c:v>
                 </c:pt>
                 <c:pt idx="132">
-                  <c:v>3700.2</c:v>
+                  <c:v>3702.1</c:v>
                 </c:pt>
                 <c:pt idx="133">
-                  <c:v>3728.2</c:v>
+                  <c:v>3730.1</c:v>
                 </c:pt>
                 <c:pt idx="134">
-                  <c:v>3756.2</c:v>
+                  <c:v>3758.1</c:v>
                 </c:pt>
                 <c:pt idx="135">
-                  <c:v>3784.2</c:v>
+                  <c:v>3786.1</c:v>
                 </c:pt>
                 <c:pt idx="136">
-                  <c:v>3812.2</c:v>
+                  <c:v>3814.1</c:v>
                 </c:pt>
                 <c:pt idx="137">
-                  <c:v>3840.2</c:v>
+                  <c:v>3842.1</c:v>
                 </c:pt>
                 <c:pt idx="138">
-                  <c:v>3868.2</c:v>
+                  <c:v>3870.1</c:v>
                 </c:pt>
                 <c:pt idx="139">
-                  <c:v>3896.2</c:v>
+                  <c:v>3898.1</c:v>
                 </c:pt>
                 <c:pt idx="140">
-                  <c:v>3924.2</c:v>
+                  <c:v>3926.1</c:v>
                 </c:pt>
                 <c:pt idx="141">
-                  <c:v>3952.2</c:v>
+                  <c:v>3954.1</c:v>
                 </c:pt>
                 <c:pt idx="142">
-                  <c:v>3980.2</c:v>
+                  <c:v>3982.2</c:v>
                 </c:pt>
                 <c:pt idx="143">
-                  <c:v>4008.2</c:v>
+                  <c:v>4010.2</c:v>
                 </c:pt>
                 <c:pt idx="144">
-                  <c:v>4036.2</c:v>
+                  <c:v>4038.2</c:v>
                 </c:pt>
                 <c:pt idx="145">
-                  <c:v>4064.2</c:v>
+                  <c:v>4066.2</c:v>
                 </c:pt>
                 <c:pt idx="146">
-                  <c:v>4092.2</c:v>
+                  <c:v>4094.2</c:v>
                 </c:pt>
                 <c:pt idx="147">
-                  <c:v>4120.2</c:v>
+                  <c:v>4122.2</c:v>
                 </c:pt>
                 <c:pt idx="148">
-                  <c:v>4148.2</c:v>
+                  <c:v>4150.2</c:v>
                 </c:pt>
                 <c:pt idx="149">
-                  <c:v>4176.2</c:v>
+                  <c:v>4178.2</c:v>
                 </c:pt>
                 <c:pt idx="150">
-                  <c:v>4204.2</c:v>
+                  <c:v>4206.2</c:v>
                 </c:pt>
                 <c:pt idx="151">
-                  <c:v>4232.2</c:v>
+                  <c:v>4234.2</c:v>
                 </c:pt>
                 <c:pt idx="152">
-                  <c:v>4260.2</c:v>
+                  <c:v>4262.2</c:v>
                 </c:pt>
                 <c:pt idx="153">
-                  <c:v>4288.2</c:v>
+                  <c:v>4290.2</c:v>
                 </c:pt>
                 <c:pt idx="154">
-                  <c:v>4316.2</c:v>
+                  <c:v>4318.2</c:v>
                 </c:pt>
                 <c:pt idx="155">
-                  <c:v>4344.2</c:v>
+                  <c:v>4346.2</c:v>
                 </c:pt>
                 <c:pt idx="156">
-                  <c:v>4372.2</c:v>
+                  <c:v>4374.2</c:v>
                 </c:pt>
                 <c:pt idx="157">
-                  <c:v>4400.2</c:v>
+                  <c:v>4402.2</c:v>
                 </c:pt>
                 <c:pt idx="158">
-                  <c:v>4428.2</c:v>
+                  <c:v>4430.2</c:v>
                 </c:pt>
                 <c:pt idx="159">
-                  <c:v>4456.2</c:v>
+                  <c:v>4458.2</c:v>
                 </c:pt>
                 <c:pt idx="160">
-                  <c:v>4484.2</c:v>
+                  <c:v>4486.2</c:v>
                 </c:pt>
                 <c:pt idx="161">
-                  <c:v>4512.2</c:v>
+                  <c:v>4514.2</c:v>
                 </c:pt>
                 <c:pt idx="162">
-                  <c:v>4540.2</c:v>
+                  <c:v>4542.2</c:v>
                 </c:pt>
                 <c:pt idx="163">
-                  <c:v>4568.2</c:v>
+                  <c:v>4570.2</c:v>
                 </c:pt>
                 <c:pt idx="164">
-                  <c:v>4596.2</c:v>
+                  <c:v>4598.2</c:v>
                 </c:pt>
                 <c:pt idx="165">
-                  <c:v>4624.2</c:v>
+                  <c:v>4626.2</c:v>
                 </c:pt>
                 <c:pt idx="166">
-                  <c:v>4652.2</c:v>
+                  <c:v>4654.2</c:v>
                 </c:pt>
                 <c:pt idx="167">
-                  <c:v>4680.2</c:v>
+                  <c:v>4682.2</c:v>
                 </c:pt>
                 <c:pt idx="168">
-                  <c:v>4708.2</c:v>
+                  <c:v>4710.2</c:v>
                 </c:pt>
                 <c:pt idx="169">
-                  <c:v>4736.2</c:v>
+                  <c:v>4738.2</c:v>
                 </c:pt>
                 <c:pt idx="170">
-                  <c:v>4764.2</c:v>
+                  <c:v>4766.2</c:v>
                 </c:pt>
                 <c:pt idx="171">
-                  <c:v>4792.2</c:v>
+                  <c:v>4794.2</c:v>
                 </c:pt>
                 <c:pt idx="172">
-                  <c:v>4820.2</c:v>
+                  <c:v>4822.2</c:v>
                 </c:pt>
                 <c:pt idx="173">
-                  <c:v>4848.2</c:v>
+                  <c:v>4850.2</c:v>
                 </c:pt>
                 <c:pt idx="174">
-                  <c:v>4876.2</c:v>
+                  <c:v>4878.2</c:v>
                 </c:pt>
                 <c:pt idx="175">
-                  <c:v>4904.2</c:v>
+                  <c:v>4906.2</c:v>
                 </c:pt>
                 <c:pt idx="176">
-                  <c:v>4932.2</c:v>
+                  <c:v>4934.2</c:v>
                 </c:pt>
                 <c:pt idx="177">
-                  <c:v>4960.2</c:v>
+                  <c:v>4962.2</c:v>
                 </c:pt>
                 <c:pt idx="178">
-                  <c:v>4988.2</c:v>
+                  <c:v>4990.2</c:v>
                 </c:pt>
                 <c:pt idx="179">
-                  <c:v>5016.2</c:v>
+                  <c:v>5018.2</c:v>
                 </c:pt>
                 <c:pt idx="180">
-                  <c:v>5044.2</c:v>
+                  <c:v>5046.2</c:v>
                 </c:pt>
                 <c:pt idx="181">
-                  <c:v>5072.2</c:v>
+                  <c:v>5074.2</c:v>
                 </c:pt>
                 <c:pt idx="182">
-                  <c:v>5100.2</c:v>
+                  <c:v>5102.2</c:v>
                 </c:pt>
                 <c:pt idx="183">
-                  <c:v>5128.2</c:v>
+                  <c:v>5130.2</c:v>
                 </c:pt>
                 <c:pt idx="184">
-                  <c:v>5156.2</c:v>
+                  <c:v>5158.2</c:v>
                 </c:pt>
                 <c:pt idx="185">
-                  <c:v>5184.2</c:v>
+                  <c:v>5186.2</c:v>
                 </c:pt>
                 <c:pt idx="186">
-                  <c:v>5212.2</c:v>
+                  <c:v>5214.2</c:v>
                 </c:pt>
                 <c:pt idx="187">
-                  <c:v>5240.2</c:v>
+                  <c:v>5242.2</c:v>
                 </c:pt>
                 <c:pt idx="188">
-                  <c:v>5268.2</c:v>
+                  <c:v>5270.2</c:v>
                 </c:pt>
                 <c:pt idx="189">
-                  <c:v>5296.2</c:v>
+                  <c:v>5298.2</c:v>
                 </c:pt>
                 <c:pt idx="190">
-                  <c:v>5324.2</c:v>
+                  <c:v>5326.2</c:v>
                 </c:pt>
               </c:numCache>
             </c:numRef>
@@ -2535,6 +2535,2426 @@
                 </c:pt>
                 <c:pt idx="190">
                   <c:v>15.36</c:v>
+                </c:pt>
+              </c:numCache>
+            </c:numRef>
+          </c:yVal>
+          <c:smooth val="0"/>
+        </c:ser>
+        <c:ser>
+          <c:idx val="2"/>
+          <c:order val="2"/>
+          <c:tx>
+            <c:strRef>
+              <c:f>Sheet1!$D$1</c:f>
+              <c:strCache>
+                <c:ptCount val="1"/>
+                <c:pt idx="0">
+                  <c:v>Ours Prefill</c:v>
+                </c:pt>
+              </c:strCache>
+            </c:strRef>
+          </c:tx>
+          <c:spPr>
+            <a:solidFill>
+              <a:srgbClr val="009E73"/>
+            </a:solidFill>
+            <a:ln w="28575" cap="flat">
+              <a:solidFill>
+                <a:srgbClr val="009E73"/>
+              </a:solidFill>
+              <a:prstDash val="solid"/>
+              <a:round/>
+            </a:ln>
+            <a:effectLst/>
+          </c:spPr>
+          <c:marker>
+            <c:symbol val="none"/>
+            <c:size val="6"/>
+            <c:spPr>
+              <a:solidFill>
+                <a:srgbClr val="009E73"/>
+              </a:solidFill>
+              <a:ln w="9525" cap="flat">
+                <a:solidFill>
+                  <a:srgbClr val="009E73"/>
+                </a:solidFill>
+                <a:prstDash val="solid"/>
+                <a:round/>
+              </a:ln>
+              <a:effectLst/>
+            </c:spPr>
+          </c:marker>
+          <c:xVal>
+            <c:numRef>
+              <c:f>Sheet1!$A$2:$A$192</c:f>
+              <c:numCache>
+                <c:formatCode>General</c:formatCode>
+                <c:ptCount val="191"/>
+                <c:pt idx="0">
+                  <c:v>6</c:v>
+                </c:pt>
+                <c:pt idx="1">
+                  <c:v>34</c:v>
+                </c:pt>
+                <c:pt idx="2">
+                  <c:v>62</c:v>
+                </c:pt>
+                <c:pt idx="3">
+                  <c:v>90</c:v>
+                </c:pt>
+                <c:pt idx="4">
+                  <c:v>118</c:v>
+                </c:pt>
+                <c:pt idx="5">
+                  <c:v>146</c:v>
+                </c:pt>
+                <c:pt idx="6">
+                  <c:v>174</c:v>
+                </c:pt>
+                <c:pt idx="7">
+                  <c:v>202</c:v>
+                </c:pt>
+                <c:pt idx="8">
+                  <c:v>230</c:v>
+                </c:pt>
+                <c:pt idx="9">
+                  <c:v>258</c:v>
+                </c:pt>
+                <c:pt idx="10">
+                  <c:v>286</c:v>
+                </c:pt>
+                <c:pt idx="11">
+                  <c:v>314</c:v>
+                </c:pt>
+                <c:pt idx="12">
+                  <c:v>342</c:v>
+                </c:pt>
+                <c:pt idx="13">
+                  <c:v>370</c:v>
+                </c:pt>
+                <c:pt idx="14">
+                  <c:v>398</c:v>
+                </c:pt>
+                <c:pt idx="15">
+                  <c:v>426</c:v>
+                </c:pt>
+                <c:pt idx="16">
+                  <c:v>454</c:v>
+                </c:pt>
+                <c:pt idx="17">
+                  <c:v>482</c:v>
+                </c:pt>
+                <c:pt idx="18">
+                  <c:v>510</c:v>
+                </c:pt>
+                <c:pt idx="19">
+                  <c:v>538</c:v>
+                </c:pt>
+                <c:pt idx="20">
+                  <c:v>566</c:v>
+                </c:pt>
+                <c:pt idx="21">
+                  <c:v>594</c:v>
+                </c:pt>
+                <c:pt idx="22">
+                  <c:v>622</c:v>
+                </c:pt>
+                <c:pt idx="23">
+                  <c:v>650</c:v>
+                </c:pt>
+                <c:pt idx="24">
+                  <c:v>678</c:v>
+                </c:pt>
+                <c:pt idx="25">
+                  <c:v>706</c:v>
+                </c:pt>
+                <c:pt idx="26">
+                  <c:v>734</c:v>
+                </c:pt>
+                <c:pt idx="27">
+                  <c:v>762</c:v>
+                </c:pt>
+                <c:pt idx="28">
+                  <c:v>790</c:v>
+                </c:pt>
+                <c:pt idx="29">
+                  <c:v>818</c:v>
+                </c:pt>
+                <c:pt idx="30">
+                  <c:v>846</c:v>
+                </c:pt>
+                <c:pt idx="31">
+                  <c:v>874</c:v>
+                </c:pt>
+                <c:pt idx="32">
+                  <c:v>902</c:v>
+                </c:pt>
+                <c:pt idx="33">
+                  <c:v>930</c:v>
+                </c:pt>
+                <c:pt idx="34">
+                  <c:v>958</c:v>
+                </c:pt>
+                <c:pt idx="35">
+                  <c:v>986</c:v>
+                </c:pt>
+                <c:pt idx="36">
+                  <c:v>1014</c:v>
+                </c:pt>
+                <c:pt idx="37">
+                  <c:v>1042</c:v>
+                </c:pt>
+                <c:pt idx="38">
+                  <c:v>1070</c:v>
+                </c:pt>
+                <c:pt idx="39">
+                  <c:v>1098</c:v>
+                </c:pt>
+                <c:pt idx="40">
+                  <c:v>1126</c:v>
+                </c:pt>
+                <c:pt idx="41">
+                  <c:v>1154</c:v>
+                </c:pt>
+                <c:pt idx="42">
+                  <c:v>1182</c:v>
+                </c:pt>
+                <c:pt idx="43">
+                  <c:v>1210</c:v>
+                </c:pt>
+                <c:pt idx="44">
+                  <c:v>1238</c:v>
+                </c:pt>
+                <c:pt idx="45">
+                  <c:v>1266</c:v>
+                </c:pt>
+                <c:pt idx="46">
+                  <c:v>1294</c:v>
+                </c:pt>
+                <c:pt idx="47">
+                  <c:v>1322.1</c:v>
+                </c:pt>
+                <c:pt idx="48">
+                  <c:v>1350.1</c:v>
+                </c:pt>
+                <c:pt idx="49">
+                  <c:v>1378.1</c:v>
+                </c:pt>
+                <c:pt idx="50">
+                  <c:v>1406.1</c:v>
+                </c:pt>
+                <c:pt idx="51">
+                  <c:v>1434.1</c:v>
+                </c:pt>
+                <c:pt idx="52">
+                  <c:v>1462.1</c:v>
+                </c:pt>
+                <c:pt idx="53">
+                  <c:v>1490.1</c:v>
+                </c:pt>
+                <c:pt idx="54">
+                  <c:v>1518.1</c:v>
+                </c:pt>
+                <c:pt idx="55">
+                  <c:v>1546.1</c:v>
+                </c:pt>
+                <c:pt idx="56">
+                  <c:v>1574.1</c:v>
+                </c:pt>
+                <c:pt idx="57">
+                  <c:v>1602.1</c:v>
+                </c:pt>
+                <c:pt idx="58">
+                  <c:v>1630.1</c:v>
+                </c:pt>
+                <c:pt idx="59">
+                  <c:v>1658.1</c:v>
+                </c:pt>
+                <c:pt idx="60">
+                  <c:v>1686.1</c:v>
+                </c:pt>
+                <c:pt idx="61">
+                  <c:v>1714.1</c:v>
+                </c:pt>
+                <c:pt idx="62">
+                  <c:v>1742.1</c:v>
+                </c:pt>
+                <c:pt idx="63">
+                  <c:v>1770.1</c:v>
+                </c:pt>
+                <c:pt idx="64">
+                  <c:v>1798.1</c:v>
+                </c:pt>
+                <c:pt idx="65">
+                  <c:v>1826.1</c:v>
+                </c:pt>
+                <c:pt idx="66">
+                  <c:v>1854.1</c:v>
+                </c:pt>
+                <c:pt idx="67">
+                  <c:v>1882.1</c:v>
+                </c:pt>
+                <c:pt idx="68">
+                  <c:v>1910.1</c:v>
+                </c:pt>
+                <c:pt idx="69">
+                  <c:v>1938.1</c:v>
+                </c:pt>
+                <c:pt idx="70">
+                  <c:v>1966.1</c:v>
+                </c:pt>
+                <c:pt idx="71">
+                  <c:v>1994.1</c:v>
+                </c:pt>
+                <c:pt idx="72">
+                  <c:v>2022.1</c:v>
+                </c:pt>
+                <c:pt idx="73">
+                  <c:v>2050.1</c:v>
+                </c:pt>
+                <c:pt idx="74">
+                  <c:v>2078.1</c:v>
+                </c:pt>
+                <c:pt idx="75">
+                  <c:v>2106.1</c:v>
+                </c:pt>
+                <c:pt idx="76">
+                  <c:v>2134.1</c:v>
+                </c:pt>
+                <c:pt idx="77">
+                  <c:v>2162.1</c:v>
+                </c:pt>
+                <c:pt idx="78">
+                  <c:v>2190.1</c:v>
+                </c:pt>
+                <c:pt idx="79">
+                  <c:v>2218.1</c:v>
+                </c:pt>
+                <c:pt idx="80">
+                  <c:v>2246.1</c:v>
+                </c:pt>
+                <c:pt idx="81">
+                  <c:v>2274.1</c:v>
+                </c:pt>
+                <c:pt idx="82">
+                  <c:v>2302.1</c:v>
+                </c:pt>
+                <c:pt idx="83">
+                  <c:v>2330.1</c:v>
+                </c:pt>
+                <c:pt idx="84">
+                  <c:v>2358.1</c:v>
+                </c:pt>
+                <c:pt idx="85">
+                  <c:v>2386.1</c:v>
+                </c:pt>
+                <c:pt idx="86">
+                  <c:v>2414.1</c:v>
+                </c:pt>
+                <c:pt idx="87">
+                  <c:v>2442.1</c:v>
+                </c:pt>
+                <c:pt idx="88">
+                  <c:v>2470.1</c:v>
+                </c:pt>
+                <c:pt idx="89">
+                  <c:v>2498.1</c:v>
+                </c:pt>
+                <c:pt idx="90">
+                  <c:v>2526.1</c:v>
+                </c:pt>
+                <c:pt idx="91">
+                  <c:v>2554.1</c:v>
+                </c:pt>
+                <c:pt idx="92">
+                  <c:v>2582.1</c:v>
+                </c:pt>
+                <c:pt idx="93">
+                  <c:v>2610.1</c:v>
+                </c:pt>
+                <c:pt idx="94">
+                  <c:v>2638.1</c:v>
+                </c:pt>
+                <c:pt idx="95">
+                  <c:v>2666.1</c:v>
+                </c:pt>
+                <c:pt idx="96">
+                  <c:v>2694.1</c:v>
+                </c:pt>
+                <c:pt idx="97">
+                  <c:v>2722.1</c:v>
+                </c:pt>
+                <c:pt idx="98">
+                  <c:v>2750.1</c:v>
+                </c:pt>
+                <c:pt idx="99">
+                  <c:v>2778.1</c:v>
+                </c:pt>
+                <c:pt idx="100">
+                  <c:v>2806.1</c:v>
+                </c:pt>
+                <c:pt idx="101">
+                  <c:v>2834.1</c:v>
+                </c:pt>
+                <c:pt idx="102">
+                  <c:v>2862.1</c:v>
+                </c:pt>
+                <c:pt idx="103">
+                  <c:v>2890.1</c:v>
+                </c:pt>
+                <c:pt idx="104">
+                  <c:v>2918.1</c:v>
+                </c:pt>
+                <c:pt idx="105">
+                  <c:v>2946.1</c:v>
+                </c:pt>
+                <c:pt idx="106">
+                  <c:v>2974.1</c:v>
+                </c:pt>
+                <c:pt idx="107">
+                  <c:v>3002.1</c:v>
+                </c:pt>
+                <c:pt idx="108">
+                  <c:v>3030.1</c:v>
+                </c:pt>
+                <c:pt idx="109">
+                  <c:v>3058.1</c:v>
+                </c:pt>
+                <c:pt idx="110">
+                  <c:v>3086.1</c:v>
+                </c:pt>
+                <c:pt idx="111">
+                  <c:v>3114.1</c:v>
+                </c:pt>
+                <c:pt idx="112">
+                  <c:v>3142.1</c:v>
+                </c:pt>
+                <c:pt idx="113">
+                  <c:v>3170.1</c:v>
+                </c:pt>
+                <c:pt idx="114">
+                  <c:v>3198.1</c:v>
+                </c:pt>
+                <c:pt idx="115">
+                  <c:v>3226.1</c:v>
+                </c:pt>
+                <c:pt idx="116">
+                  <c:v>3254.1</c:v>
+                </c:pt>
+                <c:pt idx="117">
+                  <c:v>3282.1</c:v>
+                </c:pt>
+                <c:pt idx="118">
+                  <c:v>3310.1</c:v>
+                </c:pt>
+                <c:pt idx="119">
+                  <c:v>3338.1</c:v>
+                </c:pt>
+                <c:pt idx="120">
+                  <c:v>3366.1</c:v>
+                </c:pt>
+                <c:pt idx="121">
+                  <c:v>3394.1</c:v>
+                </c:pt>
+                <c:pt idx="122">
+                  <c:v>3422.1</c:v>
+                </c:pt>
+                <c:pt idx="123">
+                  <c:v>3450.1</c:v>
+                </c:pt>
+                <c:pt idx="124">
+                  <c:v>3478.1</c:v>
+                </c:pt>
+                <c:pt idx="125">
+                  <c:v>3506.1</c:v>
+                </c:pt>
+                <c:pt idx="126">
+                  <c:v>3534.1</c:v>
+                </c:pt>
+                <c:pt idx="127">
+                  <c:v>3562.1</c:v>
+                </c:pt>
+                <c:pt idx="128">
+                  <c:v>3590.1</c:v>
+                </c:pt>
+                <c:pt idx="129">
+                  <c:v>3618.1</c:v>
+                </c:pt>
+                <c:pt idx="130">
+                  <c:v>3646.1</c:v>
+                </c:pt>
+                <c:pt idx="131">
+                  <c:v>3674.1</c:v>
+                </c:pt>
+                <c:pt idx="132">
+                  <c:v>3702.1</c:v>
+                </c:pt>
+                <c:pt idx="133">
+                  <c:v>3730.1</c:v>
+                </c:pt>
+                <c:pt idx="134">
+                  <c:v>3758.1</c:v>
+                </c:pt>
+                <c:pt idx="135">
+                  <c:v>3786.1</c:v>
+                </c:pt>
+                <c:pt idx="136">
+                  <c:v>3814.1</c:v>
+                </c:pt>
+                <c:pt idx="137">
+                  <c:v>3842.1</c:v>
+                </c:pt>
+                <c:pt idx="138">
+                  <c:v>3870.1</c:v>
+                </c:pt>
+                <c:pt idx="139">
+                  <c:v>3898.1</c:v>
+                </c:pt>
+                <c:pt idx="140">
+                  <c:v>3926.1</c:v>
+                </c:pt>
+                <c:pt idx="141">
+                  <c:v>3954.1</c:v>
+                </c:pt>
+                <c:pt idx="142">
+                  <c:v>3982.2</c:v>
+                </c:pt>
+                <c:pt idx="143">
+                  <c:v>4010.2</c:v>
+                </c:pt>
+                <c:pt idx="144">
+                  <c:v>4038.2</c:v>
+                </c:pt>
+                <c:pt idx="145">
+                  <c:v>4066.2</c:v>
+                </c:pt>
+                <c:pt idx="146">
+                  <c:v>4094.2</c:v>
+                </c:pt>
+                <c:pt idx="147">
+                  <c:v>4122.2</c:v>
+                </c:pt>
+                <c:pt idx="148">
+                  <c:v>4150.2</c:v>
+                </c:pt>
+                <c:pt idx="149">
+                  <c:v>4178.2</c:v>
+                </c:pt>
+                <c:pt idx="150">
+                  <c:v>4206.2</c:v>
+                </c:pt>
+                <c:pt idx="151">
+                  <c:v>4234.2</c:v>
+                </c:pt>
+                <c:pt idx="152">
+                  <c:v>4262.2</c:v>
+                </c:pt>
+                <c:pt idx="153">
+                  <c:v>4290.2</c:v>
+                </c:pt>
+                <c:pt idx="154">
+                  <c:v>4318.2</c:v>
+                </c:pt>
+                <c:pt idx="155">
+                  <c:v>4346.2</c:v>
+                </c:pt>
+                <c:pt idx="156">
+                  <c:v>4374.2</c:v>
+                </c:pt>
+                <c:pt idx="157">
+                  <c:v>4402.2</c:v>
+                </c:pt>
+                <c:pt idx="158">
+                  <c:v>4430.2</c:v>
+                </c:pt>
+                <c:pt idx="159">
+                  <c:v>4458.2</c:v>
+                </c:pt>
+                <c:pt idx="160">
+                  <c:v>4486.2</c:v>
+                </c:pt>
+                <c:pt idx="161">
+                  <c:v>4514.2</c:v>
+                </c:pt>
+                <c:pt idx="162">
+                  <c:v>4542.2</c:v>
+                </c:pt>
+                <c:pt idx="163">
+                  <c:v>4570.2</c:v>
+                </c:pt>
+                <c:pt idx="164">
+                  <c:v>4598.2</c:v>
+                </c:pt>
+                <c:pt idx="165">
+                  <c:v>4626.2</c:v>
+                </c:pt>
+                <c:pt idx="166">
+                  <c:v>4654.2</c:v>
+                </c:pt>
+                <c:pt idx="167">
+                  <c:v>4682.2</c:v>
+                </c:pt>
+                <c:pt idx="168">
+                  <c:v>4710.2</c:v>
+                </c:pt>
+                <c:pt idx="169">
+                  <c:v>4738.2</c:v>
+                </c:pt>
+                <c:pt idx="170">
+                  <c:v>4766.2</c:v>
+                </c:pt>
+                <c:pt idx="171">
+                  <c:v>4794.2</c:v>
+                </c:pt>
+                <c:pt idx="172">
+                  <c:v>4822.2</c:v>
+                </c:pt>
+                <c:pt idx="173">
+                  <c:v>4850.2</c:v>
+                </c:pt>
+                <c:pt idx="174">
+                  <c:v>4878.2</c:v>
+                </c:pt>
+                <c:pt idx="175">
+                  <c:v>4906.2</c:v>
+                </c:pt>
+                <c:pt idx="176">
+                  <c:v>4934.2</c:v>
+                </c:pt>
+                <c:pt idx="177">
+                  <c:v>4962.2</c:v>
+                </c:pt>
+                <c:pt idx="178">
+                  <c:v>4990.2</c:v>
+                </c:pt>
+                <c:pt idx="179">
+                  <c:v>5018.2</c:v>
+                </c:pt>
+                <c:pt idx="180">
+                  <c:v>5046.2</c:v>
+                </c:pt>
+                <c:pt idx="181">
+                  <c:v>5074.2</c:v>
+                </c:pt>
+                <c:pt idx="182">
+                  <c:v>5102.2</c:v>
+                </c:pt>
+                <c:pt idx="183">
+                  <c:v>5130.2</c:v>
+                </c:pt>
+                <c:pt idx="184">
+                  <c:v>5158.2</c:v>
+                </c:pt>
+                <c:pt idx="185">
+                  <c:v>5186.2</c:v>
+                </c:pt>
+                <c:pt idx="186">
+                  <c:v>5214.2</c:v>
+                </c:pt>
+                <c:pt idx="187">
+                  <c:v>5242.2</c:v>
+                </c:pt>
+                <c:pt idx="188">
+                  <c:v>5270.2</c:v>
+                </c:pt>
+                <c:pt idx="189">
+                  <c:v>5298.2</c:v>
+                </c:pt>
+                <c:pt idx="190">
+                  <c:v>5326.2</c:v>
+                </c:pt>
+              </c:numCache>
+            </c:numRef>
+          </c:xVal>
+          <c:yVal>
+            <c:numRef>
+              <c:f>Sheet1!$D$2:$D$192</c:f>
+              <c:numCache>
+                <c:formatCode>General</c:formatCode>
+                <c:ptCount val="191"/>
+                <c:pt idx="0">
+                  <c:v>47.84</c:v>
+                </c:pt>
+                <c:pt idx="1">
+                  <c:v>84.06</c:v>
+                </c:pt>
+                <c:pt idx="2">
+                  <c:v>81.94</c:v>
+                </c:pt>
+                <c:pt idx="3">
+                  <c:v>82.51</c:v>
+                </c:pt>
+                <c:pt idx="4">
+                  <c:v>68.25</c:v>
+                </c:pt>
+                <c:pt idx="5">
+                  <c:v>89.09</c:v>
+                </c:pt>
+                <c:pt idx="6">
+                  <c:v>78.04</c:v>
+                </c:pt>
+                <c:pt idx="7">
+                  <c:v>71.92</c:v>
+                </c:pt>
+                <c:pt idx="8">
+                  <c:v>77.68</c:v>
+                </c:pt>
+                <c:pt idx="9">
+                  <c:v>90.37</c:v>
+                </c:pt>
+                <c:pt idx="10">
+                  <c:v>93.32</c:v>
+                </c:pt>
+                <c:pt idx="11">
+                  <c:v>94.71</c:v>
+                </c:pt>
+                <c:pt idx="12">
+                  <c:v>84.88</c:v>
+                </c:pt>
+                <c:pt idx="13">
+                  <c:v>94.4</c:v>
+                </c:pt>
+                <c:pt idx="14">
+                  <c:v>78.73</c:v>
+                </c:pt>
+                <c:pt idx="15">
+                  <c:v>75.93</c:v>
+                </c:pt>
+                <c:pt idx="16">
+                  <c:v>91.02</c:v>
+                </c:pt>
+                <c:pt idx="17">
+                  <c:v>91.4</c:v>
+                </c:pt>
+                <c:pt idx="18">
+                  <c:v>93.97</c:v>
+                </c:pt>
+                <c:pt idx="19">
+                  <c:v>77.29</c:v>
+                </c:pt>
+                <c:pt idx="20">
+                  <c:v>88.97</c:v>
+                </c:pt>
+                <c:pt idx="21">
+                  <c:v>63.78</c:v>
+                </c:pt>
+                <c:pt idx="22">
+                  <c:v>87.26</c:v>
+                </c:pt>
+                <c:pt idx="23">
+                  <c:v>75.68</c:v>
+                </c:pt>
+                <c:pt idx="24">
+                  <c:v>59.68</c:v>
+                </c:pt>
+                <c:pt idx="25">
+                  <c:v>71.89</c:v>
+                </c:pt>
+                <c:pt idx="26">
+                  <c:v>85.77</c:v>
+                </c:pt>
+                <c:pt idx="27">
+                  <c:v>80.66</c:v>
+                </c:pt>
+                <c:pt idx="28">
+                  <c:v>85.16</c:v>
+                </c:pt>
+                <c:pt idx="29">
+                  <c:v>84.91</c:v>
+                </c:pt>
+                <c:pt idx="30">
+                  <c:v>87.01</c:v>
+                </c:pt>
+                <c:pt idx="31">
+                  <c:v>81.85</c:v>
+                </c:pt>
+                <c:pt idx="32">
+                  <c:v>74.49</c:v>
+                </c:pt>
+                <c:pt idx="33">
+                  <c:v>72.98</c:v>
+                </c:pt>
+                <c:pt idx="34">
+                  <c:v>80.03</c:v>
+                </c:pt>
+                <c:pt idx="35">
+                  <c:v>76.33</c:v>
+                </c:pt>
+                <c:pt idx="36">
+                  <c:v>84.85</c:v>
+                </c:pt>
+                <c:pt idx="37">
+                  <c:v>90.69</c:v>
+                </c:pt>
+                <c:pt idx="38">
+                  <c:v>71.88</c:v>
+                </c:pt>
+                <c:pt idx="39">
+                  <c:v>67.27</c:v>
+                </c:pt>
+                <c:pt idx="40">
+                  <c:v>78.95</c:v>
+                </c:pt>
+                <c:pt idx="41">
+                  <c:v>68.46</c:v>
+                </c:pt>
+                <c:pt idx="42">
+                  <c:v>83.36</c:v>
+                </c:pt>
+                <c:pt idx="43">
+                  <c:v>86.14</c:v>
+                </c:pt>
+                <c:pt idx="44">
+                  <c:v>92.74</c:v>
+                </c:pt>
+                <c:pt idx="45">
+                  <c:v>79.19</c:v>
+                </c:pt>
+                <c:pt idx="46">
+                  <c:v>78.52</c:v>
+                </c:pt>
+                <c:pt idx="47">
+                  <c:v>80.18</c:v>
+                </c:pt>
+                <c:pt idx="48">
+                  <c:v>79.91</c:v>
+                </c:pt>
+                <c:pt idx="49">
+                  <c:v>78.32</c:v>
+                </c:pt>
+                <c:pt idx="50">
+                  <c:v>81.14</c:v>
+                </c:pt>
+                <c:pt idx="51">
+                  <c:v>77.88</c:v>
+                </c:pt>
+                <c:pt idx="52">
+                  <c:v>90.48</c:v>
+                </c:pt>
+                <c:pt idx="53">
+                  <c:v>78.09</c:v>
+                </c:pt>
+                <c:pt idx="54">
+                  <c:v>85.13</c:v>
+                </c:pt>
+                <c:pt idx="55">
+                  <c:v>90.49</c:v>
+                </c:pt>
+                <c:pt idx="56">
+                  <c:v>91.85</c:v>
+                </c:pt>
+                <c:pt idx="57">
+                  <c:v>87.24</c:v>
+                </c:pt>
+                <c:pt idx="58">
+                  <c:v>76.68</c:v>
+                </c:pt>
+                <c:pt idx="59">
+                  <c:v>89.37</c:v>
+                </c:pt>
+                <c:pt idx="60">
+                  <c:v>89.08</c:v>
+                </c:pt>
+                <c:pt idx="61">
+                  <c:v>85.55</c:v>
+                </c:pt>
+                <c:pt idx="62">
+                  <c:v>67.01</c:v>
+                </c:pt>
+                <c:pt idx="63">
+                  <c:v>78.31</c:v>
+                </c:pt>
+                <c:pt idx="64">
+                  <c:v>80.88</c:v>
+                </c:pt>
+                <c:pt idx="65">
+                  <c:v>89.87</c:v>
+                </c:pt>
+                <c:pt idx="66">
+                  <c:v>78.37</c:v>
+                </c:pt>
+                <c:pt idx="67">
+                  <c:v>70.79</c:v>
+                </c:pt>
+                <c:pt idx="68">
+                  <c:v>78.74</c:v>
+                </c:pt>
+                <c:pt idx="69">
+                  <c:v>81.47</c:v>
+                </c:pt>
+                <c:pt idx="70">
+                  <c:v>86.06</c:v>
+                </c:pt>
+                <c:pt idx="71">
+                  <c:v>73.77</c:v>
+                </c:pt>
+                <c:pt idx="72">
+                  <c:v>72.43</c:v>
+                </c:pt>
+                <c:pt idx="73">
+                  <c:v>76.11</c:v>
+                </c:pt>
+                <c:pt idx="74">
+                  <c:v>84.93</c:v>
+                </c:pt>
+                <c:pt idx="75">
+                  <c:v>73.63</c:v>
+                </c:pt>
+                <c:pt idx="76">
+                  <c:v>74.54</c:v>
+                </c:pt>
+                <c:pt idx="77">
+                  <c:v>78.58</c:v>
+                </c:pt>
+                <c:pt idx="78">
+                  <c:v>79.3</c:v>
+                </c:pt>
+                <c:pt idx="79">
+                  <c:v>91.63</c:v>
+                </c:pt>
+                <c:pt idx="80">
+                  <c:v>87.29</c:v>
+                </c:pt>
+                <c:pt idx="81">
+                  <c:v>92.29</c:v>
+                </c:pt>
+                <c:pt idx="82">
+                  <c:v>84.97</c:v>
+                </c:pt>
+                <c:pt idx="83">
+                  <c:v>92.39</c:v>
+                </c:pt>
+                <c:pt idx="84">
+                  <c:v>92.98</c:v>
+                </c:pt>
+                <c:pt idx="85">
+                  <c:v>80.82</c:v>
+                </c:pt>
+                <c:pt idx="86">
+                  <c:v>60.69</c:v>
+                </c:pt>
+                <c:pt idx="87">
+                  <c:v>66.34</c:v>
+                </c:pt>
+                <c:pt idx="88">
+                  <c:v>60.58</c:v>
+                </c:pt>
+                <c:pt idx="89">
+                  <c:v>69.22</c:v>
+                </c:pt>
+                <c:pt idx="90">
+                  <c:v>63.14</c:v>
+                </c:pt>
+                <c:pt idx="91">
+                  <c:v>69.19</c:v>
+                </c:pt>
+                <c:pt idx="92">
+                  <c:v>85.18</c:v>
+                </c:pt>
+                <c:pt idx="93">
+                  <c:v>71.94</c:v>
+                </c:pt>
+                <c:pt idx="94">
+                  <c:v>81.66</c:v>
+                </c:pt>
+                <c:pt idx="95">
+                  <c:v>82.04</c:v>
+                </c:pt>
+                <c:pt idx="96">
+                  <c:v>74.32</c:v>
+                </c:pt>
+                <c:pt idx="97">
+                  <c:v>82.75</c:v>
+                </c:pt>
+                <c:pt idx="98">
+                  <c:v>96.16</c:v>
+                </c:pt>
+                <c:pt idx="99">
+                  <c:v>82.69</c:v>
+                </c:pt>
+                <c:pt idx="100">
+                  <c:v>83.99</c:v>
+                </c:pt>
+                <c:pt idx="101">
+                  <c:v>74.51</c:v>
+                </c:pt>
+                <c:pt idx="102">
+                  <c:v>70.24</c:v>
+                </c:pt>
+                <c:pt idx="103">
+                  <c:v>79.51</c:v>
+                </c:pt>
+                <c:pt idx="104">
+                  <c:v>84.33</c:v>
+                </c:pt>
+                <c:pt idx="105">
+                  <c:v>79.8</c:v>
+                </c:pt>
+                <c:pt idx="106">
+                  <c:v>86.33</c:v>
+                </c:pt>
+                <c:pt idx="107">
+                  <c:v>89.45</c:v>
+                </c:pt>
+                <c:pt idx="108">
+                  <c:v>74.7</c:v>
+                </c:pt>
+                <c:pt idx="109">
+                  <c:v>74.91</c:v>
+                </c:pt>
+                <c:pt idx="110">
+                  <c:v>76.75</c:v>
+                </c:pt>
+                <c:pt idx="111">
+                  <c:v>78.33</c:v>
+                </c:pt>
+                <c:pt idx="112">
+                  <c:v>73.74</c:v>
+                </c:pt>
+                <c:pt idx="113">
+                  <c:v>83.8</c:v>
+                </c:pt>
+                <c:pt idx="114">
+                  <c:v>57.09</c:v>
+                </c:pt>
+                <c:pt idx="115">
+                  <c:v>87.76</c:v>
+                </c:pt>
+                <c:pt idx="116">
+                  <c:v>88.36</c:v>
+                </c:pt>
+                <c:pt idx="117">
+                  <c:v>75.29</c:v>
+                </c:pt>
+                <c:pt idx="118">
+                  <c:v>80.55</c:v>
+                </c:pt>
+                <c:pt idx="119">
+                  <c:v>84.1</c:v>
+                </c:pt>
+                <c:pt idx="120">
+                  <c:v>77.63</c:v>
+                </c:pt>
+                <c:pt idx="121">
+                  <c:v>80.91</c:v>
+                </c:pt>
+                <c:pt idx="122">
+                  <c:v>89.67</c:v>
+                </c:pt>
+                <c:pt idx="123">
+                  <c:v>62.65</c:v>
+                </c:pt>
+                <c:pt idx="124">
+                  <c:v>68.4</c:v>
+                </c:pt>
+                <c:pt idx="125">
+                  <c:v>77.63</c:v>
+                </c:pt>
+                <c:pt idx="126">
+                  <c:v>71.35</c:v>
+                </c:pt>
+                <c:pt idx="127">
+                  <c:v>79.84</c:v>
+                </c:pt>
+                <c:pt idx="128">
+                  <c:v>89.51</c:v>
+                </c:pt>
+                <c:pt idx="129">
+                  <c:v>88.7</c:v>
+                </c:pt>
+                <c:pt idx="130">
+                  <c:v>81.2</c:v>
+                </c:pt>
+                <c:pt idx="131">
+                  <c:v>76.73</c:v>
+                </c:pt>
+                <c:pt idx="132">
+                  <c:v>73.37</c:v>
+                </c:pt>
+                <c:pt idx="133">
+                  <c:v>72.43</c:v>
+                </c:pt>
+                <c:pt idx="134">
+                  <c:v>68.84</c:v>
+                </c:pt>
+                <c:pt idx="135">
+                  <c:v>69.86</c:v>
+                </c:pt>
+                <c:pt idx="136">
+                  <c:v>80.87</c:v>
+                </c:pt>
+                <c:pt idx="137">
+                  <c:v>87.66</c:v>
+                </c:pt>
+                <c:pt idx="138">
+                  <c:v>90.19</c:v>
+                </c:pt>
+                <c:pt idx="139">
+                  <c:v>79.48</c:v>
+                </c:pt>
+                <c:pt idx="140">
+                  <c:v>90.61</c:v>
+                </c:pt>
+                <c:pt idx="141">
+                  <c:v>93.19</c:v>
+                </c:pt>
+                <c:pt idx="142">
+                  <c:v>79.92</c:v>
+                </c:pt>
+                <c:pt idx="143">
+                  <c:v>85.42</c:v>
+                </c:pt>
+                <c:pt idx="144">
+                  <c:v>70.1</c:v>
+                </c:pt>
+                <c:pt idx="145">
+                  <c:v>80.36</c:v>
+                </c:pt>
+                <c:pt idx="146">
+                  <c:v>85.39</c:v>
+                </c:pt>
+                <c:pt idx="147">
+                  <c:v>91.38</c:v>
+                </c:pt>
+                <c:pt idx="148">
+                  <c:v>96.01</c:v>
+                </c:pt>
+                <c:pt idx="149">
+                  <c:v>77.31</c:v>
+                </c:pt>
+                <c:pt idx="150">
+                  <c:v>72.41</c:v>
+                </c:pt>
+                <c:pt idx="151">
+                  <c:v>67.33</c:v>
+                </c:pt>
+                <c:pt idx="152">
+                  <c:v>75.53</c:v>
+                </c:pt>
+                <c:pt idx="153">
+                  <c:v>84.57</c:v>
+                </c:pt>
+                <c:pt idx="154">
+                  <c:v>83.6</c:v>
+                </c:pt>
+                <c:pt idx="155">
+                  <c:v>74.57</c:v>
+                </c:pt>
+                <c:pt idx="156">
+                  <c:v>87.57</c:v>
+                </c:pt>
+                <c:pt idx="157">
+                  <c:v>88.39</c:v>
+                </c:pt>
+                <c:pt idx="158">
+                  <c:v>81.4</c:v>
+                </c:pt>
+                <c:pt idx="159">
+                  <c:v>69.54</c:v>
+                </c:pt>
+                <c:pt idx="160">
+                  <c:v>68.04</c:v>
+                </c:pt>
+                <c:pt idx="161">
+                  <c:v>73.73</c:v>
+                </c:pt>
+                <c:pt idx="162">
+                  <c:v>89.61</c:v>
+                </c:pt>
+                <c:pt idx="163">
+                  <c:v>69.41</c:v>
+                </c:pt>
+                <c:pt idx="164">
+                  <c:v>69.63</c:v>
+                </c:pt>
+                <c:pt idx="165">
+                  <c:v>67.97</c:v>
+                </c:pt>
+                <c:pt idx="166">
+                  <c:v>66.26</c:v>
+                </c:pt>
+                <c:pt idx="167">
+                  <c:v>79.07</c:v>
+                </c:pt>
+                <c:pt idx="168">
+                  <c:v>83.41</c:v>
+                </c:pt>
+                <c:pt idx="169">
+                  <c:v>73.84</c:v>
+                </c:pt>
+                <c:pt idx="170">
+                  <c:v>81.9</c:v>
+                </c:pt>
+                <c:pt idx="171">
+                  <c:v>73.99</c:v>
+                </c:pt>
+                <c:pt idx="172">
+                  <c:v>82.21</c:v>
+                </c:pt>
+                <c:pt idx="173">
+                  <c:v>67.83</c:v>
+                </c:pt>
+                <c:pt idx="174">
+                  <c:v>61.09</c:v>
+                </c:pt>
+                <c:pt idx="175">
+                  <c:v>74.49</c:v>
+                </c:pt>
+                <c:pt idx="176">
+                  <c:v>83.88</c:v>
+                </c:pt>
+                <c:pt idx="177">
+                  <c:v>70.91</c:v>
+                </c:pt>
+                <c:pt idx="178">
+                  <c:v>80.48</c:v>
+                </c:pt>
+                <c:pt idx="179">
+                  <c:v>74.59</c:v>
+                </c:pt>
+                <c:pt idx="180">
+                  <c:v>85.62</c:v>
+                </c:pt>
+                <c:pt idx="181">
+                  <c:v>73.5</c:v>
+                </c:pt>
+                <c:pt idx="182">
+                  <c:v>79.63</c:v>
+                </c:pt>
+                <c:pt idx="183">
+                  <c:v>81.74</c:v>
+                </c:pt>
+                <c:pt idx="184">
+                  <c:v>79.06</c:v>
+                </c:pt>
+                <c:pt idx="185">
+                  <c:v>77.66</c:v>
+                </c:pt>
+                <c:pt idx="186">
+                  <c:v>81.8</c:v>
+                </c:pt>
+                <c:pt idx="187">
+                  <c:v>72.74</c:v>
+                </c:pt>
+                <c:pt idx="188">
+                  <c:v>79.37</c:v>
+                </c:pt>
+                <c:pt idx="189">
+                  <c:v>71.72</c:v>
+                </c:pt>
+                <c:pt idx="190">
+                  <c:v>52.12</c:v>
+                </c:pt>
+              </c:numCache>
+            </c:numRef>
+          </c:yVal>
+          <c:smooth val="0"/>
+        </c:ser>
+        <c:ser>
+          <c:idx val="3"/>
+          <c:order val="3"/>
+          <c:tx>
+            <c:strRef>
+              <c:f>Sheet1!$E$1</c:f>
+              <c:strCache>
+                <c:ptCount val="1"/>
+                <c:pt idx="0">
+                  <c:v>Ours Decode</c:v>
+                </c:pt>
+              </c:strCache>
+            </c:strRef>
+          </c:tx>
+          <c:spPr>
+            <a:solidFill>
+              <a:srgbClr val="7FD9BE"/>
+            </a:solidFill>
+            <a:ln w="28575" cap="flat">
+              <a:solidFill>
+                <a:srgbClr val="7FD9BE"/>
+              </a:solidFill>
+              <a:prstDash val="solid"/>
+              <a:round/>
+            </a:ln>
+            <a:effectLst/>
+          </c:spPr>
+          <c:marker>
+            <c:symbol val="none"/>
+            <c:size val="6"/>
+            <c:spPr>
+              <a:solidFill>
+                <a:srgbClr val="7FD9BE"/>
+              </a:solidFill>
+              <a:ln w="9525" cap="flat">
+                <a:solidFill>
+                  <a:srgbClr val="7FD9BE"/>
+                </a:solidFill>
+                <a:prstDash val="solid"/>
+                <a:round/>
+              </a:ln>
+              <a:effectLst/>
+            </c:spPr>
+          </c:marker>
+          <c:xVal>
+            <c:numRef>
+              <c:f>Sheet1!$A$2:$A$192</c:f>
+              <c:numCache>
+                <c:formatCode>General</c:formatCode>
+                <c:ptCount val="191"/>
+                <c:pt idx="0">
+                  <c:v>6</c:v>
+                </c:pt>
+                <c:pt idx="1">
+                  <c:v>34</c:v>
+                </c:pt>
+                <c:pt idx="2">
+                  <c:v>62</c:v>
+                </c:pt>
+                <c:pt idx="3">
+                  <c:v>90</c:v>
+                </c:pt>
+                <c:pt idx="4">
+                  <c:v>118</c:v>
+                </c:pt>
+                <c:pt idx="5">
+                  <c:v>146</c:v>
+                </c:pt>
+                <c:pt idx="6">
+                  <c:v>174</c:v>
+                </c:pt>
+                <c:pt idx="7">
+                  <c:v>202</c:v>
+                </c:pt>
+                <c:pt idx="8">
+                  <c:v>230</c:v>
+                </c:pt>
+                <c:pt idx="9">
+                  <c:v>258</c:v>
+                </c:pt>
+                <c:pt idx="10">
+                  <c:v>286</c:v>
+                </c:pt>
+                <c:pt idx="11">
+                  <c:v>314</c:v>
+                </c:pt>
+                <c:pt idx="12">
+                  <c:v>342</c:v>
+                </c:pt>
+                <c:pt idx="13">
+                  <c:v>370</c:v>
+                </c:pt>
+                <c:pt idx="14">
+                  <c:v>398</c:v>
+                </c:pt>
+                <c:pt idx="15">
+                  <c:v>426</c:v>
+                </c:pt>
+                <c:pt idx="16">
+                  <c:v>454</c:v>
+                </c:pt>
+                <c:pt idx="17">
+                  <c:v>482</c:v>
+                </c:pt>
+                <c:pt idx="18">
+                  <c:v>510</c:v>
+                </c:pt>
+                <c:pt idx="19">
+                  <c:v>538</c:v>
+                </c:pt>
+                <c:pt idx="20">
+                  <c:v>566</c:v>
+                </c:pt>
+                <c:pt idx="21">
+                  <c:v>594</c:v>
+                </c:pt>
+                <c:pt idx="22">
+                  <c:v>622</c:v>
+                </c:pt>
+                <c:pt idx="23">
+                  <c:v>650</c:v>
+                </c:pt>
+                <c:pt idx="24">
+                  <c:v>678</c:v>
+                </c:pt>
+                <c:pt idx="25">
+                  <c:v>706</c:v>
+                </c:pt>
+                <c:pt idx="26">
+                  <c:v>734</c:v>
+                </c:pt>
+                <c:pt idx="27">
+                  <c:v>762</c:v>
+                </c:pt>
+                <c:pt idx="28">
+                  <c:v>790</c:v>
+                </c:pt>
+                <c:pt idx="29">
+                  <c:v>818</c:v>
+                </c:pt>
+                <c:pt idx="30">
+                  <c:v>846</c:v>
+                </c:pt>
+                <c:pt idx="31">
+                  <c:v>874</c:v>
+                </c:pt>
+                <c:pt idx="32">
+                  <c:v>902</c:v>
+                </c:pt>
+                <c:pt idx="33">
+                  <c:v>930</c:v>
+                </c:pt>
+                <c:pt idx="34">
+                  <c:v>958</c:v>
+                </c:pt>
+                <c:pt idx="35">
+                  <c:v>986</c:v>
+                </c:pt>
+                <c:pt idx="36">
+                  <c:v>1014</c:v>
+                </c:pt>
+                <c:pt idx="37">
+                  <c:v>1042</c:v>
+                </c:pt>
+                <c:pt idx="38">
+                  <c:v>1070</c:v>
+                </c:pt>
+                <c:pt idx="39">
+                  <c:v>1098</c:v>
+                </c:pt>
+                <c:pt idx="40">
+                  <c:v>1126</c:v>
+                </c:pt>
+                <c:pt idx="41">
+                  <c:v>1154</c:v>
+                </c:pt>
+                <c:pt idx="42">
+                  <c:v>1182</c:v>
+                </c:pt>
+                <c:pt idx="43">
+                  <c:v>1210</c:v>
+                </c:pt>
+                <c:pt idx="44">
+                  <c:v>1238</c:v>
+                </c:pt>
+                <c:pt idx="45">
+                  <c:v>1266</c:v>
+                </c:pt>
+                <c:pt idx="46">
+                  <c:v>1294</c:v>
+                </c:pt>
+                <c:pt idx="47">
+                  <c:v>1322.1</c:v>
+                </c:pt>
+                <c:pt idx="48">
+                  <c:v>1350.1</c:v>
+                </c:pt>
+                <c:pt idx="49">
+                  <c:v>1378.1</c:v>
+                </c:pt>
+                <c:pt idx="50">
+                  <c:v>1406.1</c:v>
+                </c:pt>
+                <c:pt idx="51">
+                  <c:v>1434.1</c:v>
+                </c:pt>
+                <c:pt idx="52">
+                  <c:v>1462.1</c:v>
+                </c:pt>
+                <c:pt idx="53">
+                  <c:v>1490.1</c:v>
+                </c:pt>
+                <c:pt idx="54">
+                  <c:v>1518.1</c:v>
+                </c:pt>
+                <c:pt idx="55">
+                  <c:v>1546.1</c:v>
+                </c:pt>
+                <c:pt idx="56">
+                  <c:v>1574.1</c:v>
+                </c:pt>
+                <c:pt idx="57">
+                  <c:v>1602.1</c:v>
+                </c:pt>
+                <c:pt idx="58">
+                  <c:v>1630.1</c:v>
+                </c:pt>
+                <c:pt idx="59">
+                  <c:v>1658.1</c:v>
+                </c:pt>
+                <c:pt idx="60">
+                  <c:v>1686.1</c:v>
+                </c:pt>
+                <c:pt idx="61">
+                  <c:v>1714.1</c:v>
+                </c:pt>
+                <c:pt idx="62">
+                  <c:v>1742.1</c:v>
+                </c:pt>
+                <c:pt idx="63">
+                  <c:v>1770.1</c:v>
+                </c:pt>
+                <c:pt idx="64">
+                  <c:v>1798.1</c:v>
+                </c:pt>
+                <c:pt idx="65">
+                  <c:v>1826.1</c:v>
+                </c:pt>
+                <c:pt idx="66">
+                  <c:v>1854.1</c:v>
+                </c:pt>
+                <c:pt idx="67">
+                  <c:v>1882.1</c:v>
+                </c:pt>
+                <c:pt idx="68">
+                  <c:v>1910.1</c:v>
+                </c:pt>
+                <c:pt idx="69">
+                  <c:v>1938.1</c:v>
+                </c:pt>
+                <c:pt idx="70">
+                  <c:v>1966.1</c:v>
+                </c:pt>
+                <c:pt idx="71">
+                  <c:v>1994.1</c:v>
+                </c:pt>
+                <c:pt idx="72">
+                  <c:v>2022.1</c:v>
+                </c:pt>
+                <c:pt idx="73">
+                  <c:v>2050.1</c:v>
+                </c:pt>
+                <c:pt idx="74">
+                  <c:v>2078.1</c:v>
+                </c:pt>
+                <c:pt idx="75">
+                  <c:v>2106.1</c:v>
+                </c:pt>
+                <c:pt idx="76">
+                  <c:v>2134.1</c:v>
+                </c:pt>
+                <c:pt idx="77">
+                  <c:v>2162.1</c:v>
+                </c:pt>
+                <c:pt idx="78">
+                  <c:v>2190.1</c:v>
+                </c:pt>
+                <c:pt idx="79">
+                  <c:v>2218.1</c:v>
+                </c:pt>
+                <c:pt idx="80">
+                  <c:v>2246.1</c:v>
+                </c:pt>
+                <c:pt idx="81">
+                  <c:v>2274.1</c:v>
+                </c:pt>
+                <c:pt idx="82">
+                  <c:v>2302.1</c:v>
+                </c:pt>
+                <c:pt idx="83">
+                  <c:v>2330.1</c:v>
+                </c:pt>
+                <c:pt idx="84">
+                  <c:v>2358.1</c:v>
+                </c:pt>
+                <c:pt idx="85">
+                  <c:v>2386.1</c:v>
+                </c:pt>
+                <c:pt idx="86">
+                  <c:v>2414.1</c:v>
+                </c:pt>
+                <c:pt idx="87">
+                  <c:v>2442.1</c:v>
+                </c:pt>
+                <c:pt idx="88">
+                  <c:v>2470.1</c:v>
+                </c:pt>
+                <c:pt idx="89">
+                  <c:v>2498.1</c:v>
+                </c:pt>
+                <c:pt idx="90">
+                  <c:v>2526.1</c:v>
+                </c:pt>
+                <c:pt idx="91">
+                  <c:v>2554.1</c:v>
+                </c:pt>
+                <c:pt idx="92">
+                  <c:v>2582.1</c:v>
+                </c:pt>
+                <c:pt idx="93">
+                  <c:v>2610.1</c:v>
+                </c:pt>
+                <c:pt idx="94">
+                  <c:v>2638.1</c:v>
+                </c:pt>
+                <c:pt idx="95">
+                  <c:v>2666.1</c:v>
+                </c:pt>
+                <c:pt idx="96">
+                  <c:v>2694.1</c:v>
+                </c:pt>
+                <c:pt idx="97">
+                  <c:v>2722.1</c:v>
+                </c:pt>
+                <c:pt idx="98">
+                  <c:v>2750.1</c:v>
+                </c:pt>
+                <c:pt idx="99">
+                  <c:v>2778.1</c:v>
+                </c:pt>
+                <c:pt idx="100">
+                  <c:v>2806.1</c:v>
+                </c:pt>
+                <c:pt idx="101">
+                  <c:v>2834.1</c:v>
+                </c:pt>
+                <c:pt idx="102">
+                  <c:v>2862.1</c:v>
+                </c:pt>
+                <c:pt idx="103">
+                  <c:v>2890.1</c:v>
+                </c:pt>
+                <c:pt idx="104">
+                  <c:v>2918.1</c:v>
+                </c:pt>
+                <c:pt idx="105">
+                  <c:v>2946.1</c:v>
+                </c:pt>
+                <c:pt idx="106">
+                  <c:v>2974.1</c:v>
+                </c:pt>
+                <c:pt idx="107">
+                  <c:v>3002.1</c:v>
+                </c:pt>
+                <c:pt idx="108">
+                  <c:v>3030.1</c:v>
+                </c:pt>
+                <c:pt idx="109">
+                  <c:v>3058.1</c:v>
+                </c:pt>
+                <c:pt idx="110">
+                  <c:v>3086.1</c:v>
+                </c:pt>
+                <c:pt idx="111">
+                  <c:v>3114.1</c:v>
+                </c:pt>
+                <c:pt idx="112">
+                  <c:v>3142.1</c:v>
+                </c:pt>
+                <c:pt idx="113">
+                  <c:v>3170.1</c:v>
+                </c:pt>
+                <c:pt idx="114">
+                  <c:v>3198.1</c:v>
+                </c:pt>
+                <c:pt idx="115">
+                  <c:v>3226.1</c:v>
+                </c:pt>
+                <c:pt idx="116">
+                  <c:v>3254.1</c:v>
+                </c:pt>
+                <c:pt idx="117">
+                  <c:v>3282.1</c:v>
+                </c:pt>
+                <c:pt idx="118">
+                  <c:v>3310.1</c:v>
+                </c:pt>
+                <c:pt idx="119">
+                  <c:v>3338.1</c:v>
+                </c:pt>
+                <c:pt idx="120">
+                  <c:v>3366.1</c:v>
+                </c:pt>
+                <c:pt idx="121">
+                  <c:v>3394.1</c:v>
+                </c:pt>
+                <c:pt idx="122">
+                  <c:v>3422.1</c:v>
+                </c:pt>
+                <c:pt idx="123">
+                  <c:v>3450.1</c:v>
+                </c:pt>
+                <c:pt idx="124">
+                  <c:v>3478.1</c:v>
+                </c:pt>
+                <c:pt idx="125">
+                  <c:v>3506.1</c:v>
+                </c:pt>
+                <c:pt idx="126">
+                  <c:v>3534.1</c:v>
+                </c:pt>
+                <c:pt idx="127">
+                  <c:v>3562.1</c:v>
+                </c:pt>
+                <c:pt idx="128">
+                  <c:v>3590.1</c:v>
+                </c:pt>
+                <c:pt idx="129">
+                  <c:v>3618.1</c:v>
+                </c:pt>
+                <c:pt idx="130">
+                  <c:v>3646.1</c:v>
+                </c:pt>
+                <c:pt idx="131">
+                  <c:v>3674.1</c:v>
+                </c:pt>
+                <c:pt idx="132">
+                  <c:v>3702.1</c:v>
+                </c:pt>
+                <c:pt idx="133">
+                  <c:v>3730.1</c:v>
+                </c:pt>
+                <c:pt idx="134">
+                  <c:v>3758.1</c:v>
+                </c:pt>
+                <c:pt idx="135">
+                  <c:v>3786.1</c:v>
+                </c:pt>
+                <c:pt idx="136">
+                  <c:v>3814.1</c:v>
+                </c:pt>
+                <c:pt idx="137">
+                  <c:v>3842.1</c:v>
+                </c:pt>
+                <c:pt idx="138">
+                  <c:v>3870.1</c:v>
+                </c:pt>
+                <c:pt idx="139">
+                  <c:v>3898.1</c:v>
+                </c:pt>
+                <c:pt idx="140">
+                  <c:v>3926.1</c:v>
+                </c:pt>
+                <c:pt idx="141">
+                  <c:v>3954.1</c:v>
+                </c:pt>
+                <c:pt idx="142">
+                  <c:v>3982.2</c:v>
+                </c:pt>
+                <c:pt idx="143">
+                  <c:v>4010.2</c:v>
+                </c:pt>
+                <c:pt idx="144">
+                  <c:v>4038.2</c:v>
+                </c:pt>
+                <c:pt idx="145">
+                  <c:v>4066.2</c:v>
+                </c:pt>
+                <c:pt idx="146">
+                  <c:v>4094.2</c:v>
+                </c:pt>
+                <c:pt idx="147">
+                  <c:v>4122.2</c:v>
+                </c:pt>
+                <c:pt idx="148">
+                  <c:v>4150.2</c:v>
+                </c:pt>
+                <c:pt idx="149">
+                  <c:v>4178.2</c:v>
+                </c:pt>
+                <c:pt idx="150">
+                  <c:v>4206.2</c:v>
+                </c:pt>
+                <c:pt idx="151">
+                  <c:v>4234.2</c:v>
+                </c:pt>
+                <c:pt idx="152">
+                  <c:v>4262.2</c:v>
+                </c:pt>
+                <c:pt idx="153">
+                  <c:v>4290.2</c:v>
+                </c:pt>
+                <c:pt idx="154">
+                  <c:v>4318.2</c:v>
+                </c:pt>
+                <c:pt idx="155">
+                  <c:v>4346.2</c:v>
+                </c:pt>
+                <c:pt idx="156">
+                  <c:v>4374.2</c:v>
+                </c:pt>
+                <c:pt idx="157">
+                  <c:v>4402.2</c:v>
+                </c:pt>
+                <c:pt idx="158">
+                  <c:v>4430.2</c:v>
+                </c:pt>
+                <c:pt idx="159">
+                  <c:v>4458.2</c:v>
+                </c:pt>
+                <c:pt idx="160">
+                  <c:v>4486.2</c:v>
+                </c:pt>
+                <c:pt idx="161">
+                  <c:v>4514.2</c:v>
+                </c:pt>
+                <c:pt idx="162">
+                  <c:v>4542.2</c:v>
+                </c:pt>
+                <c:pt idx="163">
+                  <c:v>4570.2</c:v>
+                </c:pt>
+                <c:pt idx="164">
+                  <c:v>4598.2</c:v>
+                </c:pt>
+                <c:pt idx="165">
+                  <c:v>4626.2</c:v>
+                </c:pt>
+                <c:pt idx="166">
+                  <c:v>4654.2</c:v>
+                </c:pt>
+                <c:pt idx="167">
+                  <c:v>4682.2</c:v>
+                </c:pt>
+                <c:pt idx="168">
+                  <c:v>4710.2</c:v>
+                </c:pt>
+                <c:pt idx="169">
+                  <c:v>4738.2</c:v>
+                </c:pt>
+                <c:pt idx="170">
+                  <c:v>4766.2</c:v>
+                </c:pt>
+                <c:pt idx="171">
+                  <c:v>4794.2</c:v>
+                </c:pt>
+                <c:pt idx="172">
+                  <c:v>4822.2</c:v>
+                </c:pt>
+                <c:pt idx="173">
+                  <c:v>4850.2</c:v>
+                </c:pt>
+                <c:pt idx="174">
+                  <c:v>4878.2</c:v>
+                </c:pt>
+                <c:pt idx="175">
+                  <c:v>4906.2</c:v>
+                </c:pt>
+                <c:pt idx="176">
+                  <c:v>4934.2</c:v>
+                </c:pt>
+                <c:pt idx="177">
+                  <c:v>4962.2</c:v>
+                </c:pt>
+                <c:pt idx="178">
+                  <c:v>4990.2</c:v>
+                </c:pt>
+                <c:pt idx="179">
+                  <c:v>5018.2</c:v>
+                </c:pt>
+                <c:pt idx="180">
+                  <c:v>5046.2</c:v>
+                </c:pt>
+                <c:pt idx="181">
+                  <c:v>5074.2</c:v>
+                </c:pt>
+                <c:pt idx="182">
+                  <c:v>5102.2</c:v>
+                </c:pt>
+                <c:pt idx="183">
+                  <c:v>5130.2</c:v>
+                </c:pt>
+                <c:pt idx="184">
+                  <c:v>5158.2</c:v>
+                </c:pt>
+                <c:pt idx="185">
+                  <c:v>5186.2</c:v>
+                </c:pt>
+                <c:pt idx="186">
+                  <c:v>5214.2</c:v>
+                </c:pt>
+                <c:pt idx="187">
+                  <c:v>5242.2</c:v>
+                </c:pt>
+                <c:pt idx="188">
+                  <c:v>5270.2</c:v>
+                </c:pt>
+                <c:pt idx="189">
+                  <c:v>5298.2</c:v>
+                </c:pt>
+                <c:pt idx="190">
+                  <c:v>5326.2</c:v>
+                </c:pt>
+              </c:numCache>
+            </c:numRef>
+          </c:xVal>
+          <c:yVal>
+            <c:numRef>
+              <c:f>Sheet1!$E$2:$E$192</c:f>
+              <c:numCache>
+                <c:formatCode>General</c:formatCode>
+                <c:ptCount val="191"/>
+                <c:pt idx="0">
+                  <c:v>12.05</c:v>
+                </c:pt>
+                <c:pt idx="1">
+                  <c:v>18.73</c:v>
+                </c:pt>
+                <c:pt idx="2">
+                  <c:v>22.07</c:v>
+                </c:pt>
+                <c:pt idx="3">
+                  <c:v>23.97</c:v>
+                </c:pt>
+                <c:pt idx="4">
+                  <c:v>20.53</c:v>
+                </c:pt>
+                <c:pt idx="5">
+                  <c:v>30.31</c:v>
+                </c:pt>
+                <c:pt idx="6">
+                  <c:v>26.64</c:v>
+                </c:pt>
+                <c:pt idx="7">
+                  <c:v>24.4</c:v>
+                </c:pt>
+                <c:pt idx="8">
+                  <c:v>21.95</c:v>
+                </c:pt>
+                <c:pt idx="9">
+                  <c:v>24.92</c:v>
+                </c:pt>
+                <c:pt idx="10">
+                  <c:v>36.32</c:v>
+                </c:pt>
+                <c:pt idx="11">
+                  <c:v>22.53</c:v>
+                </c:pt>
+                <c:pt idx="12">
+                  <c:v>28.15</c:v>
+                </c:pt>
+                <c:pt idx="13">
+                  <c:v>28.32</c:v>
+                </c:pt>
+                <c:pt idx="14">
+                  <c:v>22.18</c:v>
+                </c:pt>
+                <c:pt idx="15">
+                  <c:v>26.62</c:v>
+                </c:pt>
+                <c:pt idx="16">
+                  <c:v>27.73</c:v>
+                </c:pt>
+                <c:pt idx="17">
+                  <c:v>27.12</c:v>
+                </c:pt>
+                <c:pt idx="18">
+                  <c:v>21.46</c:v>
+                </c:pt>
+                <c:pt idx="19">
+                  <c:v>23.85</c:v>
+                </c:pt>
+                <c:pt idx="20">
+                  <c:v>22.54</c:v>
+                </c:pt>
+                <c:pt idx="21">
+                  <c:v>28.14</c:v>
+                </c:pt>
+                <c:pt idx="22">
+                  <c:v>37.56</c:v>
+                </c:pt>
+                <c:pt idx="23">
+                  <c:v>36.56</c:v>
+                </c:pt>
+                <c:pt idx="24">
+                  <c:v>35.87</c:v>
+                </c:pt>
+                <c:pt idx="25">
+                  <c:v>32.59</c:v>
+                </c:pt>
+                <c:pt idx="26">
+                  <c:v>28.41</c:v>
+                </c:pt>
+                <c:pt idx="27">
+                  <c:v>28.68</c:v>
+                </c:pt>
+                <c:pt idx="28">
+                  <c:v>21.38</c:v>
+                </c:pt>
+                <c:pt idx="29">
+                  <c:v>26.48</c:v>
+                </c:pt>
+                <c:pt idx="30">
+                  <c:v>19.92</c:v>
+                </c:pt>
+                <c:pt idx="31">
+                  <c:v>18.16</c:v>
+                </c:pt>
+                <c:pt idx="32">
+                  <c:v>24.49</c:v>
+                </c:pt>
+                <c:pt idx="33">
+                  <c:v>31.69</c:v>
+                </c:pt>
+                <c:pt idx="34">
+                  <c:v>36.07</c:v>
+                </c:pt>
+                <c:pt idx="35">
+                  <c:v>29.82</c:v>
+                </c:pt>
+                <c:pt idx="36">
+                  <c:v>30.19</c:v>
+                </c:pt>
+                <c:pt idx="37">
+                  <c:v>27.5</c:v>
+                </c:pt>
+                <c:pt idx="38">
+                  <c:v>26.3</c:v>
+                </c:pt>
+                <c:pt idx="39">
+                  <c:v>32.12</c:v>
+                </c:pt>
+                <c:pt idx="40">
+                  <c:v>26.67</c:v>
+                </c:pt>
+                <c:pt idx="41">
+                  <c:v>26.02</c:v>
+                </c:pt>
+                <c:pt idx="42">
+                  <c:v>26.93</c:v>
+                </c:pt>
+                <c:pt idx="43">
+                  <c:v>28.7</c:v>
+                </c:pt>
+                <c:pt idx="44">
+                  <c:v>29.55</c:v>
+                </c:pt>
+                <c:pt idx="45">
+                  <c:v>32.17</c:v>
+                </c:pt>
+                <c:pt idx="46">
+                  <c:v>34.05</c:v>
+                </c:pt>
+                <c:pt idx="47">
+                  <c:v>34.8</c:v>
+                </c:pt>
+                <c:pt idx="48">
+                  <c:v>27.07</c:v>
+                </c:pt>
+                <c:pt idx="49">
+                  <c:v>21.44</c:v>
+                </c:pt>
+                <c:pt idx="50">
+                  <c:v>27.84</c:v>
+                </c:pt>
+                <c:pt idx="51">
+                  <c:v>36.44</c:v>
+                </c:pt>
+                <c:pt idx="52">
+                  <c:v>36.74</c:v>
+                </c:pt>
+                <c:pt idx="53">
+                  <c:v>35.66</c:v>
+                </c:pt>
+                <c:pt idx="54">
+                  <c:v>26.6</c:v>
+                </c:pt>
+                <c:pt idx="55">
+                  <c:v>29.95</c:v>
+                </c:pt>
+                <c:pt idx="56">
+                  <c:v>25.19</c:v>
+                </c:pt>
+                <c:pt idx="57">
+                  <c:v>31.64</c:v>
+                </c:pt>
+                <c:pt idx="58">
+                  <c:v>27.61</c:v>
+                </c:pt>
+                <c:pt idx="59">
+                  <c:v>26.87</c:v>
+                </c:pt>
+                <c:pt idx="60">
+                  <c:v>37.18</c:v>
+                </c:pt>
+                <c:pt idx="61">
+                  <c:v>39.47</c:v>
+                </c:pt>
+                <c:pt idx="62">
+                  <c:v>30.5</c:v>
+                </c:pt>
+                <c:pt idx="63">
+                  <c:v>29.36</c:v>
+                </c:pt>
+                <c:pt idx="64">
+                  <c:v>28.43</c:v>
+                </c:pt>
+                <c:pt idx="65">
+                  <c:v>31.35</c:v>
+                </c:pt>
+                <c:pt idx="66">
+                  <c:v>24.31</c:v>
+                </c:pt>
+                <c:pt idx="67">
+                  <c:v>34.56</c:v>
+                </c:pt>
+                <c:pt idx="68">
+                  <c:v>22.89</c:v>
+                </c:pt>
+                <c:pt idx="69">
+                  <c:v>22.29</c:v>
+                </c:pt>
+                <c:pt idx="70">
+                  <c:v>26.33</c:v>
+                </c:pt>
+                <c:pt idx="71">
+                  <c:v>28.1</c:v>
+                </c:pt>
+                <c:pt idx="72">
+                  <c:v>28.01</c:v>
+                </c:pt>
+                <c:pt idx="73">
+                  <c:v>33.91</c:v>
+                </c:pt>
+                <c:pt idx="74">
+                  <c:v>27.39</c:v>
+                </c:pt>
+                <c:pt idx="75">
+                  <c:v>23.21</c:v>
+                </c:pt>
+                <c:pt idx="76">
+                  <c:v>24.53</c:v>
+                </c:pt>
+                <c:pt idx="77">
+                  <c:v>23.69</c:v>
+                </c:pt>
+                <c:pt idx="78">
+                  <c:v>27.73</c:v>
+                </c:pt>
+                <c:pt idx="79">
+                  <c:v>26.46</c:v>
+                </c:pt>
+                <c:pt idx="80">
+                  <c:v>18.98</c:v>
+                </c:pt>
+                <c:pt idx="81">
+                  <c:v>32.85</c:v>
+                </c:pt>
+                <c:pt idx="82">
+                  <c:v>37.18</c:v>
+                </c:pt>
+                <c:pt idx="83">
+                  <c:v>36.83</c:v>
+                </c:pt>
+                <c:pt idx="84">
+                  <c:v>25.42</c:v>
+                </c:pt>
+                <c:pt idx="85">
+                  <c:v>21.45</c:v>
+                </c:pt>
+                <c:pt idx="86">
+                  <c:v>20.86</c:v>
+                </c:pt>
+                <c:pt idx="87">
+                  <c:v>28.9</c:v>
+                </c:pt>
+                <c:pt idx="88">
+                  <c:v>33.31</c:v>
+                </c:pt>
+                <c:pt idx="89">
+                  <c:v>27.01</c:v>
+                </c:pt>
+                <c:pt idx="90">
+                  <c:v>26.94</c:v>
+                </c:pt>
+                <c:pt idx="91">
+                  <c:v>34.8</c:v>
+                </c:pt>
+                <c:pt idx="92">
+                  <c:v>31.46</c:v>
+                </c:pt>
+                <c:pt idx="93">
+                  <c:v>28.29</c:v>
+                </c:pt>
+                <c:pt idx="94">
+                  <c:v>22.35</c:v>
+                </c:pt>
+                <c:pt idx="95">
+                  <c:v>26.62</c:v>
+                </c:pt>
+                <c:pt idx="96">
+                  <c:v>32.02</c:v>
+                </c:pt>
+                <c:pt idx="97">
+                  <c:v>19.86</c:v>
+                </c:pt>
+                <c:pt idx="98">
+                  <c:v>20.82</c:v>
+                </c:pt>
+                <c:pt idx="99">
+                  <c:v>24.33</c:v>
+                </c:pt>
+                <c:pt idx="100">
+                  <c:v>31.63</c:v>
+                </c:pt>
+                <c:pt idx="101">
+                  <c:v>34.51</c:v>
+                </c:pt>
+                <c:pt idx="102">
+                  <c:v>43.09</c:v>
+                </c:pt>
+                <c:pt idx="103">
+                  <c:v>35.69</c:v>
+                </c:pt>
+                <c:pt idx="104">
+                  <c:v>28.64</c:v>
+                </c:pt>
+                <c:pt idx="105">
+                  <c:v>14.96</c:v>
+                </c:pt>
+                <c:pt idx="106">
+                  <c:v>22.18</c:v>
+                </c:pt>
+                <c:pt idx="107">
+                  <c:v>24.74</c:v>
+                </c:pt>
+                <c:pt idx="108">
+                  <c:v>33.31</c:v>
+                </c:pt>
+                <c:pt idx="109">
+                  <c:v>37.83</c:v>
+                </c:pt>
+                <c:pt idx="110">
+                  <c:v>31.06</c:v>
+                </c:pt>
+                <c:pt idx="111">
+                  <c:v>40.43</c:v>
+                </c:pt>
+                <c:pt idx="112">
+                  <c:v>49.11</c:v>
+                </c:pt>
+                <c:pt idx="113">
+                  <c:v>40.38</c:v>
+                </c:pt>
+                <c:pt idx="114">
+                  <c:v>30.04</c:v>
+                </c:pt>
+                <c:pt idx="115">
+                  <c:v>26.71</c:v>
+                </c:pt>
+                <c:pt idx="116">
+                  <c:v>23.27</c:v>
+                </c:pt>
+                <c:pt idx="117">
+                  <c:v>30.52</c:v>
+                </c:pt>
+                <c:pt idx="118">
+                  <c:v>27.22</c:v>
+                </c:pt>
+                <c:pt idx="119">
+                  <c:v>27.46</c:v>
+                </c:pt>
+                <c:pt idx="120">
+                  <c:v>33</c:v>
+                </c:pt>
+                <c:pt idx="121">
+                  <c:v>24.43</c:v>
+                </c:pt>
+                <c:pt idx="122">
+                  <c:v>24.31</c:v>
+                </c:pt>
+                <c:pt idx="123">
+                  <c:v>28.47</c:v>
+                </c:pt>
+                <c:pt idx="124">
+                  <c:v>29.04</c:v>
+                </c:pt>
+                <c:pt idx="125">
+                  <c:v>36.03</c:v>
+                </c:pt>
+                <c:pt idx="126">
+                  <c:v>27.53</c:v>
+                </c:pt>
+                <c:pt idx="127">
+                  <c:v>27.65</c:v>
+                </c:pt>
+                <c:pt idx="128">
+                  <c:v>26.96</c:v>
+                </c:pt>
+                <c:pt idx="129">
+                  <c:v>30.08</c:v>
+                </c:pt>
+                <c:pt idx="130">
+                  <c:v>26.42</c:v>
+                </c:pt>
+                <c:pt idx="131">
+                  <c:v>16.86</c:v>
+                </c:pt>
+                <c:pt idx="132">
+                  <c:v>19.75</c:v>
+                </c:pt>
+                <c:pt idx="133">
+                  <c:v>25.73</c:v>
+                </c:pt>
+                <c:pt idx="134">
+                  <c:v>25.73</c:v>
+                </c:pt>
+                <c:pt idx="135">
+                  <c:v>26.07</c:v>
+                </c:pt>
+                <c:pt idx="136">
+                  <c:v>23.91</c:v>
+                </c:pt>
+                <c:pt idx="137">
+                  <c:v>16.98</c:v>
+                </c:pt>
+                <c:pt idx="138">
+                  <c:v>25.82</c:v>
+                </c:pt>
+                <c:pt idx="139">
+                  <c:v>35.26</c:v>
+                </c:pt>
+                <c:pt idx="140">
+                  <c:v>35.18</c:v>
+                </c:pt>
+                <c:pt idx="141">
+                  <c:v>22.5</c:v>
+                </c:pt>
+                <c:pt idx="142">
+                  <c:v>19.1</c:v>
+                </c:pt>
+                <c:pt idx="143">
+                  <c:v>20.91</c:v>
+                </c:pt>
+                <c:pt idx="144">
+                  <c:v>28.86</c:v>
+                </c:pt>
+                <c:pt idx="145">
+                  <c:v>34.56</c:v>
+                </c:pt>
+                <c:pt idx="146">
+                  <c:v>37.39</c:v>
+                </c:pt>
+                <c:pt idx="147">
+                  <c:v>25.29</c:v>
+                </c:pt>
+                <c:pt idx="148">
+                  <c:v>31.78</c:v>
+                </c:pt>
+                <c:pt idx="149">
+                  <c:v>19.15</c:v>
+                </c:pt>
+                <c:pt idx="150">
+                  <c:v>19.58</c:v>
+                </c:pt>
+                <c:pt idx="151">
+                  <c:v>41.75</c:v>
+                </c:pt>
+                <c:pt idx="152">
+                  <c:v>36.09</c:v>
+                </c:pt>
+                <c:pt idx="153">
+                  <c:v>42.55</c:v>
+                </c:pt>
+                <c:pt idx="154">
+                  <c:v>41.38</c:v>
+                </c:pt>
+                <c:pt idx="155">
+                  <c:v>40.11</c:v>
+                </c:pt>
+                <c:pt idx="156">
+                  <c:v>33.77</c:v>
+                </c:pt>
+                <c:pt idx="157">
+                  <c:v>28.36</c:v>
+                </c:pt>
+                <c:pt idx="158">
+                  <c:v>26.43</c:v>
+                </c:pt>
+                <c:pt idx="159">
+                  <c:v>34.57</c:v>
+                </c:pt>
+                <c:pt idx="160">
+                  <c:v>28.76</c:v>
+                </c:pt>
+                <c:pt idx="161">
+                  <c:v>33.37</c:v>
+                </c:pt>
+                <c:pt idx="162">
+                  <c:v>23.88</c:v>
+                </c:pt>
+                <c:pt idx="163">
+                  <c:v>25.32</c:v>
+                </c:pt>
+                <c:pt idx="164">
+                  <c:v>24.26</c:v>
+                </c:pt>
+                <c:pt idx="165">
+                  <c:v>29.57</c:v>
+                </c:pt>
+                <c:pt idx="166">
+                  <c:v>23.75</c:v>
+                </c:pt>
+                <c:pt idx="167">
+                  <c:v>39.95</c:v>
+                </c:pt>
+                <c:pt idx="168">
+                  <c:v>24.85</c:v>
+                </c:pt>
+                <c:pt idx="169">
+                  <c:v>26.76</c:v>
+                </c:pt>
+                <c:pt idx="170">
+                  <c:v>29.66</c:v>
+                </c:pt>
+                <c:pt idx="171">
+                  <c:v>33.56</c:v>
+                </c:pt>
+                <c:pt idx="172">
+                  <c:v>19.58</c:v>
+                </c:pt>
+                <c:pt idx="173">
+                  <c:v>29.38</c:v>
+                </c:pt>
+                <c:pt idx="174">
+                  <c:v>31.25</c:v>
+                </c:pt>
+                <c:pt idx="175">
+                  <c:v>23.38</c:v>
+                </c:pt>
+                <c:pt idx="176">
+                  <c:v>16.98</c:v>
+                </c:pt>
+                <c:pt idx="177">
+                  <c:v>22.01</c:v>
+                </c:pt>
+                <c:pt idx="178">
+                  <c:v>27.23</c:v>
+                </c:pt>
+                <c:pt idx="179">
+                  <c:v>33.07</c:v>
+                </c:pt>
+                <c:pt idx="180">
+                  <c:v>37.24</c:v>
+                </c:pt>
+                <c:pt idx="181">
+                  <c:v>24.63</c:v>
+                </c:pt>
+                <c:pt idx="182">
+                  <c:v>30</c:v>
+                </c:pt>
+                <c:pt idx="183">
+                  <c:v>34.4</c:v>
+                </c:pt>
+                <c:pt idx="184">
+                  <c:v>23.73</c:v>
+                </c:pt>
+                <c:pt idx="185">
+                  <c:v>16.32</c:v>
+                </c:pt>
+                <c:pt idx="186">
+                  <c:v>23.81</c:v>
+                </c:pt>
+                <c:pt idx="187">
+                  <c:v>26.03</c:v>
+                </c:pt>
+                <c:pt idx="188">
+                  <c:v>23.35</c:v>
+                </c:pt>
+                <c:pt idx="189">
+                  <c:v>21.45</c:v>
+                </c:pt>
+                <c:pt idx="190">
+                  <c:v>18.59</c:v>
                 </c:pt>
               </c:numCache>
             </c:numRef>
@@ -2812,455 +5232,452 @@
           </c:marker>
           <c:xVal>
             <c:numRef>
-              <c:f>Sheet1!$A$2:$A$150</c:f>
+              <c:f>Sheet1!$A$2:$A$149</c:f>
               <c:numCache>
                 <c:formatCode>General</c:formatCode>
-                <c:ptCount val="149"/>
+                <c:ptCount val="148"/>
                 <c:pt idx="0">
-                  <c:v>4</c:v>
+                  <c:v>6</c:v>
                 </c:pt>
                 <c:pt idx="1">
-                  <c:v>6</c:v>
+                  <c:v>8</c:v>
                 </c:pt>
                 <c:pt idx="2">
-                  <c:v>8</c:v>
+                  <c:v>10</c:v>
                 </c:pt>
                 <c:pt idx="3">
-                  <c:v>10</c:v>
+                  <c:v>12</c:v>
                 </c:pt>
                 <c:pt idx="4">
-                  <c:v>12</c:v>
+                  <c:v>14</c:v>
                 </c:pt>
                 <c:pt idx="5">
-                  <c:v>14</c:v>
+                  <c:v>16</c:v>
                 </c:pt>
                 <c:pt idx="6">
-                  <c:v>16</c:v>
+                  <c:v>18</c:v>
                 </c:pt>
                 <c:pt idx="7">
-                  <c:v>18</c:v>
+                  <c:v>20</c:v>
                 </c:pt>
                 <c:pt idx="8">
-                  <c:v>20</c:v>
+                  <c:v>22</c:v>
                 </c:pt>
                 <c:pt idx="9">
-                  <c:v>22</c:v>
+                  <c:v>24</c:v>
                 </c:pt>
                 <c:pt idx="10">
-                  <c:v>24</c:v>
+                  <c:v>26</c:v>
                 </c:pt>
                 <c:pt idx="11">
-                  <c:v>26</c:v>
+                  <c:v>28</c:v>
                 </c:pt>
                 <c:pt idx="12">
-                  <c:v>28</c:v>
+                  <c:v>30</c:v>
                 </c:pt>
                 <c:pt idx="13">
-                  <c:v>30</c:v>
+                  <c:v>32</c:v>
                 </c:pt>
                 <c:pt idx="14">
-                  <c:v>32</c:v>
+                  <c:v>34</c:v>
                 </c:pt>
                 <c:pt idx="15">
-                  <c:v>34</c:v>
+                  <c:v>36</c:v>
                 </c:pt>
                 <c:pt idx="16">
-                  <c:v>36</c:v>
+                  <c:v>38</c:v>
                 </c:pt>
                 <c:pt idx="17">
-                  <c:v>38</c:v>
+                  <c:v>40</c:v>
                 </c:pt>
                 <c:pt idx="18">
-                  <c:v>40</c:v>
+                  <c:v>42</c:v>
                 </c:pt>
                 <c:pt idx="19">
-                  <c:v>42</c:v>
+                  <c:v>44</c:v>
                 </c:pt>
                 <c:pt idx="20">
-                  <c:v>44</c:v>
+                  <c:v>46</c:v>
                 </c:pt>
                 <c:pt idx="21">
-                  <c:v>46</c:v>
+                  <c:v>48</c:v>
                 </c:pt>
                 <c:pt idx="22">
-                  <c:v>48</c:v>
+                  <c:v>50</c:v>
                 </c:pt>
                 <c:pt idx="23">
-                  <c:v>50</c:v>
+                  <c:v>52</c:v>
                 </c:pt>
                 <c:pt idx="24">
-                  <c:v>52</c:v>
+                  <c:v>54</c:v>
                 </c:pt>
                 <c:pt idx="25">
-                  <c:v>54</c:v>
+                  <c:v>56</c:v>
                 </c:pt>
                 <c:pt idx="26">
-                  <c:v>56</c:v>
+                  <c:v>58</c:v>
                 </c:pt>
                 <c:pt idx="27">
-                  <c:v>58</c:v>
+                  <c:v>60</c:v>
                 </c:pt>
                 <c:pt idx="28">
-                  <c:v>60</c:v>
+                  <c:v>62</c:v>
                 </c:pt>
                 <c:pt idx="29">
-                  <c:v>62</c:v>
+                  <c:v>64</c:v>
                 </c:pt>
                 <c:pt idx="30">
-                  <c:v>64</c:v>
+                  <c:v>66</c:v>
                 </c:pt>
                 <c:pt idx="31">
-                  <c:v>66</c:v>
+                  <c:v>68</c:v>
                 </c:pt>
                 <c:pt idx="32">
-                  <c:v>68</c:v>
+                  <c:v>70</c:v>
                 </c:pt>
                 <c:pt idx="33">
-                  <c:v>70</c:v>
+                  <c:v>72</c:v>
                 </c:pt>
                 <c:pt idx="34">
-                  <c:v>72</c:v>
+                  <c:v>74</c:v>
                 </c:pt>
                 <c:pt idx="35">
-                  <c:v>74</c:v>
+                  <c:v>76</c:v>
                 </c:pt>
                 <c:pt idx="36">
-                  <c:v>76</c:v>
+                  <c:v>78</c:v>
                 </c:pt>
                 <c:pt idx="37">
-                  <c:v>78</c:v>
+                  <c:v>80</c:v>
                 </c:pt>
                 <c:pt idx="38">
-                  <c:v>80</c:v>
+                  <c:v>82</c:v>
                 </c:pt>
                 <c:pt idx="39">
-                  <c:v>82</c:v>
+                  <c:v>84</c:v>
                 </c:pt>
                 <c:pt idx="40">
-                  <c:v>84</c:v>
+                  <c:v>86</c:v>
                 </c:pt>
                 <c:pt idx="41">
-                  <c:v>86</c:v>
+                  <c:v>88</c:v>
                 </c:pt>
                 <c:pt idx="42">
-                  <c:v>88</c:v>
+                  <c:v>90</c:v>
                 </c:pt>
                 <c:pt idx="43">
-                  <c:v>90</c:v>
+                  <c:v>92</c:v>
                 </c:pt>
                 <c:pt idx="44">
-                  <c:v>92</c:v>
+                  <c:v>94</c:v>
                 </c:pt>
                 <c:pt idx="45">
-                  <c:v>94</c:v>
+                  <c:v>96</c:v>
                 </c:pt>
                 <c:pt idx="46">
-                  <c:v>96</c:v>
+                  <c:v>98</c:v>
                 </c:pt>
                 <c:pt idx="47">
-                  <c:v>98</c:v>
+                  <c:v>100</c:v>
                 </c:pt>
                 <c:pt idx="48">
-                  <c:v>100</c:v>
+                  <c:v>102</c:v>
                 </c:pt>
                 <c:pt idx="49">
-                  <c:v>102</c:v>
+                  <c:v>104</c:v>
                 </c:pt>
                 <c:pt idx="50">
-                  <c:v>104</c:v>
+                  <c:v>106</c:v>
                 </c:pt>
                 <c:pt idx="51">
-                  <c:v>106</c:v>
+                  <c:v>108</c:v>
                 </c:pt>
                 <c:pt idx="52">
-                  <c:v>108</c:v>
+                  <c:v>110</c:v>
                 </c:pt>
                 <c:pt idx="53">
-                  <c:v>110</c:v>
+                  <c:v>112</c:v>
                 </c:pt>
                 <c:pt idx="54">
-                  <c:v>112</c:v>
+                  <c:v>114</c:v>
                 </c:pt>
                 <c:pt idx="55">
-                  <c:v>114</c:v>
+                  <c:v>116</c:v>
                 </c:pt>
                 <c:pt idx="56">
-                  <c:v>116</c:v>
+                  <c:v>118</c:v>
                 </c:pt>
                 <c:pt idx="57">
-                  <c:v>118</c:v>
+                  <c:v>120</c:v>
                 </c:pt>
                 <c:pt idx="58">
-                  <c:v>120</c:v>
+                  <c:v>122</c:v>
                 </c:pt>
                 <c:pt idx="59">
-                  <c:v>122</c:v>
+                  <c:v>124</c:v>
                 </c:pt>
                 <c:pt idx="60">
-                  <c:v>124</c:v>
+                  <c:v>126</c:v>
                 </c:pt>
                 <c:pt idx="61">
-                  <c:v>126</c:v>
+                  <c:v>128</c:v>
                 </c:pt>
                 <c:pt idx="62">
-                  <c:v>128</c:v>
+                  <c:v>130</c:v>
                 </c:pt>
                 <c:pt idx="63">
-                  <c:v>130</c:v>
+                  <c:v>132</c:v>
                 </c:pt>
                 <c:pt idx="64">
-                  <c:v>132</c:v>
+                  <c:v>134</c:v>
                 </c:pt>
                 <c:pt idx="65">
-                  <c:v>134</c:v>
+                  <c:v>136</c:v>
                 </c:pt>
                 <c:pt idx="66">
-                  <c:v>136</c:v>
+                  <c:v>138</c:v>
                 </c:pt>
                 <c:pt idx="67">
-                  <c:v>138</c:v>
+                  <c:v>140</c:v>
                 </c:pt>
                 <c:pt idx="68">
-                  <c:v>140</c:v>
+                  <c:v>142</c:v>
                 </c:pt>
                 <c:pt idx="69">
-                  <c:v>142</c:v>
+                  <c:v>144</c:v>
                 </c:pt>
                 <c:pt idx="70">
-                  <c:v>144</c:v>
+                  <c:v>146</c:v>
                 </c:pt>
                 <c:pt idx="71">
-                  <c:v>146</c:v>
+                  <c:v>148</c:v>
                 </c:pt>
                 <c:pt idx="72">
-                  <c:v>148</c:v>
+                  <c:v>150</c:v>
                 </c:pt>
                 <c:pt idx="73">
-                  <c:v>150</c:v>
+                  <c:v>152</c:v>
                 </c:pt>
                 <c:pt idx="74">
-                  <c:v>152</c:v>
+                  <c:v>154</c:v>
                 </c:pt>
                 <c:pt idx="75">
-                  <c:v>154</c:v>
+                  <c:v>156</c:v>
                 </c:pt>
                 <c:pt idx="76">
-                  <c:v>156</c:v>
+                  <c:v>158</c:v>
                 </c:pt>
                 <c:pt idx="77">
-                  <c:v>158</c:v>
+                  <c:v>160</c:v>
                 </c:pt>
                 <c:pt idx="78">
-                  <c:v>160</c:v>
+                  <c:v>162</c:v>
                 </c:pt>
                 <c:pt idx="79">
-                  <c:v>162</c:v>
+                  <c:v>164</c:v>
                 </c:pt>
                 <c:pt idx="80">
-                  <c:v>164</c:v>
+                  <c:v>166</c:v>
                 </c:pt>
                 <c:pt idx="81">
-                  <c:v>166</c:v>
+                  <c:v>168</c:v>
                 </c:pt>
                 <c:pt idx="82">
-                  <c:v>168</c:v>
+                  <c:v>170</c:v>
                 </c:pt>
                 <c:pt idx="83">
-                  <c:v>170</c:v>
+                  <c:v>172</c:v>
                 </c:pt>
                 <c:pt idx="84">
-                  <c:v>172</c:v>
+                  <c:v>174</c:v>
                 </c:pt>
                 <c:pt idx="85">
-                  <c:v>174</c:v>
+                  <c:v>176</c:v>
                 </c:pt>
                 <c:pt idx="86">
-                  <c:v>176</c:v>
+                  <c:v>178</c:v>
                 </c:pt>
                 <c:pt idx="87">
-                  <c:v>178</c:v>
+                  <c:v>180</c:v>
                 </c:pt>
                 <c:pt idx="88">
-                  <c:v>180</c:v>
+                  <c:v>182</c:v>
                 </c:pt>
                 <c:pt idx="89">
-                  <c:v>182</c:v>
+                  <c:v>184</c:v>
                 </c:pt>
                 <c:pt idx="90">
-                  <c:v>184</c:v>
+                  <c:v>186</c:v>
                 </c:pt>
                 <c:pt idx="91">
-                  <c:v>186</c:v>
+                  <c:v>188</c:v>
                 </c:pt>
                 <c:pt idx="92">
-                  <c:v>188</c:v>
+                  <c:v>190</c:v>
                 </c:pt>
                 <c:pt idx="93">
-                  <c:v>190</c:v>
+                  <c:v>192</c:v>
                 </c:pt>
                 <c:pt idx="94">
-                  <c:v>192</c:v>
+                  <c:v>194</c:v>
                 </c:pt>
                 <c:pt idx="95">
-                  <c:v>194</c:v>
+                  <c:v>196</c:v>
                 </c:pt>
                 <c:pt idx="96">
-                  <c:v>196</c:v>
+                  <c:v>198</c:v>
                 </c:pt>
                 <c:pt idx="97">
-                  <c:v>198</c:v>
+                  <c:v>200</c:v>
                 </c:pt>
                 <c:pt idx="98">
-                  <c:v>200</c:v>
+                  <c:v>202</c:v>
                 </c:pt>
                 <c:pt idx="99">
-                  <c:v>202</c:v>
+                  <c:v>204</c:v>
                 </c:pt>
                 <c:pt idx="100">
-                  <c:v>204</c:v>
+                  <c:v>206</c:v>
                 </c:pt>
                 <c:pt idx="101">
-                  <c:v>206</c:v>
+                  <c:v>208</c:v>
                 </c:pt>
                 <c:pt idx="102">
-                  <c:v>208</c:v>
+                  <c:v>210</c:v>
                 </c:pt>
                 <c:pt idx="103">
-                  <c:v>210</c:v>
+                  <c:v>212</c:v>
                 </c:pt>
                 <c:pt idx="104">
-                  <c:v>212</c:v>
+                  <c:v>214</c:v>
                 </c:pt>
                 <c:pt idx="105">
-                  <c:v>214</c:v>
+                  <c:v>216</c:v>
                 </c:pt>
                 <c:pt idx="106">
-                  <c:v>216</c:v>
+                  <c:v>218</c:v>
                 </c:pt>
                 <c:pt idx="107">
-                  <c:v>218</c:v>
+                  <c:v>220</c:v>
                 </c:pt>
                 <c:pt idx="108">
-                  <c:v>220</c:v>
+                  <c:v>222</c:v>
                 </c:pt>
                 <c:pt idx="109">
-                  <c:v>222</c:v>
+                  <c:v>224</c:v>
                 </c:pt>
                 <c:pt idx="110">
-                  <c:v>224</c:v>
+                  <c:v>226</c:v>
                 </c:pt>
                 <c:pt idx="111">
-                  <c:v>226</c:v>
+                  <c:v>228</c:v>
                 </c:pt>
                 <c:pt idx="112">
-                  <c:v>228</c:v>
+                  <c:v>230</c:v>
                 </c:pt>
                 <c:pt idx="113">
-                  <c:v>230</c:v>
+                  <c:v>232</c:v>
                 </c:pt>
                 <c:pt idx="114">
-                  <c:v>232</c:v>
+                  <c:v>234</c:v>
                 </c:pt>
                 <c:pt idx="115">
-                  <c:v>234</c:v>
+                  <c:v>236</c:v>
                 </c:pt>
                 <c:pt idx="116">
-                  <c:v>236</c:v>
+                  <c:v>238</c:v>
                 </c:pt>
                 <c:pt idx="117">
-                  <c:v>238</c:v>
+                  <c:v>240</c:v>
                 </c:pt>
                 <c:pt idx="118">
-                  <c:v>240</c:v>
+                  <c:v>242</c:v>
                 </c:pt>
                 <c:pt idx="119">
-                  <c:v>242</c:v>
+                  <c:v>244</c:v>
                 </c:pt>
                 <c:pt idx="120">
-                  <c:v>244</c:v>
+                  <c:v>246</c:v>
                 </c:pt>
                 <c:pt idx="121">
-                  <c:v>246</c:v>
+                  <c:v>248</c:v>
                 </c:pt>
                 <c:pt idx="122">
-                  <c:v>248</c:v>
+                  <c:v>250</c:v>
                 </c:pt>
                 <c:pt idx="123">
-                  <c:v>250</c:v>
+                  <c:v>252</c:v>
                 </c:pt>
                 <c:pt idx="124">
-                  <c:v>252</c:v>
+                  <c:v>254</c:v>
                 </c:pt>
                 <c:pt idx="125">
-                  <c:v>254</c:v>
+                  <c:v>256</c:v>
                 </c:pt>
                 <c:pt idx="126">
-                  <c:v>256</c:v>
+                  <c:v>258</c:v>
                 </c:pt>
                 <c:pt idx="127">
-                  <c:v>258</c:v>
+                  <c:v>260</c:v>
                 </c:pt>
                 <c:pt idx="128">
-                  <c:v>260</c:v>
+                  <c:v>262</c:v>
                 </c:pt>
                 <c:pt idx="129">
-                  <c:v>262</c:v>
+                  <c:v>264</c:v>
                 </c:pt>
                 <c:pt idx="130">
-                  <c:v>264</c:v>
+                  <c:v>266</c:v>
                 </c:pt>
                 <c:pt idx="131">
-                  <c:v>266</c:v>
+                  <c:v>268</c:v>
                 </c:pt>
                 <c:pt idx="132">
-                  <c:v>268</c:v>
+                  <c:v>270</c:v>
                 </c:pt>
                 <c:pt idx="133">
-                  <c:v>270</c:v>
+                  <c:v>272</c:v>
                 </c:pt>
                 <c:pt idx="134">
-                  <c:v>272</c:v>
+                  <c:v>274</c:v>
                 </c:pt>
                 <c:pt idx="135">
-                  <c:v>274</c:v>
+                  <c:v>276</c:v>
                 </c:pt>
                 <c:pt idx="136">
-                  <c:v>276</c:v>
+                  <c:v>278</c:v>
                 </c:pt>
                 <c:pt idx="137">
-                  <c:v>278</c:v>
+                  <c:v>280</c:v>
                 </c:pt>
                 <c:pt idx="138">
-                  <c:v>280</c:v>
+                  <c:v>282</c:v>
                 </c:pt>
                 <c:pt idx="139">
-                  <c:v>282</c:v>
+                  <c:v>284</c:v>
                 </c:pt>
                 <c:pt idx="140">
-                  <c:v>284</c:v>
+                  <c:v>286</c:v>
                 </c:pt>
                 <c:pt idx="141">
-                  <c:v>286</c:v>
+                  <c:v>288</c:v>
                 </c:pt>
                 <c:pt idx="142">
-                  <c:v>288</c:v>
+                  <c:v>290</c:v>
                 </c:pt>
                 <c:pt idx="143">
-                  <c:v>290</c:v>
+                  <c:v>292</c:v>
                 </c:pt>
                 <c:pt idx="144">
-                  <c:v>292</c:v>
+                  <c:v>294</c:v>
                 </c:pt>
                 <c:pt idx="145">
-                  <c:v>294</c:v>
+                  <c:v>296</c:v>
                 </c:pt>
                 <c:pt idx="146">
-                  <c:v>296</c:v>
+                  <c:v>298</c:v>
                 </c:pt>
                 <c:pt idx="147">
-                  <c:v>298</c:v>
-                </c:pt>
-                <c:pt idx="148">
                   <c:v>300</c:v>
                 </c:pt>
               </c:numCache>
@@ -3268,10 +5685,10 @@
           </c:xVal>
           <c:yVal>
             <c:numRef>
-              <c:f>Sheet1!$B$2:$B$150</c:f>
+              <c:f>Sheet1!$B$2:$B$149</c:f>
               <c:numCache>
                 <c:formatCode>General</c:formatCode>
-                <c:ptCount val="149"/>
+                <c:ptCount val="148"/>
                 <c:pt idx="0">
                   <c:v>27.35</c:v>
                 </c:pt>
@@ -3715,9 +6132,6 @@
                 </c:pt>
                 <c:pt idx="147">
                   <c:v>96.81</c:v>
-                </c:pt>
-                <c:pt idx="148">
-                  <c:v>96.33</c:v>
                 </c:pt>
               </c:numCache>
             </c:numRef>
@@ -3770,455 +6184,452 @@
           </c:marker>
           <c:xVal>
             <c:numRef>
-              <c:f>Sheet1!$A$2:$A$150</c:f>
+              <c:f>Sheet1!$A$2:$A$149</c:f>
               <c:numCache>
                 <c:formatCode>General</c:formatCode>
-                <c:ptCount val="149"/>
+                <c:ptCount val="148"/>
                 <c:pt idx="0">
-                  <c:v>4</c:v>
+                  <c:v>6</c:v>
                 </c:pt>
                 <c:pt idx="1">
-                  <c:v>6</c:v>
+                  <c:v>8</c:v>
                 </c:pt>
                 <c:pt idx="2">
-                  <c:v>8</c:v>
+                  <c:v>10</c:v>
                 </c:pt>
                 <c:pt idx="3">
-                  <c:v>10</c:v>
+                  <c:v>12</c:v>
                 </c:pt>
                 <c:pt idx="4">
-                  <c:v>12</c:v>
+                  <c:v>14</c:v>
                 </c:pt>
                 <c:pt idx="5">
-                  <c:v>14</c:v>
+                  <c:v>16</c:v>
                 </c:pt>
                 <c:pt idx="6">
-                  <c:v>16</c:v>
+                  <c:v>18</c:v>
                 </c:pt>
                 <c:pt idx="7">
-                  <c:v>18</c:v>
+                  <c:v>20</c:v>
                 </c:pt>
                 <c:pt idx="8">
-                  <c:v>20</c:v>
+                  <c:v>22</c:v>
                 </c:pt>
                 <c:pt idx="9">
-                  <c:v>22</c:v>
+                  <c:v>24</c:v>
                 </c:pt>
                 <c:pt idx="10">
-                  <c:v>24</c:v>
+                  <c:v>26</c:v>
                 </c:pt>
                 <c:pt idx="11">
-                  <c:v>26</c:v>
+                  <c:v>28</c:v>
                 </c:pt>
                 <c:pt idx="12">
-                  <c:v>28</c:v>
+                  <c:v>30</c:v>
                 </c:pt>
                 <c:pt idx="13">
-                  <c:v>30</c:v>
+                  <c:v>32</c:v>
                 </c:pt>
                 <c:pt idx="14">
-                  <c:v>32</c:v>
+                  <c:v>34</c:v>
                 </c:pt>
                 <c:pt idx="15">
-                  <c:v>34</c:v>
+                  <c:v>36</c:v>
                 </c:pt>
                 <c:pt idx="16">
-                  <c:v>36</c:v>
+                  <c:v>38</c:v>
                 </c:pt>
                 <c:pt idx="17">
-                  <c:v>38</c:v>
+                  <c:v>40</c:v>
                 </c:pt>
                 <c:pt idx="18">
-                  <c:v>40</c:v>
+                  <c:v>42</c:v>
                 </c:pt>
                 <c:pt idx="19">
-                  <c:v>42</c:v>
+                  <c:v>44</c:v>
                 </c:pt>
                 <c:pt idx="20">
-                  <c:v>44</c:v>
+                  <c:v>46</c:v>
                 </c:pt>
                 <c:pt idx="21">
-                  <c:v>46</c:v>
+                  <c:v>48</c:v>
                 </c:pt>
                 <c:pt idx="22">
-                  <c:v>48</c:v>
+                  <c:v>50</c:v>
                 </c:pt>
                 <c:pt idx="23">
-                  <c:v>50</c:v>
+                  <c:v>52</c:v>
                 </c:pt>
                 <c:pt idx="24">
-                  <c:v>52</c:v>
+                  <c:v>54</c:v>
                 </c:pt>
                 <c:pt idx="25">
-                  <c:v>54</c:v>
+                  <c:v>56</c:v>
                 </c:pt>
                 <c:pt idx="26">
-                  <c:v>56</c:v>
+                  <c:v>58</c:v>
                 </c:pt>
                 <c:pt idx="27">
-                  <c:v>58</c:v>
+                  <c:v>60</c:v>
                 </c:pt>
                 <c:pt idx="28">
-                  <c:v>60</c:v>
+                  <c:v>62</c:v>
                 </c:pt>
                 <c:pt idx="29">
-                  <c:v>62</c:v>
+                  <c:v>64</c:v>
                 </c:pt>
                 <c:pt idx="30">
-                  <c:v>64</c:v>
+                  <c:v>66</c:v>
                 </c:pt>
                 <c:pt idx="31">
-                  <c:v>66</c:v>
+                  <c:v>68</c:v>
                 </c:pt>
                 <c:pt idx="32">
-                  <c:v>68</c:v>
+                  <c:v>70</c:v>
                 </c:pt>
                 <c:pt idx="33">
-                  <c:v>70</c:v>
+                  <c:v>72</c:v>
                 </c:pt>
                 <c:pt idx="34">
-                  <c:v>72</c:v>
+                  <c:v>74</c:v>
                 </c:pt>
                 <c:pt idx="35">
-                  <c:v>74</c:v>
+                  <c:v>76</c:v>
                 </c:pt>
                 <c:pt idx="36">
-                  <c:v>76</c:v>
+                  <c:v>78</c:v>
                 </c:pt>
                 <c:pt idx="37">
-                  <c:v>78</c:v>
+                  <c:v>80</c:v>
                 </c:pt>
                 <c:pt idx="38">
-                  <c:v>80</c:v>
+                  <c:v>82</c:v>
                 </c:pt>
                 <c:pt idx="39">
-                  <c:v>82</c:v>
+                  <c:v>84</c:v>
                 </c:pt>
                 <c:pt idx="40">
-                  <c:v>84</c:v>
+                  <c:v>86</c:v>
                 </c:pt>
                 <c:pt idx="41">
-                  <c:v>86</c:v>
+                  <c:v>88</c:v>
                 </c:pt>
                 <c:pt idx="42">
-                  <c:v>88</c:v>
+                  <c:v>90</c:v>
                 </c:pt>
                 <c:pt idx="43">
-                  <c:v>90</c:v>
+                  <c:v>92</c:v>
                 </c:pt>
                 <c:pt idx="44">
-                  <c:v>92</c:v>
+                  <c:v>94</c:v>
                 </c:pt>
                 <c:pt idx="45">
-                  <c:v>94</c:v>
+                  <c:v>96</c:v>
                 </c:pt>
                 <c:pt idx="46">
-                  <c:v>96</c:v>
+                  <c:v>98</c:v>
                 </c:pt>
                 <c:pt idx="47">
-                  <c:v>98</c:v>
+                  <c:v>100</c:v>
                 </c:pt>
                 <c:pt idx="48">
-                  <c:v>100</c:v>
+                  <c:v>102</c:v>
                 </c:pt>
                 <c:pt idx="49">
-                  <c:v>102</c:v>
+                  <c:v>104</c:v>
                 </c:pt>
                 <c:pt idx="50">
-                  <c:v>104</c:v>
+                  <c:v>106</c:v>
                 </c:pt>
                 <c:pt idx="51">
-                  <c:v>106</c:v>
+                  <c:v>108</c:v>
                 </c:pt>
                 <c:pt idx="52">
-                  <c:v>108</c:v>
+                  <c:v>110</c:v>
                 </c:pt>
                 <c:pt idx="53">
-                  <c:v>110</c:v>
+                  <c:v>112</c:v>
                 </c:pt>
                 <c:pt idx="54">
-                  <c:v>112</c:v>
+                  <c:v>114</c:v>
                 </c:pt>
                 <c:pt idx="55">
-                  <c:v>114</c:v>
+                  <c:v>116</c:v>
                 </c:pt>
                 <c:pt idx="56">
-                  <c:v>116</c:v>
+                  <c:v>118</c:v>
                 </c:pt>
                 <c:pt idx="57">
-                  <c:v>118</c:v>
+                  <c:v>120</c:v>
                 </c:pt>
                 <c:pt idx="58">
-                  <c:v>120</c:v>
+                  <c:v>122</c:v>
                 </c:pt>
                 <c:pt idx="59">
-                  <c:v>122</c:v>
+                  <c:v>124</c:v>
                 </c:pt>
                 <c:pt idx="60">
-                  <c:v>124</c:v>
+                  <c:v>126</c:v>
                 </c:pt>
                 <c:pt idx="61">
-                  <c:v>126</c:v>
+                  <c:v>128</c:v>
                 </c:pt>
                 <c:pt idx="62">
-                  <c:v>128</c:v>
+                  <c:v>130</c:v>
                 </c:pt>
                 <c:pt idx="63">
-                  <c:v>130</c:v>
+                  <c:v>132</c:v>
                 </c:pt>
                 <c:pt idx="64">
-                  <c:v>132</c:v>
+                  <c:v>134</c:v>
                 </c:pt>
                 <c:pt idx="65">
-                  <c:v>134</c:v>
+                  <c:v>136</c:v>
                 </c:pt>
                 <c:pt idx="66">
-                  <c:v>136</c:v>
+                  <c:v>138</c:v>
                 </c:pt>
                 <c:pt idx="67">
-                  <c:v>138</c:v>
+                  <c:v>140</c:v>
                 </c:pt>
                 <c:pt idx="68">
-                  <c:v>140</c:v>
+                  <c:v>142</c:v>
                 </c:pt>
                 <c:pt idx="69">
-                  <c:v>142</c:v>
+                  <c:v>144</c:v>
                 </c:pt>
                 <c:pt idx="70">
-                  <c:v>144</c:v>
+                  <c:v>146</c:v>
                 </c:pt>
                 <c:pt idx="71">
-                  <c:v>146</c:v>
+                  <c:v>148</c:v>
                 </c:pt>
                 <c:pt idx="72">
-                  <c:v>148</c:v>
+                  <c:v>150</c:v>
                 </c:pt>
                 <c:pt idx="73">
-                  <c:v>150</c:v>
+                  <c:v>152</c:v>
                 </c:pt>
                 <c:pt idx="74">
-                  <c:v>152</c:v>
+                  <c:v>154</c:v>
                 </c:pt>
                 <c:pt idx="75">
-                  <c:v>154</c:v>
+                  <c:v>156</c:v>
                 </c:pt>
                 <c:pt idx="76">
-                  <c:v>156</c:v>
+                  <c:v>158</c:v>
                 </c:pt>
                 <c:pt idx="77">
-                  <c:v>158</c:v>
+                  <c:v>160</c:v>
                 </c:pt>
                 <c:pt idx="78">
-                  <c:v>160</c:v>
+                  <c:v>162</c:v>
                 </c:pt>
                 <c:pt idx="79">
-                  <c:v>162</c:v>
+                  <c:v>164</c:v>
                 </c:pt>
                 <c:pt idx="80">
-                  <c:v>164</c:v>
+                  <c:v>166</c:v>
                 </c:pt>
                 <c:pt idx="81">
-                  <c:v>166</c:v>
+                  <c:v>168</c:v>
                 </c:pt>
                 <c:pt idx="82">
-                  <c:v>168</c:v>
+                  <c:v>170</c:v>
                 </c:pt>
                 <c:pt idx="83">
-                  <c:v>170</c:v>
+                  <c:v>172</c:v>
                 </c:pt>
                 <c:pt idx="84">
-                  <c:v>172</c:v>
+                  <c:v>174</c:v>
                 </c:pt>
                 <c:pt idx="85">
-                  <c:v>174</c:v>
+                  <c:v>176</c:v>
                 </c:pt>
                 <c:pt idx="86">
-                  <c:v>176</c:v>
+                  <c:v>178</c:v>
                 </c:pt>
                 <c:pt idx="87">
-                  <c:v>178</c:v>
+                  <c:v>180</c:v>
                 </c:pt>
                 <c:pt idx="88">
-                  <c:v>180</c:v>
+                  <c:v>182</c:v>
                 </c:pt>
                 <c:pt idx="89">
-                  <c:v>182</c:v>
+                  <c:v>184</c:v>
                 </c:pt>
                 <c:pt idx="90">
-                  <c:v>184</c:v>
+                  <c:v>186</c:v>
                 </c:pt>
                 <c:pt idx="91">
-                  <c:v>186</c:v>
+                  <c:v>188</c:v>
                 </c:pt>
                 <c:pt idx="92">
-                  <c:v>188</c:v>
+                  <c:v>190</c:v>
                 </c:pt>
                 <c:pt idx="93">
-                  <c:v>190</c:v>
+                  <c:v>192</c:v>
                 </c:pt>
                 <c:pt idx="94">
-                  <c:v>192</c:v>
+                  <c:v>194</c:v>
                 </c:pt>
                 <c:pt idx="95">
-                  <c:v>194</c:v>
+                  <c:v>196</c:v>
                 </c:pt>
                 <c:pt idx="96">
-                  <c:v>196</c:v>
+                  <c:v>198</c:v>
                 </c:pt>
                 <c:pt idx="97">
-                  <c:v>198</c:v>
+                  <c:v>200</c:v>
                 </c:pt>
                 <c:pt idx="98">
-                  <c:v>200</c:v>
+                  <c:v>202</c:v>
                 </c:pt>
                 <c:pt idx="99">
-                  <c:v>202</c:v>
+                  <c:v>204</c:v>
                 </c:pt>
                 <c:pt idx="100">
-                  <c:v>204</c:v>
+                  <c:v>206</c:v>
                 </c:pt>
                 <c:pt idx="101">
-                  <c:v>206</c:v>
+                  <c:v>208</c:v>
                 </c:pt>
                 <c:pt idx="102">
-                  <c:v>208</c:v>
+                  <c:v>210</c:v>
                 </c:pt>
                 <c:pt idx="103">
-                  <c:v>210</c:v>
+                  <c:v>212</c:v>
                 </c:pt>
                 <c:pt idx="104">
-                  <c:v>212</c:v>
+                  <c:v>214</c:v>
                 </c:pt>
                 <c:pt idx="105">
-                  <c:v>214</c:v>
+                  <c:v>216</c:v>
                 </c:pt>
                 <c:pt idx="106">
-                  <c:v>216</c:v>
+                  <c:v>218</c:v>
                 </c:pt>
                 <c:pt idx="107">
-                  <c:v>218</c:v>
+                  <c:v>220</c:v>
                 </c:pt>
                 <c:pt idx="108">
-                  <c:v>220</c:v>
+                  <c:v>222</c:v>
                 </c:pt>
                 <c:pt idx="109">
-                  <c:v>222</c:v>
+                  <c:v>224</c:v>
                 </c:pt>
                 <c:pt idx="110">
-                  <c:v>224</c:v>
+                  <c:v>226</c:v>
                 </c:pt>
                 <c:pt idx="111">
-                  <c:v>226</c:v>
+                  <c:v>228</c:v>
                 </c:pt>
                 <c:pt idx="112">
-                  <c:v>228</c:v>
+                  <c:v>230</c:v>
                 </c:pt>
                 <c:pt idx="113">
-                  <c:v>230</c:v>
+                  <c:v>232</c:v>
                 </c:pt>
                 <c:pt idx="114">
-                  <c:v>232</c:v>
+                  <c:v>234</c:v>
                 </c:pt>
                 <c:pt idx="115">
-                  <c:v>234</c:v>
+                  <c:v>236</c:v>
                 </c:pt>
                 <c:pt idx="116">
-                  <c:v>236</c:v>
+                  <c:v>238</c:v>
                 </c:pt>
                 <c:pt idx="117">
-                  <c:v>238</c:v>
+                  <c:v>240</c:v>
                 </c:pt>
                 <c:pt idx="118">
-                  <c:v>240</c:v>
+                  <c:v>242</c:v>
                 </c:pt>
                 <c:pt idx="119">
-                  <c:v>242</c:v>
+                  <c:v>244</c:v>
                 </c:pt>
                 <c:pt idx="120">
-                  <c:v>244</c:v>
+                  <c:v>246</c:v>
                 </c:pt>
                 <c:pt idx="121">
-                  <c:v>246</c:v>
+                  <c:v>248</c:v>
                 </c:pt>
                 <c:pt idx="122">
-                  <c:v>248</c:v>
+                  <c:v>250</c:v>
                 </c:pt>
                 <c:pt idx="123">
-                  <c:v>250</c:v>
+                  <c:v>252</c:v>
                 </c:pt>
                 <c:pt idx="124">
-                  <c:v>252</c:v>
+                  <c:v>254</c:v>
                 </c:pt>
                 <c:pt idx="125">
-                  <c:v>254</c:v>
+                  <c:v>256</c:v>
                 </c:pt>
                 <c:pt idx="126">
-                  <c:v>256</c:v>
+                  <c:v>258</c:v>
                 </c:pt>
                 <c:pt idx="127">
-                  <c:v>258</c:v>
+                  <c:v>260</c:v>
                 </c:pt>
                 <c:pt idx="128">
-                  <c:v>260</c:v>
+                  <c:v>262</c:v>
                 </c:pt>
                 <c:pt idx="129">
-                  <c:v>262</c:v>
+                  <c:v>264</c:v>
                 </c:pt>
                 <c:pt idx="130">
-                  <c:v>264</c:v>
+                  <c:v>266</c:v>
                 </c:pt>
                 <c:pt idx="131">
-                  <c:v>266</c:v>
+                  <c:v>268</c:v>
                 </c:pt>
                 <c:pt idx="132">
-                  <c:v>268</c:v>
+                  <c:v>270</c:v>
                 </c:pt>
                 <c:pt idx="133">
-                  <c:v>270</c:v>
+                  <c:v>272</c:v>
                 </c:pt>
                 <c:pt idx="134">
-                  <c:v>272</c:v>
+                  <c:v>274</c:v>
                 </c:pt>
                 <c:pt idx="135">
-                  <c:v>274</c:v>
+                  <c:v>276</c:v>
                 </c:pt>
                 <c:pt idx="136">
-                  <c:v>276</c:v>
+                  <c:v>278</c:v>
                 </c:pt>
                 <c:pt idx="137">
-                  <c:v>278</c:v>
+                  <c:v>280</c:v>
                 </c:pt>
                 <c:pt idx="138">
-                  <c:v>280</c:v>
+                  <c:v>282</c:v>
                 </c:pt>
                 <c:pt idx="139">
-                  <c:v>282</c:v>
+                  <c:v>284</c:v>
                 </c:pt>
                 <c:pt idx="140">
-                  <c:v>284</c:v>
+                  <c:v>286</c:v>
                 </c:pt>
                 <c:pt idx="141">
-                  <c:v>286</c:v>
+                  <c:v>288</c:v>
                 </c:pt>
                 <c:pt idx="142">
-                  <c:v>288</c:v>
+                  <c:v>290</c:v>
                 </c:pt>
                 <c:pt idx="143">
-                  <c:v>290</c:v>
+                  <c:v>292</c:v>
                 </c:pt>
                 <c:pt idx="144">
-                  <c:v>292</c:v>
+                  <c:v>294</c:v>
                 </c:pt>
                 <c:pt idx="145">
-                  <c:v>294</c:v>
+                  <c:v>296</c:v>
                 </c:pt>
                 <c:pt idx="146">
-                  <c:v>296</c:v>
+                  <c:v>298</c:v>
                 </c:pt>
                 <c:pt idx="147">
-                  <c:v>298</c:v>
-                </c:pt>
-                <c:pt idx="148">
                   <c:v>300</c:v>
                 </c:pt>
               </c:numCache>
@@ -4226,10 +6637,10 @@
           </c:xVal>
           <c:yVal>
             <c:numRef>
-              <c:f>Sheet1!$C$2:$C$150</c:f>
+              <c:f>Sheet1!$C$2:$C$149</c:f>
               <c:numCache>
                 <c:formatCode>General</c:formatCode>
-                <c:ptCount val="149"/>
+                <c:ptCount val="148"/>
                 <c:pt idx="0">
                   <c:v>12.25</c:v>
                 </c:pt>
@@ -4674,8 +7085,1909 @@
                 <c:pt idx="147">
                   <c:v>20.63</c:v>
                 </c:pt>
-                <c:pt idx="148">
-                  <c:v>16.84</c:v>
+              </c:numCache>
+            </c:numRef>
+          </c:yVal>
+          <c:smooth val="0"/>
+        </c:ser>
+        <c:ser>
+          <c:idx val="2"/>
+          <c:order val="2"/>
+          <c:tx>
+            <c:strRef>
+              <c:f>Sheet1!$D$1</c:f>
+              <c:strCache>
+                <c:ptCount val="1"/>
+                <c:pt idx="0">
+                  <c:v>Ours Prefill</c:v>
+                </c:pt>
+              </c:strCache>
+            </c:strRef>
+          </c:tx>
+          <c:spPr>
+            <a:solidFill>
+              <a:srgbClr val="009E73"/>
+            </a:solidFill>
+            <a:ln w="28575" cap="flat">
+              <a:solidFill>
+                <a:srgbClr val="009E73"/>
+              </a:solidFill>
+              <a:prstDash val="solid"/>
+              <a:round/>
+            </a:ln>
+            <a:effectLst/>
+          </c:spPr>
+          <c:marker>
+            <c:symbol val="none"/>
+            <c:size val="6"/>
+            <c:spPr>
+              <a:solidFill>
+                <a:srgbClr val="009E73"/>
+              </a:solidFill>
+              <a:ln w="9525" cap="flat">
+                <a:solidFill>
+                  <a:srgbClr val="009E73"/>
+                </a:solidFill>
+                <a:prstDash val="solid"/>
+                <a:round/>
+              </a:ln>
+              <a:effectLst/>
+            </c:spPr>
+          </c:marker>
+          <c:xVal>
+            <c:numRef>
+              <c:f>Sheet1!$A$2:$A$149</c:f>
+              <c:numCache>
+                <c:formatCode>General</c:formatCode>
+                <c:ptCount val="148"/>
+                <c:pt idx="0">
+                  <c:v>6</c:v>
+                </c:pt>
+                <c:pt idx="1">
+                  <c:v>8</c:v>
+                </c:pt>
+                <c:pt idx="2">
+                  <c:v>10</c:v>
+                </c:pt>
+                <c:pt idx="3">
+                  <c:v>12</c:v>
+                </c:pt>
+                <c:pt idx="4">
+                  <c:v>14</c:v>
+                </c:pt>
+                <c:pt idx="5">
+                  <c:v>16</c:v>
+                </c:pt>
+                <c:pt idx="6">
+                  <c:v>18</c:v>
+                </c:pt>
+                <c:pt idx="7">
+                  <c:v>20</c:v>
+                </c:pt>
+                <c:pt idx="8">
+                  <c:v>22</c:v>
+                </c:pt>
+                <c:pt idx="9">
+                  <c:v>24</c:v>
+                </c:pt>
+                <c:pt idx="10">
+                  <c:v>26</c:v>
+                </c:pt>
+                <c:pt idx="11">
+                  <c:v>28</c:v>
+                </c:pt>
+                <c:pt idx="12">
+                  <c:v>30</c:v>
+                </c:pt>
+                <c:pt idx="13">
+                  <c:v>32</c:v>
+                </c:pt>
+                <c:pt idx="14">
+                  <c:v>34</c:v>
+                </c:pt>
+                <c:pt idx="15">
+                  <c:v>36</c:v>
+                </c:pt>
+                <c:pt idx="16">
+                  <c:v>38</c:v>
+                </c:pt>
+                <c:pt idx="17">
+                  <c:v>40</c:v>
+                </c:pt>
+                <c:pt idx="18">
+                  <c:v>42</c:v>
+                </c:pt>
+                <c:pt idx="19">
+                  <c:v>44</c:v>
+                </c:pt>
+                <c:pt idx="20">
+                  <c:v>46</c:v>
+                </c:pt>
+                <c:pt idx="21">
+                  <c:v>48</c:v>
+                </c:pt>
+                <c:pt idx="22">
+                  <c:v>50</c:v>
+                </c:pt>
+                <c:pt idx="23">
+                  <c:v>52</c:v>
+                </c:pt>
+                <c:pt idx="24">
+                  <c:v>54</c:v>
+                </c:pt>
+                <c:pt idx="25">
+                  <c:v>56</c:v>
+                </c:pt>
+                <c:pt idx="26">
+                  <c:v>58</c:v>
+                </c:pt>
+                <c:pt idx="27">
+                  <c:v>60</c:v>
+                </c:pt>
+                <c:pt idx="28">
+                  <c:v>62</c:v>
+                </c:pt>
+                <c:pt idx="29">
+                  <c:v>64</c:v>
+                </c:pt>
+                <c:pt idx="30">
+                  <c:v>66</c:v>
+                </c:pt>
+                <c:pt idx="31">
+                  <c:v>68</c:v>
+                </c:pt>
+                <c:pt idx="32">
+                  <c:v>70</c:v>
+                </c:pt>
+                <c:pt idx="33">
+                  <c:v>72</c:v>
+                </c:pt>
+                <c:pt idx="34">
+                  <c:v>74</c:v>
+                </c:pt>
+                <c:pt idx="35">
+                  <c:v>76</c:v>
+                </c:pt>
+                <c:pt idx="36">
+                  <c:v>78</c:v>
+                </c:pt>
+                <c:pt idx="37">
+                  <c:v>80</c:v>
+                </c:pt>
+                <c:pt idx="38">
+                  <c:v>82</c:v>
+                </c:pt>
+                <c:pt idx="39">
+                  <c:v>84</c:v>
+                </c:pt>
+                <c:pt idx="40">
+                  <c:v>86</c:v>
+                </c:pt>
+                <c:pt idx="41">
+                  <c:v>88</c:v>
+                </c:pt>
+                <c:pt idx="42">
+                  <c:v>90</c:v>
+                </c:pt>
+                <c:pt idx="43">
+                  <c:v>92</c:v>
+                </c:pt>
+                <c:pt idx="44">
+                  <c:v>94</c:v>
+                </c:pt>
+                <c:pt idx="45">
+                  <c:v>96</c:v>
+                </c:pt>
+                <c:pt idx="46">
+                  <c:v>98</c:v>
+                </c:pt>
+                <c:pt idx="47">
+                  <c:v>100</c:v>
+                </c:pt>
+                <c:pt idx="48">
+                  <c:v>102</c:v>
+                </c:pt>
+                <c:pt idx="49">
+                  <c:v>104</c:v>
+                </c:pt>
+                <c:pt idx="50">
+                  <c:v>106</c:v>
+                </c:pt>
+                <c:pt idx="51">
+                  <c:v>108</c:v>
+                </c:pt>
+                <c:pt idx="52">
+                  <c:v>110</c:v>
+                </c:pt>
+                <c:pt idx="53">
+                  <c:v>112</c:v>
+                </c:pt>
+                <c:pt idx="54">
+                  <c:v>114</c:v>
+                </c:pt>
+                <c:pt idx="55">
+                  <c:v>116</c:v>
+                </c:pt>
+                <c:pt idx="56">
+                  <c:v>118</c:v>
+                </c:pt>
+                <c:pt idx="57">
+                  <c:v>120</c:v>
+                </c:pt>
+                <c:pt idx="58">
+                  <c:v>122</c:v>
+                </c:pt>
+                <c:pt idx="59">
+                  <c:v>124</c:v>
+                </c:pt>
+                <c:pt idx="60">
+                  <c:v>126</c:v>
+                </c:pt>
+                <c:pt idx="61">
+                  <c:v>128</c:v>
+                </c:pt>
+                <c:pt idx="62">
+                  <c:v>130</c:v>
+                </c:pt>
+                <c:pt idx="63">
+                  <c:v>132</c:v>
+                </c:pt>
+                <c:pt idx="64">
+                  <c:v>134</c:v>
+                </c:pt>
+                <c:pt idx="65">
+                  <c:v>136</c:v>
+                </c:pt>
+                <c:pt idx="66">
+                  <c:v>138</c:v>
+                </c:pt>
+                <c:pt idx="67">
+                  <c:v>140</c:v>
+                </c:pt>
+                <c:pt idx="68">
+                  <c:v>142</c:v>
+                </c:pt>
+                <c:pt idx="69">
+                  <c:v>144</c:v>
+                </c:pt>
+                <c:pt idx="70">
+                  <c:v>146</c:v>
+                </c:pt>
+                <c:pt idx="71">
+                  <c:v>148</c:v>
+                </c:pt>
+                <c:pt idx="72">
+                  <c:v>150</c:v>
+                </c:pt>
+                <c:pt idx="73">
+                  <c:v>152</c:v>
+                </c:pt>
+                <c:pt idx="74">
+                  <c:v>154</c:v>
+                </c:pt>
+                <c:pt idx="75">
+                  <c:v>156</c:v>
+                </c:pt>
+                <c:pt idx="76">
+                  <c:v>158</c:v>
+                </c:pt>
+                <c:pt idx="77">
+                  <c:v>160</c:v>
+                </c:pt>
+                <c:pt idx="78">
+                  <c:v>162</c:v>
+                </c:pt>
+                <c:pt idx="79">
+                  <c:v>164</c:v>
+                </c:pt>
+                <c:pt idx="80">
+                  <c:v>166</c:v>
+                </c:pt>
+                <c:pt idx="81">
+                  <c:v>168</c:v>
+                </c:pt>
+                <c:pt idx="82">
+                  <c:v>170</c:v>
+                </c:pt>
+                <c:pt idx="83">
+                  <c:v>172</c:v>
+                </c:pt>
+                <c:pt idx="84">
+                  <c:v>174</c:v>
+                </c:pt>
+                <c:pt idx="85">
+                  <c:v>176</c:v>
+                </c:pt>
+                <c:pt idx="86">
+                  <c:v>178</c:v>
+                </c:pt>
+                <c:pt idx="87">
+                  <c:v>180</c:v>
+                </c:pt>
+                <c:pt idx="88">
+                  <c:v>182</c:v>
+                </c:pt>
+                <c:pt idx="89">
+                  <c:v>184</c:v>
+                </c:pt>
+                <c:pt idx="90">
+                  <c:v>186</c:v>
+                </c:pt>
+                <c:pt idx="91">
+                  <c:v>188</c:v>
+                </c:pt>
+                <c:pt idx="92">
+                  <c:v>190</c:v>
+                </c:pt>
+                <c:pt idx="93">
+                  <c:v>192</c:v>
+                </c:pt>
+                <c:pt idx="94">
+                  <c:v>194</c:v>
+                </c:pt>
+                <c:pt idx="95">
+                  <c:v>196</c:v>
+                </c:pt>
+                <c:pt idx="96">
+                  <c:v>198</c:v>
+                </c:pt>
+                <c:pt idx="97">
+                  <c:v>200</c:v>
+                </c:pt>
+                <c:pt idx="98">
+                  <c:v>202</c:v>
+                </c:pt>
+                <c:pt idx="99">
+                  <c:v>204</c:v>
+                </c:pt>
+                <c:pt idx="100">
+                  <c:v>206</c:v>
+                </c:pt>
+                <c:pt idx="101">
+                  <c:v>208</c:v>
+                </c:pt>
+                <c:pt idx="102">
+                  <c:v>210</c:v>
+                </c:pt>
+                <c:pt idx="103">
+                  <c:v>212</c:v>
+                </c:pt>
+                <c:pt idx="104">
+                  <c:v>214</c:v>
+                </c:pt>
+                <c:pt idx="105">
+                  <c:v>216</c:v>
+                </c:pt>
+                <c:pt idx="106">
+                  <c:v>218</c:v>
+                </c:pt>
+                <c:pt idx="107">
+                  <c:v>220</c:v>
+                </c:pt>
+                <c:pt idx="108">
+                  <c:v>222</c:v>
+                </c:pt>
+                <c:pt idx="109">
+                  <c:v>224</c:v>
+                </c:pt>
+                <c:pt idx="110">
+                  <c:v>226</c:v>
+                </c:pt>
+                <c:pt idx="111">
+                  <c:v>228</c:v>
+                </c:pt>
+                <c:pt idx="112">
+                  <c:v>230</c:v>
+                </c:pt>
+                <c:pt idx="113">
+                  <c:v>232</c:v>
+                </c:pt>
+                <c:pt idx="114">
+                  <c:v>234</c:v>
+                </c:pt>
+                <c:pt idx="115">
+                  <c:v>236</c:v>
+                </c:pt>
+                <c:pt idx="116">
+                  <c:v>238</c:v>
+                </c:pt>
+                <c:pt idx="117">
+                  <c:v>240</c:v>
+                </c:pt>
+                <c:pt idx="118">
+                  <c:v>242</c:v>
+                </c:pt>
+                <c:pt idx="119">
+                  <c:v>244</c:v>
+                </c:pt>
+                <c:pt idx="120">
+                  <c:v>246</c:v>
+                </c:pt>
+                <c:pt idx="121">
+                  <c:v>248</c:v>
+                </c:pt>
+                <c:pt idx="122">
+                  <c:v>250</c:v>
+                </c:pt>
+                <c:pt idx="123">
+                  <c:v>252</c:v>
+                </c:pt>
+                <c:pt idx="124">
+                  <c:v>254</c:v>
+                </c:pt>
+                <c:pt idx="125">
+                  <c:v>256</c:v>
+                </c:pt>
+                <c:pt idx="126">
+                  <c:v>258</c:v>
+                </c:pt>
+                <c:pt idx="127">
+                  <c:v>260</c:v>
+                </c:pt>
+                <c:pt idx="128">
+                  <c:v>262</c:v>
+                </c:pt>
+                <c:pt idx="129">
+                  <c:v>264</c:v>
+                </c:pt>
+                <c:pt idx="130">
+                  <c:v>266</c:v>
+                </c:pt>
+                <c:pt idx="131">
+                  <c:v>268</c:v>
+                </c:pt>
+                <c:pt idx="132">
+                  <c:v>270</c:v>
+                </c:pt>
+                <c:pt idx="133">
+                  <c:v>272</c:v>
+                </c:pt>
+                <c:pt idx="134">
+                  <c:v>274</c:v>
+                </c:pt>
+                <c:pt idx="135">
+                  <c:v>276</c:v>
+                </c:pt>
+                <c:pt idx="136">
+                  <c:v>278</c:v>
+                </c:pt>
+                <c:pt idx="137">
+                  <c:v>280</c:v>
+                </c:pt>
+                <c:pt idx="138">
+                  <c:v>282</c:v>
+                </c:pt>
+                <c:pt idx="139">
+                  <c:v>284</c:v>
+                </c:pt>
+                <c:pt idx="140">
+                  <c:v>286</c:v>
+                </c:pt>
+                <c:pt idx="141">
+                  <c:v>288</c:v>
+                </c:pt>
+                <c:pt idx="142">
+                  <c:v>290</c:v>
+                </c:pt>
+                <c:pt idx="143">
+                  <c:v>292</c:v>
+                </c:pt>
+                <c:pt idx="144">
+                  <c:v>294</c:v>
+                </c:pt>
+                <c:pt idx="145">
+                  <c:v>296</c:v>
+                </c:pt>
+                <c:pt idx="146">
+                  <c:v>298</c:v>
+                </c:pt>
+                <c:pt idx="147">
+                  <c:v>300</c:v>
+                </c:pt>
+              </c:numCache>
+            </c:numRef>
+          </c:xVal>
+          <c:yVal>
+            <c:numRef>
+              <c:f>Sheet1!$D$2:$D$149</c:f>
+              <c:numCache>
+                <c:formatCode>General</c:formatCode>
+                <c:ptCount val="148"/>
+                <c:pt idx="0">
+                  <c:v>27.32</c:v>
+                </c:pt>
+                <c:pt idx="1">
+                  <c:v>34.14</c:v>
+                </c:pt>
+                <c:pt idx="2">
+                  <c:v>37.55</c:v>
+                </c:pt>
+                <c:pt idx="3">
+                  <c:v>37.55</c:v>
+                </c:pt>
+                <c:pt idx="4">
+                  <c:v>44.41</c:v>
+                </c:pt>
+                <c:pt idx="5">
+                  <c:v>60.97</c:v>
+                </c:pt>
+                <c:pt idx="6">
+                  <c:v>64.38</c:v>
+                </c:pt>
+                <c:pt idx="7">
+                  <c:v>76.44</c:v>
+                </c:pt>
+                <c:pt idx="8">
+                  <c:v>76.44</c:v>
+                </c:pt>
+                <c:pt idx="9">
+                  <c:v>83</c:v>
+                </c:pt>
+                <c:pt idx="10">
+                  <c:v>83</c:v>
+                </c:pt>
+                <c:pt idx="11">
+                  <c:v>72.41</c:v>
+                </c:pt>
+                <c:pt idx="12">
+                  <c:v>80.3</c:v>
+                </c:pt>
+                <c:pt idx="13">
+                  <c:v>80.3</c:v>
+                </c:pt>
+                <c:pt idx="14">
+                  <c:v>80.3</c:v>
+                </c:pt>
+                <c:pt idx="15">
+                  <c:v>79.02</c:v>
+                </c:pt>
+                <c:pt idx="16">
+                  <c:v>85.78</c:v>
+                </c:pt>
+                <c:pt idx="17">
+                  <c:v>89.19</c:v>
+                </c:pt>
+                <c:pt idx="18">
+                  <c:v>91.34</c:v>
+                </c:pt>
+                <c:pt idx="19">
+                  <c:v>94.44</c:v>
+                </c:pt>
+                <c:pt idx="20">
+                  <c:v>94.44</c:v>
+                </c:pt>
+                <c:pt idx="21">
+                  <c:v>94.44</c:v>
+                </c:pt>
+                <c:pt idx="22">
+                  <c:v>94.44</c:v>
+                </c:pt>
+                <c:pt idx="23">
+                  <c:v>95.42</c:v>
+                </c:pt>
+                <c:pt idx="24">
+                  <c:v>86.9</c:v>
+                </c:pt>
+                <c:pt idx="25">
+                  <c:v>70.77</c:v>
+                </c:pt>
+                <c:pt idx="26">
+                  <c:v>70.77</c:v>
+                </c:pt>
+                <c:pt idx="27">
+                  <c:v>74.12</c:v>
+                </c:pt>
+                <c:pt idx="28">
+                  <c:v>74.12</c:v>
+                </c:pt>
+                <c:pt idx="29">
+                  <c:v>75.48</c:v>
+                </c:pt>
+                <c:pt idx="30">
+                  <c:v>75.48</c:v>
+                </c:pt>
+                <c:pt idx="31">
+                  <c:v>75.48</c:v>
+                </c:pt>
+                <c:pt idx="32">
+                  <c:v>93.43</c:v>
+                </c:pt>
+                <c:pt idx="33">
+                  <c:v>71.35</c:v>
+                </c:pt>
+                <c:pt idx="34">
+                  <c:v>83.34</c:v>
+                </c:pt>
+                <c:pt idx="35">
+                  <c:v>93.58</c:v>
+                </c:pt>
+                <c:pt idx="36">
+                  <c:v>73.88</c:v>
+                </c:pt>
+                <c:pt idx="37">
+                  <c:v>77.29</c:v>
+                </c:pt>
+                <c:pt idx="38">
+                  <c:v>84</c:v>
+                </c:pt>
+                <c:pt idx="39">
+                  <c:v>94.24</c:v>
+                </c:pt>
+                <c:pt idx="40">
+                  <c:v>94.36</c:v>
+                </c:pt>
+                <c:pt idx="41">
+                  <c:v>94.36</c:v>
+                </c:pt>
+                <c:pt idx="42">
+                  <c:v>92.91</c:v>
+                </c:pt>
+                <c:pt idx="43">
+                  <c:v>94.19</c:v>
+                </c:pt>
+                <c:pt idx="44">
+                  <c:v>83.18</c:v>
+                </c:pt>
+                <c:pt idx="45">
+                  <c:v>83.18</c:v>
+                </c:pt>
+                <c:pt idx="46">
+                  <c:v>83.02</c:v>
+                </c:pt>
+                <c:pt idx="47">
+                  <c:v>93.04</c:v>
+                </c:pt>
+                <c:pt idx="48">
+                  <c:v>42.34</c:v>
+                </c:pt>
+                <c:pt idx="49">
+                  <c:v>54.14</c:v>
+                </c:pt>
+                <c:pt idx="50">
+                  <c:v>71.2</c:v>
+                </c:pt>
+                <c:pt idx="51">
+                  <c:v>78.03</c:v>
+                </c:pt>
+                <c:pt idx="52">
+                  <c:v>56.15</c:v>
+                </c:pt>
+                <c:pt idx="53">
+                  <c:v>62.98</c:v>
+                </c:pt>
+                <c:pt idx="54">
+                  <c:v>66.39</c:v>
+                </c:pt>
+                <c:pt idx="55">
+                  <c:v>73.63</c:v>
+                </c:pt>
+                <c:pt idx="56">
+                  <c:v>76.63</c:v>
+                </c:pt>
+                <c:pt idx="57">
+                  <c:v>55.89</c:v>
+                </c:pt>
+                <c:pt idx="58">
+                  <c:v>59.3</c:v>
+                </c:pt>
+                <c:pt idx="59">
+                  <c:v>71.66</c:v>
+                </c:pt>
+                <c:pt idx="60">
+                  <c:v>85.31</c:v>
+                </c:pt>
+                <c:pt idx="61">
+                  <c:v>62.71</c:v>
+                </c:pt>
+                <c:pt idx="62">
+                  <c:v>69.74</c:v>
+                </c:pt>
+                <c:pt idx="63">
+                  <c:v>79.98</c:v>
+                </c:pt>
+                <c:pt idx="64">
+                  <c:v>86.81</c:v>
+                </c:pt>
+                <c:pt idx="65">
+                  <c:v>93.02</c:v>
+                </c:pt>
+                <c:pt idx="66">
+                  <c:v>93.02</c:v>
+                </c:pt>
+                <c:pt idx="67">
+                  <c:v>93.05</c:v>
+                </c:pt>
+                <c:pt idx="68">
+                  <c:v>93.02</c:v>
+                </c:pt>
+                <c:pt idx="69">
+                  <c:v>93.02</c:v>
+                </c:pt>
+                <c:pt idx="70">
+                  <c:v>72.54</c:v>
+                </c:pt>
+                <c:pt idx="71">
+                  <c:v>80.16</c:v>
+                </c:pt>
+                <c:pt idx="72">
+                  <c:v>90.4</c:v>
+                </c:pt>
+                <c:pt idx="73">
+                  <c:v>93.02</c:v>
+                </c:pt>
+                <c:pt idx="74">
+                  <c:v>89.62</c:v>
+                </c:pt>
+                <c:pt idx="75">
+                  <c:v>92.67</c:v>
+                </c:pt>
+                <c:pt idx="76">
+                  <c:v>93.04</c:v>
+                </c:pt>
+                <c:pt idx="77">
+                  <c:v>93.04</c:v>
+                </c:pt>
+                <c:pt idx="78">
+                  <c:v>69.46</c:v>
+                </c:pt>
+                <c:pt idx="79">
+                  <c:v>76.29</c:v>
+                </c:pt>
+                <c:pt idx="80">
+                  <c:v>80.42</c:v>
+                </c:pt>
+                <c:pt idx="81">
+                  <c:v>90.66</c:v>
+                </c:pt>
+                <c:pt idx="82">
+                  <c:v>88.29</c:v>
+                </c:pt>
+                <c:pt idx="83">
+                  <c:v>88.29</c:v>
+                </c:pt>
+                <c:pt idx="84">
+                  <c:v>88.29</c:v>
+                </c:pt>
+                <c:pt idx="85">
+                  <c:v>88.29</c:v>
+                </c:pt>
+                <c:pt idx="86">
+                  <c:v>86.53</c:v>
+                </c:pt>
+                <c:pt idx="87">
+                  <c:v>79.3</c:v>
+                </c:pt>
+                <c:pt idx="88">
+                  <c:v>91.94</c:v>
+                </c:pt>
+                <c:pt idx="89">
+                  <c:v>44.26</c:v>
+                </c:pt>
+                <c:pt idx="90">
+                  <c:v>51.09</c:v>
+                </c:pt>
+                <c:pt idx="91">
+                  <c:v>54.5</c:v>
+                </c:pt>
+                <c:pt idx="92">
+                  <c:v>65.91</c:v>
+                </c:pt>
+                <c:pt idx="93">
+                  <c:v>82.95</c:v>
+                </c:pt>
+                <c:pt idx="94">
+                  <c:v>81.78</c:v>
+                </c:pt>
+                <c:pt idx="95">
+                  <c:v>81.78</c:v>
+                </c:pt>
+                <c:pt idx="96">
+                  <c:v>81.78</c:v>
+                </c:pt>
+                <c:pt idx="97">
+                  <c:v>66.93</c:v>
+                </c:pt>
+                <c:pt idx="98">
+                  <c:v>71.24</c:v>
+                </c:pt>
+                <c:pt idx="99">
+                  <c:v>71.24</c:v>
+                </c:pt>
+                <c:pt idx="100">
+                  <c:v>71.24</c:v>
+                </c:pt>
+                <c:pt idx="101">
+                  <c:v>71.24</c:v>
+                </c:pt>
+                <c:pt idx="102">
+                  <c:v>70.51</c:v>
+                </c:pt>
+                <c:pt idx="103">
+                  <c:v>67.53</c:v>
+                </c:pt>
+                <c:pt idx="104">
+                  <c:v>68.36</c:v>
+                </c:pt>
+                <c:pt idx="105">
+                  <c:v>71.78</c:v>
+                </c:pt>
+                <c:pt idx="106">
+                  <c:v>71.78</c:v>
+                </c:pt>
+                <c:pt idx="107">
+                  <c:v>72.62</c:v>
+                </c:pt>
+                <c:pt idx="108">
+                  <c:v>72.62</c:v>
+                </c:pt>
+                <c:pt idx="109">
+                  <c:v>55.91</c:v>
+                </c:pt>
+                <c:pt idx="110">
+                  <c:v>66.15</c:v>
+                </c:pt>
+                <c:pt idx="111">
+                  <c:v>73.59</c:v>
+                </c:pt>
+                <c:pt idx="112">
+                  <c:v>80.42</c:v>
+                </c:pt>
+                <c:pt idx="113">
+                  <c:v>83.83</c:v>
+                </c:pt>
+                <c:pt idx="114">
+                  <c:v>83.83</c:v>
+                </c:pt>
+                <c:pt idx="115">
+                  <c:v>85.43</c:v>
+                </c:pt>
+                <c:pt idx="116">
+                  <c:v>85.43</c:v>
+                </c:pt>
+                <c:pt idx="117">
+                  <c:v>87.25</c:v>
+                </c:pt>
+                <c:pt idx="118">
+                  <c:v>87.25</c:v>
+                </c:pt>
+                <c:pt idx="119">
+                  <c:v>87.25</c:v>
+                </c:pt>
+                <c:pt idx="120">
+                  <c:v>87.25</c:v>
+                </c:pt>
+                <c:pt idx="121">
+                  <c:v>85.72</c:v>
+                </c:pt>
+                <c:pt idx="122">
+                  <c:v>92.55</c:v>
+                </c:pt>
+                <c:pt idx="123">
+                  <c:v>91.43</c:v>
+                </c:pt>
+                <c:pt idx="124">
+                  <c:v>98.26</c:v>
+                </c:pt>
+                <c:pt idx="125">
+                  <c:v>80.52</c:v>
+                </c:pt>
+                <c:pt idx="126">
+                  <c:v>87.41</c:v>
+                </c:pt>
+                <c:pt idx="127">
+                  <c:v>95.02</c:v>
+                </c:pt>
+                <c:pt idx="128">
+                  <c:v>98.36</c:v>
+                </c:pt>
+                <c:pt idx="129">
+                  <c:v>81.12</c:v>
+                </c:pt>
+                <c:pt idx="130">
+                  <c:v>91.36</c:v>
+                </c:pt>
+                <c:pt idx="131">
+                  <c:v>98.18</c:v>
+                </c:pt>
+                <c:pt idx="132">
+                  <c:v>97.68</c:v>
+                </c:pt>
+                <c:pt idx="133">
+                  <c:v>83.46</c:v>
+                </c:pt>
+                <c:pt idx="134">
+                  <c:v>94.97</c:v>
+                </c:pt>
+                <c:pt idx="135">
+                  <c:v>93.87</c:v>
+                </c:pt>
+                <c:pt idx="136">
+                  <c:v>97.28</c:v>
+                </c:pt>
+                <c:pt idx="137">
+                  <c:v>80.05</c:v>
+                </c:pt>
+                <c:pt idx="138">
+                  <c:v>83.46</c:v>
+                </c:pt>
+                <c:pt idx="139">
+                  <c:v>92.68</c:v>
+                </c:pt>
+                <c:pt idx="140">
+                  <c:v>93.7</c:v>
+                </c:pt>
+                <c:pt idx="141">
+                  <c:v>97.12</c:v>
+                </c:pt>
+                <c:pt idx="142">
+                  <c:v>97.17</c:v>
+                </c:pt>
+                <c:pt idx="143">
+                  <c:v>97.17</c:v>
+                </c:pt>
+                <c:pt idx="144">
+                  <c:v>97.17</c:v>
+                </c:pt>
+                <c:pt idx="145">
+                  <c:v>97.12</c:v>
+                </c:pt>
+                <c:pt idx="146">
+                  <c:v>97.22</c:v>
+                </c:pt>
+                <c:pt idx="147">
+                  <c:v>97.39</c:v>
+                </c:pt>
+              </c:numCache>
+            </c:numRef>
+          </c:yVal>
+          <c:smooth val="0"/>
+        </c:ser>
+        <c:ser>
+          <c:idx val="3"/>
+          <c:order val="3"/>
+          <c:tx>
+            <c:strRef>
+              <c:f>Sheet1!$E$1</c:f>
+              <c:strCache>
+                <c:ptCount val="1"/>
+                <c:pt idx="0">
+                  <c:v>Ours Decode</c:v>
+                </c:pt>
+              </c:strCache>
+            </c:strRef>
+          </c:tx>
+          <c:spPr>
+            <a:solidFill>
+              <a:srgbClr val="7FD9BE"/>
+            </a:solidFill>
+            <a:ln w="28575" cap="flat">
+              <a:solidFill>
+                <a:srgbClr val="7FD9BE"/>
+              </a:solidFill>
+              <a:prstDash val="solid"/>
+              <a:round/>
+            </a:ln>
+            <a:effectLst/>
+          </c:spPr>
+          <c:marker>
+            <c:symbol val="none"/>
+            <c:size val="6"/>
+            <c:spPr>
+              <a:solidFill>
+                <a:srgbClr val="7FD9BE"/>
+              </a:solidFill>
+              <a:ln w="9525" cap="flat">
+                <a:solidFill>
+                  <a:srgbClr val="7FD9BE"/>
+                </a:solidFill>
+                <a:prstDash val="solid"/>
+                <a:round/>
+              </a:ln>
+              <a:effectLst/>
+            </c:spPr>
+          </c:marker>
+          <c:xVal>
+            <c:numRef>
+              <c:f>Sheet1!$A$2:$A$149</c:f>
+              <c:numCache>
+                <c:formatCode>General</c:formatCode>
+                <c:ptCount val="148"/>
+                <c:pt idx="0">
+                  <c:v>6</c:v>
+                </c:pt>
+                <c:pt idx="1">
+                  <c:v>8</c:v>
+                </c:pt>
+                <c:pt idx="2">
+                  <c:v>10</c:v>
+                </c:pt>
+                <c:pt idx="3">
+                  <c:v>12</c:v>
+                </c:pt>
+                <c:pt idx="4">
+                  <c:v>14</c:v>
+                </c:pt>
+                <c:pt idx="5">
+                  <c:v>16</c:v>
+                </c:pt>
+                <c:pt idx="6">
+                  <c:v>18</c:v>
+                </c:pt>
+                <c:pt idx="7">
+                  <c:v>20</c:v>
+                </c:pt>
+                <c:pt idx="8">
+                  <c:v>22</c:v>
+                </c:pt>
+                <c:pt idx="9">
+                  <c:v>24</c:v>
+                </c:pt>
+                <c:pt idx="10">
+                  <c:v>26</c:v>
+                </c:pt>
+                <c:pt idx="11">
+                  <c:v>28</c:v>
+                </c:pt>
+                <c:pt idx="12">
+                  <c:v>30</c:v>
+                </c:pt>
+                <c:pt idx="13">
+                  <c:v>32</c:v>
+                </c:pt>
+                <c:pt idx="14">
+                  <c:v>34</c:v>
+                </c:pt>
+                <c:pt idx="15">
+                  <c:v>36</c:v>
+                </c:pt>
+                <c:pt idx="16">
+                  <c:v>38</c:v>
+                </c:pt>
+                <c:pt idx="17">
+                  <c:v>40</c:v>
+                </c:pt>
+                <c:pt idx="18">
+                  <c:v>42</c:v>
+                </c:pt>
+                <c:pt idx="19">
+                  <c:v>44</c:v>
+                </c:pt>
+                <c:pt idx="20">
+                  <c:v>46</c:v>
+                </c:pt>
+                <c:pt idx="21">
+                  <c:v>48</c:v>
+                </c:pt>
+                <c:pt idx="22">
+                  <c:v>50</c:v>
+                </c:pt>
+                <c:pt idx="23">
+                  <c:v>52</c:v>
+                </c:pt>
+                <c:pt idx="24">
+                  <c:v>54</c:v>
+                </c:pt>
+                <c:pt idx="25">
+                  <c:v>56</c:v>
+                </c:pt>
+                <c:pt idx="26">
+                  <c:v>58</c:v>
+                </c:pt>
+                <c:pt idx="27">
+                  <c:v>60</c:v>
+                </c:pt>
+                <c:pt idx="28">
+                  <c:v>62</c:v>
+                </c:pt>
+                <c:pt idx="29">
+                  <c:v>64</c:v>
+                </c:pt>
+                <c:pt idx="30">
+                  <c:v>66</c:v>
+                </c:pt>
+                <c:pt idx="31">
+                  <c:v>68</c:v>
+                </c:pt>
+                <c:pt idx="32">
+                  <c:v>70</c:v>
+                </c:pt>
+                <c:pt idx="33">
+                  <c:v>72</c:v>
+                </c:pt>
+                <c:pt idx="34">
+                  <c:v>74</c:v>
+                </c:pt>
+                <c:pt idx="35">
+                  <c:v>76</c:v>
+                </c:pt>
+                <c:pt idx="36">
+                  <c:v>78</c:v>
+                </c:pt>
+                <c:pt idx="37">
+                  <c:v>80</c:v>
+                </c:pt>
+                <c:pt idx="38">
+                  <c:v>82</c:v>
+                </c:pt>
+                <c:pt idx="39">
+                  <c:v>84</c:v>
+                </c:pt>
+                <c:pt idx="40">
+                  <c:v>86</c:v>
+                </c:pt>
+                <c:pt idx="41">
+                  <c:v>88</c:v>
+                </c:pt>
+                <c:pt idx="42">
+                  <c:v>90</c:v>
+                </c:pt>
+                <c:pt idx="43">
+                  <c:v>92</c:v>
+                </c:pt>
+                <c:pt idx="44">
+                  <c:v>94</c:v>
+                </c:pt>
+                <c:pt idx="45">
+                  <c:v>96</c:v>
+                </c:pt>
+                <c:pt idx="46">
+                  <c:v>98</c:v>
+                </c:pt>
+                <c:pt idx="47">
+                  <c:v>100</c:v>
+                </c:pt>
+                <c:pt idx="48">
+                  <c:v>102</c:v>
+                </c:pt>
+                <c:pt idx="49">
+                  <c:v>104</c:v>
+                </c:pt>
+                <c:pt idx="50">
+                  <c:v>106</c:v>
+                </c:pt>
+                <c:pt idx="51">
+                  <c:v>108</c:v>
+                </c:pt>
+                <c:pt idx="52">
+                  <c:v>110</c:v>
+                </c:pt>
+                <c:pt idx="53">
+                  <c:v>112</c:v>
+                </c:pt>
+                <c:pt idx="54">
+                  <c:v>114</c:v>
+                </c:pt>
+                <c:pt idx="55">
+                  <c:v>116</c:v>
+                </c:pt>
+                <c:pt idx="56">
+                  <c:v>118</c:v>
+                </c:pt>
+                <c:pt idx="57">
+                  <c:v>120</c:v>
+                </c:pt>
+                <c:pt idx="58">
+                  <c:v>122</c:v>
+                </c:pt>
+                <c:pt idx="59">
+                  <c:v>124</c:v>
+                </c:pt>
+                <c:pt idx="60">
+                  <c:v>126</c:v>
+                </c:pt>
+                <c:pt idx="61">
+                  <c:v>128</c:v>
+                </c:pt>
+                <c:pt idx="62">
+                  <c:v>130</c:v>
+                </c:pt>
+                <c:pt idx="63">
+                  <c:v>132</c:v>
+                </c:pt>
+                <c:pt idx="64">
+                  <c:v>134</c:v>
+                </c:pt>
+                <c:pt idx="65">
+                  <c:v>136</c:v>
+                </c:pt>
+                <c:pt idx="66">
+                  <c:v>138</c:v>
+                </c:pt>
+                <c:pt idx="67">
+                  <c:v>140</c:v>
+                </c:pt>
+                <c:pt idx="68">
+                  <c:v>142</c:v>
+                </c:pt>
+                <c:pt idx="69">
+                  <c:v>144</c:v>
+                </c:pt>
+                <c:pt idx="70">
+                  <c:v>146</c:v>
+                </c:pt>
+                <c:pt idx="71">
+                  <c:v>148</c:v>
+                </c:pt>
+                <c:pt idx="72">
+                  <c:v>150</c:v>
+                </c:pt>
+                <c:pt idx="73">
+                  <c:v>152</c:v>
+                </c:pt>
+                <c:pt idx="74">
+                  <c:v>154</c:v>
+                </c:pt>
+                <c:pt idx="75">
+                  <c:v>156</c:v>
+                </c:pt>
+                <c:pt idx="76">
+                  <c:v>158</c:v>
+                </c:pt>
+                <c:pt idx="77">
+                  <c:v>160</c:v>
+                </c:pt>
+                <c:pt idx="78">
+                  <c:v>162</c:v>
+                </c:pt>
+                <c:pt idx="79">
+                  <c:v>164</c:v>
+                </c:pt>
+                <c:pt idx="80">
+                  <c:v>166</c:v>
+                </c:pt>
+                <c:pt idx="81">
+                  <c:v>168</c:v>
+                </c:pt>
+                <c:pt idx="82">
+                  <c:v>170</c:v>
+                </c:pt>
+                <c:pt idx="83">
+                  <c:v>172</c:v>
+                </c:pt>
+                <c:pt idx="84">
+                  <c:v>174</c:v>
+                </c:pt>
+                <c:pt idx="85">
+                  <c:v>176</c:v>
+                </c:pt>
+                <c:pt idx="86">
+                  <c:v>178</c:v>
+                </c:pt>
+                <c:pt idx="87">
+                  <c:v>180</c:v>
+                </c:pt>
+                <c:pt idx="88">
+                  <c:v>182</c:v>
+                </c:pt>
+                <c:pt idx="89">
+                  <c:v>184</c:v>
+                </c:pt>
+                <c:pt idx="90">
+                  <c:v>186</c:v>
+                </c:pt>
+                <c:pt idx="91">
+                  <c:v>188</c:v>
+                </c:pt>
+                <c:pt idx="92">
+                  <c:v>190</c:v>
+                </c:pt>
+                <c:pt idx="93">
+                  <c:v>192</c:v>
+                </c:pt>
+                <c:pt idx="94">
+                  <c:v>194</c:v>
+                </c:pt>
+                <c:pt idx="95">
+                  <c:v>196</c:v>
+                </c:pt>
+                <c:pt idx="96">
+                  <c:v>198</c:v>
+                </c:pt>
+                <c:pt idx="97">
+                  <c:v>200</c:v>
+                </c:pt>
+                <c:pt idx="98">
+                  <c:v>202</c:v>
+                </c:pt>
+                <c:pt idx="99">
+                  <c:v>204</c:v>
+                </c:pt>
+                <c:pt idx="100">
+                  <c:v>206</c:v>
+                </c:pt>
+                <c:pt idx="101">
+                  <c:v>208</c:v>
+                </c:pt>
+                <c:pt idx="102">
+                  <c:v>210</c:v>
+                </c:pt>
+                <c:pt idx="103">
+                  <c:v>212</c:v>
+                </c:pt>
+                <c:pt idx="104">
+                  <c:v>214</c:v>
+                </c:pt>
+                <c:pt idx="105">
+                  <c:v>216</c:v>
+                </c:pt>
+                <c:pt idx="106">
+                  <c:v>218</c:v>
+                </c:pt>
+                <c:pt idx="107">
+                  <c:v>220</c:v>
+                </c:pt>
+                <c:pt idx="108">
+                  <c:v>222</c:v>
+                </c:pt>
+                <c:pt idx="109">
+                  <c:v>224</c:v>
+                </c:pt>
+                <c:pt idx="110">
+                  <c:v>226</c:v>
+                </c:pt>
+                <c:pt idx="111">
+                  <c:v>228</c:v>
+                </c:pt>
+                <c:pt idx="112">
+                  <c:v>230</c:v>
+                </c:pt>
+                <c:pt idx="113">
+                  <c:v>232</c:v>
+                </c:pt>
+                <c:pt idx="114">
+                  <c:v>234</c:v>
+                </c:pt>
+                <c:pt idx="115">
+                  <c:v>236</c:v>
+                </c:pt>
+                <c:pt idx="116">
+                  <c:v>238</c:v>
+                </c:pt>
+                <c:pt idx="117">
+                  <c:v>240</c:v>
+                </c:pt>
+                <c:pt idx="118">
+                  <c:v>242</c:v>
+                </c:pt>
+                <c:pt idx="119">
+                  <c:v>244</c:v>
+                </c:pt>
+                <c:pt idx="120">
+                  <c:v>246</c:v>
+                </c:pt>
+                <c:pt idx="121">
+                  <c:v>248</c:v>
+                </c:pt>
+                <c:pt idx="122">
+                  <c:v>250</c:v>
+                </c:pt>
+                <c:pt idx="123">
+                  <c:v>252</c:v>
+                </c:pt>
+                <c:pt idx="124">
+                  <c:v>254</c:v>
+                </c:pt>
+                <c:pt idx="125">
+                  <c:v>256</c:v>
+                </c:pt>
+                <c:pt idx="126">
+                  <c:v>258</c:v>
+                </c:pt>
+                <c:pt idx="127">
+                  <c:v>260</c:v>
+                </c:pt>
+                <c:pt idx="128">
+                  <c:v>262</c:v>
+                </c:pt>
+                <c:pt idx="129">
+                  <c:v>264</c:v>
+                </c:pt>
+                <c:pt idx="130">
+                  <c:v>266</c:v>
+                </c:pt>
+                <c:pt idx="131">
+                  <c:v>268</c:v>
+                </c:pt>
+                <c:pt idx="132">
+                  <c:v>270</c:v>
+                </c:pt>
+                <c:pt idx="133">
+                  <c:v>272</c:v>
+                </c:pt>
+                <c:pt idx="134">
+                  <c:v>274</c:v>
+                </c:pt>
+                <c:pt idx="135">
+                  <c:v>276</c:v>
+                </c:pt>
+                <c:pt idx="136">
+                  <c:v>278</c:v>
+                </c:pt>
+                <c:pt idx="137">
+                  <c:v>280</c:v>
+                </c:pt>
+                <c:pt idx="138">
+                  <c:v>282</c:v>
+                </c:pt>
+                <c:pt idx="139">
+                  <c:v>284</c:v>
+                </c:pt>
+                <c:pt idx="140">
+                  <c:v>286</c:v>
+                </c:pt>
+                <c:pt idx="141">
+                  <c:v>288</c:v>
+                </c:pt>
+                <c:pt idx="142">
+                  <c:v>290</c:v>
+                </c:pt>
+                <c:pt idx="143">
+                  <c:v>292</c:v>
+                </c:pt>
+                <c:pt idx="144">
+                  <c:v>294</c:v>
+                </c:pt>
+                <c:pt idx="145">
+                  <c:v>296</c:v>
+                </c:pt>
+                <c:pt idx="146">
+                  <c:v>298</c:v>
+                </c:pt>
+                <c:pt idx="147">
+                  <c:v>300</c:v>
+                </c:pt>
+              </c:numCache>
+            </c:numRef>
+          </c:xVal>
+          <c:yVal>
+            <c:numRef>
+              <c:f>Sheet1!$E$2:$E$149</c:f>
+              <c:numCache>
+                <c:formatCode>General</c:formatCode>
+                <c:ptCount val="148"/>
+                <c:pt idx="0">
+                  <c:v>18.58</c:v>
+                </c:pt>
+                <c:pt idx="1">
+                  <c:v>12.4</c:v>
+                </c:pt>
+                <c:pt idx="2">
+                  <c:v>12.43</c:v>
+                </c:pt>
+                <c:pt idx="3">
+                  <c:v>9.27</c:v>
+                </c:pt>
+                <c:pt idx="4">
+                  <c:v>9.31</c:v>
+                </c:pt>
+                <c:pt idx="5">
+                  <c:v>10.86</c:v>
+                </c:pt>
+                <c:pt idx="6">
+                  <c:v>11.64</c:v>
+                </c:pt>
+                <c:pt idx="7">
+                  <c:v>11.95</c:v>
+                </c:pt>
+                <c:pt idx="8">
+                  <c:v>12</c:v>
+                </c:pt>
+                <c:pt idx="9">
+                  <c:v>16.18</c:v>
+                </c:pt>
+                <c:pt idx="10">
+                  <c:v>12.3</c:v>
+                </c:pt>
+                <c:pt idx="11">
+                  <c:v>17.16</c:v>
+                </c:pt>
+                <c:pt idx="12">
+                  <c:v>17.18</c:v>
+                </c:pt>
+                <c:pt idx="13">
+                  <c:v>17.24</c:v>
+                </c:pt>
+                <c:pt idx="14">
+                  <c:v>12.04</c:v>
+                </c:pt>
+                <c:pt idx="15">
+                  <c:v>16.46</c:v>
+                </c:pt>
+                <c:pt idx="16">
+                  <c:v>23.21</c:v>
+                </c:pt>
+                <c:pt idx="17">
+                  <c:v>23.25</c:v>
+                </c:pt>
+                <c:pt idx="18">
+                  <c:v>21.22</c:v>
+                </c:pt>
+                <c:pt idx="19">
+                  <c:v>21.27</c:v>
+                </c:pt>
+                <c:pt idx="20">
+                  <c:v>29.73</c:v>
+                </c:pt>
+                <c:pt idx="21">
+                  <c:v>29.76</c:v>
+                </c:pt>
+                <c:pt idx="22">
+                  <c:v>20.11</c:v>
+                </c:pt>
+                <c:pt idx="23">
+                  <c:v>13.34</c:v>
+                </c:pt>
+                <c:pt idx="24">
+                  <c:v>13.35</c:v>
+                </c:pt>
+                <c:pt idx="25">
+                  <c:v>26.75</c:v>
+                </c:pt>
+                <c:pt idx="26">
+                  <c:v>35.34</c:v>
+                </c:pt>
+                <c:pt idx="27">
+                  <c:v>27.84</c:v>
+                </c:pt>
+                <c:pt idx="28">
+                  <c:v>22.46</c:v>
+                </c:pt>
+                <c:pt idx="29">
+                  <c:v>22.5</c:v>
+                </c:pt>
+                <c:pt idx="30">
+                  <c:v>22.52</c:v>
+                </c:pt>
+                <c:pt idx="31">
+                  <c:v>14.67</c:v>
+                </c:pt>
+                <c:pt idx="32">
+                  <c:v>22.53</c:v>
+                </c:pt>
+                <c:pt idx="33">
+                  <c:v>22.54</c:v>
+                </c:pt>
+                <c:pt idx="34">
+                  <c:v>22.56</c:v>
+                </c:pt>
+                <c:pt idx="35">
+                  <c:v>14.74</c:v>
+                </c:pt>
+                <c:pt idx="36">
+                  <c:v>22.77</c:v>
+                </c:pt>
+                <c:pt idx="37">
+                  <c:v>22.79</c:v>
+                </c:pt>
+                <c:pt idx="38">
+                  <c:v>22.81</c:v>
+                </c:pt>
+                <c:pt idx="39">
+                  <c:v>32.82</c:v>
+                </c:pt>
+                <c:pt idx="40">
+                  <c:v>32.86</c:v>
+                </c:pt>
+                <c:pt idx="41">
+                  <c:v>32.88</c:v>
+                </c:pt>
+                <c:pt idx="42">
+                  <c:v>32.9</c:v>
+                </c:pt>
+                <c:pt idx="43">
+                  <c:v>22.86</c:v>
+                </c:pt>
+                <c:pt idx="44">
+                  <c:v>22.86</c:v>
+                </c:pt>
+                <c:pt idx="45">
+                  <c:v>22.86</c:v>
+                </c:pt>
+                <c:pt idx="46">
+                  <c:v>22.86</c:v>
+                </c:pt>
+                <c:pt idx="47">
+                  <c:v>22.86</c:v>
+                </c:pt>
+                <c:pt idx="48">
+                  <c:v>15.34</c:v>
+                </c:pt>
+                <c:pt idx="49">
+                  <c:v>15.36</c:v>
+                </c:pt>
+                <c:pt idx="50">
+                  <c:v>8.63</c:v>
+                </c:pt>
+                <c:pt idx="51">
+                  <c:v>8.63</c:v>
+                </c:pt>
+                <c:pt idx="52">
+                  <c:v>20.08</c:v>
+                </c:pt>
+                <c:pt idx="53">
+                  <c:v>20.1</c:v>
+                </c:pt>
+                <c:pt idx="54">
+                  <c:v>20.12</c:v>
+                </c:pt>
+                <c:pt idx="55">
+                  <c:v>20.13</c:v>
+                </c:pt>
+                <c:pt idx="56">
+                  <c:v>11.14</c:v>
+                </c:pt>
+                <c:pt idx="57">
+                  <c:v>11.15</c:v>
+                </c:pt>
+                <c:pt idx="58">
+                  <c:v>11.17</c:v>
+                </c:pt>
+                <c:pt idx="59">
+                  <c:v>37.02</c:v>
+                </c:pt>
+                <c:pt idx="60">
+                  <c:v>37.02</c:v>
+                </c:pt>
+                <c:pt idx="61">
+                  <c:v>28.89</c:v>
+                </c:pt>
+                <c:pt idx="62">
+                  <c:v>28.91</c:v>
+                </c:pt>
+                <c:pt idx="63">
+                  <c:v>29.54</c:v>
+                </c:pt>
+                <c:pt idx="64">
+                  <c:v>29.57</c:v>
+                </c:pt>
+                <c:pt idx="65">
+                  <c:v>29.59</c:v>
+                </c:pt>
+                <c:pt idx="66">
+                  <c:v>22.39</c:v>
+                </c:pt>
+                <c:pt idx="67">
+                  <c:v>23.46</c:v>
+                </c:pt>
+                <c:pt idx="68">
+                  <c:v>31.44</c:v>
+                </c:pt>
+                <c:pt idx="69">
+                  <c:v>31.46</c:v>
+                </c:pt>
+                <c:pt idx="70">
+                  <c:v>31.47</c:v>
+                </c:pt>
+                <c:pt idx="71">
+                  <c:v>31.49</c:v>
+                </c:pt>
+                <c:pt idx="72">
+                  <c:v>31.7</c:v>
+                </c:pt>
+                <c:pt idx="73">
+                  <c:v>31.72</c:v>
+                </c:pt>
+                <c:pt idx="74">
+                  <c:v>37.35</c:v>
+                </c:pt>
+                <c:pt idx="75">
+                  <c:v>37.38</c:v>
+                </c:pt>
+                <c:pt idx="76">
+                  <c:v>28.06</c:v>
+                </c:pt>
+                <c:pt idx="77">
+                  <c:v>28.06</c:v>
+                </c:pt>
+                <c:pt idx="78">
+                  <c:v>28.06</c:v>
+                </c:pt>
+                <c:pt idx="79">
+                  <c:v>28.06</c:v>
+                </c:pt>
+                <c:pt idx="80">
+                  <c:v>28.42</c:v>
+                </c:pt>
+                <c:pt idx="81">
+                  <c:v>28.44</c:v>
+                </c:pt>
+                <c:pt idx="82">
+                  <c:v>28.46</c:v>
+                </c:pt>
+                <c:pt idx="83">
+                  <c:v>28.51</c:v>
+                </c:pt>
+                <c:pt idx="84">
+                  <c:v>28.54</c:v>
+                </c:pt>
+                <c:pt idx="85">
+                  <c:v>20.18</c:v>
+                </c:pt>
+                <c:pt idx="86">
+                  <c:v>9.91</c:v>
+                </c:pt>
+                <c:pt idx="87">
+                  <c:v>24.59</c:v>
+                </c:pt>
+                <c:pt idx="88">
+                  <c:v>24.61</c:v>
+                </c:pt>
+                <c:pt idx="89">
+                  <c:v>31.26</c:v>
+                </c:pt>
+                <c:pt idx="90">
+                  <c:v>31.28</c:v>
+                </c:pt>
+                <c:pt idx="91">
+                  <c:v>31.29</c:v>
+                </c:pt>
+                <c:pt idx="92">
+                  <c:v>21.73</c:v>
+                </c:pt>
+                <c:pt idx="93">
+                  <c:v>21.75</c:v>
+                </c:pt>
+                <c:pt idx="94">
+                  <c:v>21.78</c:v>
+                </c:pt>
+                <c:pt idx="95">
+                  <c:v>15.1</c:v>
+                </c:pt>
+                <c:pt idx="96">
+                  <c:v>15.12</c:v>
+                </c:pt>
+                <c:pt idx="97">
+                  <c:v>32.9</c:v>
+                </c:pt>
+                <c:pt idx="98">
+                  <c:v>30.58</c:v>
+                </c:pt>
+                <c:pt idx="99">
+                  <c:v>30.62</c:v>
+                </c:pt>
+                <c:pt idx="100">
+                  <c:v>30.66</c:v>
+                </c:pt>
+                <c:pt idx="101">
+                  <c:v>30.71</c:v>
+                </c:pt>
+                <c:pt idx="102">
+                  <c:v>23.24</c:v>
+                </c:pt>
+                <c:pt idx="103">
+                  <c:v>20.14</c:v>
+                </c:pt>
+                <c:pt idx="104">
+                  <c:v>20.16</c:v>
+                </c:pt>
+                <c:pt idx="105">
+                  <c:v>20.18</c:v>
+                </c:pt>
+                <c:pt idx="106">
+                  <c:v>20.22</c:v>
+                </c:pt>
+                <c:pt idx="107">
+                  <c:v>20.24</c:v>
+                </c:pt>
+                <c:pt idx="108">
+                  <c:v>25.47</c:v>
+                </c:pt>
+                <c:pt idx="109">
+                  <c:v>25.5</c:v>
+                </c:pt>
+                <c:pt idx="110">
+                  <c:v>18.28</c:v>
+                </c:pt>
+                <c:pt idx="111">
+                  <c:v>18.32</c:v>
+                </c:pt>
+                <c:pt idx="112">
+                  <c:v>26.21</c:v>
+                </c:pt>
+                <c:pt idx="113">
+                  <c:v>21.15</c:v>
+                </c:pt>
+                <c:pt idx="114">
+                  <c:v>17.77</c:v>
+                </c:pt>
+                <c:pt idx="115">
+                  <c:v>24.09</c:v>
+                </c:pt>
+                <c:pt idx="116">
+                  <c:v>29.19</c:v>
+                </c:pt>
+                <c:pt idx="117">
+                  <c:v>21.3</c:v>
+                </c:pt>
+                <c:pt idx="118">
+                  <c:v>21.34</c:v>
+                </c:pt>
+                <c:pt idx="119">
+                  <c:v>19.97</c:v>
+                </c:pt>
+                <c:pt idx="120">
+                  <c:v>25.27</c:v>
+                </c:pt>
+                <c:pt idx="121">
+                  <c:v>18.94</c:v>
+                </c:pt>
+                <c:pt idx="122">
+                  <c:v>18.96</c:v>
+                </c:pt>
+                <c:pt idx="123">
+                  <c:v>19</c:v>
+                </c:pt>
+                <c:pt idx="124">
+                  <c:v>19.02</c:v>
+                </c:pt>
+                <c:pt idx="125">
+                  <c:v>19.04</c:v>
+                </c:pt>
+                <c:pt idx="126">
+                  <c:v>13.7</c:v>
+                </c:pt>
+                <c:pt idx="127">
+                  <c:v>25.82</c:v>
+                </c:pt>
+                <c:pt idx="128">
+                  <c:v>36.22</c:v>
+                </c:pt>
+                <c:pt idx="129">
+                  <c:v>34.01</c:v>
+                </c:pt>
+                <c:pt idx="130">
+                  <c:v>34.05</c:v>
+                </c:pt>
+                <c:pt idx="131">
+                  <c:v>23.98</c:v>
+                </c:pt>
+                <c:pt idx="132">
+                  <c:v>24</c:v>
+                </c:pt>
+                <c:pt idx="133">
+                  <c:v>41.82</c:v>
+                </c:pt>
+                <c:pt idx="134">
+                  <c:v>34.64</c:v>
+                </c:pt>
+                <c:pt idx="135">
+                  <c:v>41.88</c:v>
+                </c:pt>
+                <c:pt idx="136">
+                  <c:v>41.89</c:v>
+                </c:pt>
+                <c:pt idx="137">
+                  <c:v>41.89</c:v>
+                </c:pt>
+                <c:pt idx="138">
+                  <c:v>41.89</c:v>
+                </c:pt>
+                <c:pt idx="139">
+                  <c:v>41.89</c:v>
+                </c:pt>
+                <c:pt idx="140">
+                  <c:v>34.54</c:v>
+                </c:pt>
+                <c:pt idx="141">
+                  <c:v>34.55</c:v>
+                </c:pt>
+                <c:pt idx="142">
+                  <c:v>34.57</c:v>
+                </c:pt>
+                <c:pt idx="143">
+                  <c:v>34.58</c:v>
+                </c:pt>
+                <c:pt idx="144">
+                  <c:v>34.62</c:v>
+                </c:pt>
+                <c:pt idx="145">
+                  <c:v>34.64</c:v>
+                </c:pt>
+                <c:pt idx="146">
+                  <c:v>34.66</c:v>
+                </c:pt>
+                <c:pt idx="147">
+                  <c:v>16.75</c:v>
                 </c:pt>
               </c:numCache>
             </c:numRef>
@@ -5294,6 +9606,7 @@
               <a:rPr lang="en-US" dirty="0"/>
               <a:t>Full-run values, UNSMOOTHED and at full resolution (the charts are drawn from a 180-point sampling with a 15-sample rolling mean):
   SGLang: prefill max 100.0% / mean 95.7% / final 96.6%; decode max 54.9% / mean 28.0% / final 16.0%  (2668 samples over 5338s)
+  Ours: prefill max 99.7% / mean 79.4% / final 53.8%; decode max 55.4% / mean 28.2% / final 16.0%  (2669 samples over 5342s)
 token_usage is NOT this quantity: SGLang defines it as (max_total - available - evictable) / max_total, so a pool 100% full of reusable prefix cache and an empty one both report ~0. The sampler records both so they stay distinguishable.
 Charts are native: right-click &gt; Edit Data, or the Chart Design / Format tabs.</a:t>
             </a:r>
@@ -5385,6 +9698,7 @@
               <a:rPr lang="en-US" dirty="0"/>
               <a:t>Full-run values, UNSMOOTHED and at full resolution (the charts are drawn from a 180-point sampling with a 15-sample rolling mean):
   SGLang: prefill max 100.0% / mean 95.7% / final 96.6%; decode max 54.9% / mean 28.0% / final 16.0%  (2668 samples over 5338s)
+  Ours: prefill max 99.7% / mean 79.4% / final 53.8%; decode max 55.4% / mean 28.2% / final 16.0%  (2669 samples over 5342s)
 token_usage is NOT this quantity: SGLang defines it as (max_total - available - evictable) / max_total, so a pool 100% full of reusable prefix cache and an empty one both report ~0. The sampler records both so they stay distinguishable.
 Charts are native: right-click &gt; Edit Data, or the Chart Design / Format tabs.</a:t>
             </a:r>
@@ -6148,7 +10462,131 @@
       </p:sp>
       <p:sp>
         <p:nvSpPr>
-          <p:cNvPr id="9" name="Text 6"/>
+          <p:cNvPr id="9" name="Shape 6"/>
+          <p:cNvSpPr/>
+          <p:nvPr/>
+        </p:nvSpPr>
+        <p:spPr>
+          <a:xfrm>
+            <a:off x="6126480" y="5468112"/>
+            <a:ext cx="384048" cy="0"/>
+          </a:xfrm>
+          <a:prstGeom prst="line">
+            <a:avLst/>
+          </a:prstGeom>
+          <a:noFill/>
+          <a:ln w="28575">
+            <a:solidFill>
+              <a:srgbClr val="009E73"/>
+            </a:solidFill>
+            <a:prstDash val="solid"/>
+          </a:ln>
+        </p:spPr>
+      </p:sp>
+      <p:sp>
+        <p:nvSpPr>
+          <p:cNvPr id="10" name="Text 7"/>
+          <p:cNvSpPr/>
+          <p:nvPr/>
+        </p:nvSpPr>
+        <p:spPr>
+          <a:xfrm>
+            <a:off x="6583680" y="5303520"/>
+            <a:ext cx="2194560" cy="365760"/>
+          </a:xfrm>
+          <a:prstGeom prst="rect">
+            <a:avLst/>
+          </a:prstGeom>
+          <a:noFill/>
+          <a:ln/>
+        </p:spPr>
+        <p:txBody>
+          <a:bodyPr wrap="square" lIns="0" tIns="0" rIns="0" bIns="0" rtlCol="0" anchor="ctr"/>
+          <a:lstStyle/>
+          <a:p>
+            <a:pPr indent="0" marL="0">
+              <a:buNone/>
+            </a:pPr>
+            <a:r>
+              <a:rPr lang="en-US" sz="1200" dirty="0">
+                <a:solidFill>
+                  <a:srgbClr val="1A1A1A"/>
+                </a:solidFill>
+                <a:latin typeface="Times New Roman" pitchFamily="34" charset="0"/>
+                <a:ea typeface="Times New Roman" pitchFamily="34" charset="-122"/>
+                <a:cs typeface="Times New Roman" pitchFamily="34" charset="-120"/>
+              </a:rPr>
+              <a:t>Ours Prefill</a:t>
+            </a:r>
+            <a:endParaRPr lang="en-US" sz="1200" dirty="0"/>
+          </a:p>
+        </p:txBody>
+      </p:sp>
+      <p:sp>
+        <p:nvSpPr>
+          <p:cNvPr id="11" name="Shape 8"/>
+          <p:cNvSpPr/>
+          <p:nvPr/>
+        </p:nvSpPr>
+        <p:spPr>
+          <a:xfrm>
+            <a:off x="8778240" y="5468112"/>
+            <a:ext cx="384048" cy="0"/>
+          </a:xfrm>
+          <a:prstGeom prst="line">
+            <a:avLst/>
+          </a:prstGeom>
+          <a:noFill/>
+          <a:ln w="28575">
+            <a:solidFill>
+              <a:srgbClr val="7FD9BE"/>
+            </a:solidFill>
+            <a:prstDash val="solid"/>
+          </a:ln>
+        </p:spPr>
+      </p:sp>
+      <p:sp>
+        <p:nvSpPr>
+          <p:cNvPr id="12" name="Text 9"/>
+          <p:cNvSpPr/>
+          <p:nvPr/>
+        </p:nvSpPr>
+        <p:spPr>
+          <a:xfrm>
+            <a:off x="9235440" y="5303520"/>
+            <a:ext cx="2194560" cy="365760"/>
+          </a:xfrm>
+          <a:prstGeom prst="rect">
+            <a:avLst/>
+          </a:prstGeom>
+          <a:noFill/>
+          <a:ln/>
+        </p:spPr>
+        <p:txBody>
+          <a:bodyPr wrap="square" lIns="0" tIns="0" rIns="0" bIns="0" rtlCol="0" anchor="ctr"/>
+          <a:lstStyle/>
+          <a:p>
+            <a:pPr indent="0" marL="0">
+              <a:buNone/>
+            </a:pPr>
+            <a:r>
+              <a:rPr lang="en-US" sz="1200" dirty="0">
+                <a:solidFill>
+                  <a:srgbClr val="1A1A1A"/>
+                </a:solidFill>
+                <a:latin typeface="Times New Roman" pitchFamily="34" charset="0"/>
+                <a:ea typeface="Times New Roman" pitchFamily="34" charset="-122"/>
+                <a:cs typeface="Times New Roman" pitchFamily="34" charset="-120"/>
+              </a:rPr>
+              <a:t>Ours Decode</a:t>
+            </a:r>
+            <a:endParaRPr lang="en-US" sz="1200" dirty="0"/>
+          </a:p>
+        </p:txBody>
+      </p:sp>
+      <p:sp>
+        <p:nvSpPr>
+          <p:cNvPr id="13" name="Text 10"/>
           <p:cNvSpPr/>
           <p:nvPr/>
         </p:nvSpPr>
@@ -6430,7 +10868,131 @@
       </p:sp>
       <p:sp>
         <p:nvSpPr>
-          <p:cNvPr id="9" name="Text 6"/>
+          <p:cNvPr id="9" name="Shape 6"/>
+          <p:cNvSpPr/>
+          <p:nvPr/>
+        </p:nvSpPr>
+        <p:spPr>
+          <a:xfrm>
+            <a:off x="6126480" y="5468112"/>
+            <a:ext cx="384048" cy="0"/>
+          </a:xfrm>
+          <a:prstGeom prst="line">
+            <a:avLst/>
+          </a:prstGeom>
+          <a:noFill/>
+          <a:ln w="28575">
+            <a:solidFill>
+              <a:srgbClr val="009E73"/>
+            </a:solidFill>
+            <a:prstDash val="solid"/>
+          </a:ln>
+        </p:spPr>
+      </p:sp>
+      <p:sp>
+        <p:nvSpPr>
+          <p:cNvPr id="10" name="Text 7"/>
+          <p:cNvSpPr/>
+          <p:nvPr/>
+        </p:nvSpPr>
+        <p:spPr>
+          <a:xfrm>
+            <a:off x="6583680" y="5303520"/>
+            <a:ext cx="2194560" cy="365760"/>
+          </a:xfrm>
+          <a:prstGeom prst="rect">
+            <a:avLst/>
+          </a:prstGeom>
+          <a:noFill/>
+          <a:ln/>
+        </p:spPr>
+        <p:txBody>
+          <a:bodyPr wrap="square" lIns="0" tIns="0" rIns="0" bIns="0" rtlCol="0" anchor="ctr"/>
+          <a:lstStyle/>
+          <a:p>
+            <a:pPr indent="0" marL="0">
+              <a:buNone/>
+            </a:pPr>
+            <a:r>
+              <a:rPr lang="en-US" sz="1200" dirty="0">
+                <a:solidFill>
+                  <a:srgbClr val="1A1A1A"/>
+                </a:solidFill>
+                <a:latin typeface="Times New Roman" pitchFamily="34" charset="0"/>
+                <a:ea typeface="Times New Roman" pitchFamily="34" charset="-122"/>
+                <a:cs typeface="Times New Roman" pitchFamily="34" charset="-120"/>
+              </a:rPr>
+              <a:t>Ours Prefill</a:t>
+            </a:r>
+            <a:endParaRPr lang="en-US" sz="1200" dirty="0"/>
+          </a:p>
+        </p:txBody>
+      </p:sp>
+      <p:sp>
+        <p:nvSpPr>
+          <p:cNvPr id="11" name="Shape 8"/>
+          <p:cNvSpPr/>
+          <p:nvPr/>
+        </p:nvSpPr>
+        <p:spPr>
+          <a:xfrm>
+            <a:off x="8778240" y="5468112"/>
+            <a:ext cx="384048" cy="0"/>
+          </a:xfrm>
+          <a:prstGeom prst="line">
+            <a:avLst/>
+          </a:prstGeom>
+          <a:noFill/>
+          <a:ln w="28575">
+            <a:solidFill>
+              <a:srgbClr val="7FD9BE"/>
+            </a:solidFill>
+            <a:prstDash val="solid"/>
+          </a:ln>
+        </p:spPr>
+      </p:sp>
+      <p:sp>
+        <p:nvSpPr>
+          <p:cNvPr id="12" name="Text 9"/>
+          <p:cNvSpPr/>
+          <p:nvPr/>
+        </p:nvSpPr>
+        <p:spPr>
+          <a:xfrm>
+            <a:off x="9235440" y="5303520"/>
+            <a:ext cx="2194560" cy="365760"/>
+          </a:xfrm>
+          <a:prstGeom prst="rect">
+            <a:avLst/>
+          </a:prstGeom>
+          <a:noFill/>
+          <a:ln/>
+        </p:spPr>
+        <p:txBody>
+          <a:bodyPr wrap="square" lIns="0" tIns="0" rIns="0" bIns="0" rtlCol="0" anchor="ctr"/>
+          <a:lstStyle/>
+          <a:p>
+            <a:pPr indent="0" marL="0">
+              <a:buNone/>
+            </a:pPr>
+            <a:r>
+              <a:rPr lang="en-US" sz="1200" dirty="0">
+                <a:solidFill>
+                  <a:srgbClr val="1A1A1A"/>
+                </a:solidFill>
+                <a:latin typeface="Times New Roman" pitchFamily="34" charset="0"/>
+                <a:ea typeface="Times New Roman" pitchFamily="34" charset="-122"/>
+                <a:cs typeface="Times New Roman" pitchFamily="34" charset="-120"/>
+              </a:rPr>
+              <a:t>Ours Decode</a:t>
+            </a:r>
+            <a:endParaRPr lang="en-US" sz="1200" dirty="0"/>
+          </a:p>
+        </p:txBody>
+      </p:sp>
+      <p:sp>
+        <p:nvSpPr>
+          <p:cNvPr id="13" name="Text 10"/>
           <p:cNvSpPr/>
           <p:nvPr/>
         </p:nvSpPr>
@@ -6461,7 +11023,7 @@
                 <a:ea typeface="Times New Roman" pitchFamily="34" charset="-122"/>
                 <a:cs typeface="Times New Roman" pitchFamily="34" charset="-120"/>
               </a:rPr>
-              <a:t>The prefill pool reaches ~95% within about 50 s of a 5338 s run — the working set of these agent sessions is several times the pool, so saturation is immediate and permanent, not a slow warm-up.</a:t>
+              <a:t>The prefill pool reaches ~95% within about 50 s of a 5342 s run — the working set of these agent sessions is several times the pool, so saturation is immediate and permanent, not a slow warm-up.</a:t>
             </a:r>
             <a:endParaRPr lang="en-US" sz="1100" dirty="0"/>
           </a:p>
